--- a/static/ppts/G7_Math_T4_Graphs.pptx
+++ b/static/ppts/G7_Math_T4_Graphs.pptx
@@ -15,12 +15,9 @@
     <p:sldId id="263" r:id="rId9"/>
     <p:sldId id="264" r:id="rId10"/>
     <p:sldId id="265" r:id="rId11"/>
-    <p:sldId id="266" r:id="rId12"/>
-    <p:sldId id="267" r:id="rId13"/>
-    <p:sldId id="268" r:id="rId14"/>
   </p:sldIdLst>
   <p:notesMasterIdLst>
-    <p:notesMasterId r:id="rId15"/>
+    <p:notesMasterId r:id="rId12"/>
   </p:notesMasterIdLst>
   <p:sldSz cx="9144000" cy="5143500"/>
   <p:notesSz cx="5143500" cy="9144000"/>
@@ -626,270 +623,6 @@
             <a:fld id="{F7021451-1387-4CA6-816F-3879F97B5CBC}" type="slidenum">
               <a:rPr lang="en-US"/>
               <a:t>10</a:t>
-            </a:fld>
-            <a:endParaRPr lang="en-US"/>
-          </a:p>
-        </p:txBody>
-      </p:sp>
-    </p:spTree>
-    <p:extLst>
-      <p:ext uri="{BB962C8B-B14F-4D97-AF65-F5344CB8AC3E}">
-        <p14:creationId xmlns:p14="http://schemas.microsoft.com/office/powerpoint/2010/main" val="1024086991"/>
-      </p:ext>
-    </p:extLst>
-  </p:cSld>
-  <p:clrMapOvr>
-    <a:masterClrMapping/>
-  </p:clrMapOvr>
-</p:notes>
-</file>
-
-<file path=ppt/notesSlides/notesSlide11.xml><?xml version="1.0" encoding="utf-8"?>
-<p:notes xmlns:a="http://schemas.openxmlformats.org/drawingml/2006/main" xmlns:r="http://schemas.openxmlformats.org/officeDocument/2006/relationships" xmlns:p="http://schemas.openxmlformats.org/presentationml/2006/main">
-  <p:cSld>
-    <p:spTree>
-      <p:nvGrpSpPr>
-        <p:cNvPr id="1" name=""/>
-        <p:cNvGrpSpPr/>
-        <p:nvPr/>
-      </p:nvGrpSpPr>
-      <p:grpSpPr>
-        <a:xfrm>
-          <a:off x="0" y="0"/>
-          <a:ext cx="0" cy="0"/>
-          <a:chOff x="0" y="0"/>
-          <a:chExt cx="0" cy="0"/>
-        </a:xfrm>
-      </p:grpSpPr>
-      <p:sp>
-        <p:nvSpPr>
-          <p:cNvPr id="2" name="Slide Image Placeholder 1"/>
-          <p:cNvSpPr>
-            <a:spLocks noGrp="1" noRot="1" noChangeAspect="1"/>
-          </p:cNvSpPr>
-          <p:nvPr>
-            <p:ph type="sldImg"/>
-          </p:nvPr>
-        </p:nvSpPr>
-        <p:spPr/>
-      </p:sp>
-      <p:sp>
-        <p:nvSpPr>
-          <p:cNvPr id="3" name="Notes Placeholder 2"/>
-          <p:cNvSpPr>
-            <a:spLocks noGrp="1"/>
-          </p:cNvSpPr>
-          <p:nvPr>
-            <p:ph type="body" idx="1"/>
-          </p:nvPr>
-        </p:nvSpPr>
-        <p:spPr/>
-        <p:txBody>
-          <a:bodyPr/>
-          <a:lstStyle/>
-          <a:p>
-            <a:r>
-              <a:rPr lang="en-US" dirty="0"/>
-              <a:t/>
-            </a:r>
-            <a:endParaRPr lang="en-US" dirty="0"/>
-          </a:p>
-        </p:txBody>
-      </p:sp>
-      <p:sp>
-        <p:nvSpPr>
-          <p:cNvPr id="4" name="Slide Number Placeholder 3"/>
-          <p:cNvSpPr>
-            <a:spLocks noGrp="1"/>
-          </p:cNvSpPr>
-          <p:nvPr>
-            <p:ph type="sldNum" sz="quarter" idx="10"/>
-          </p:nvPr>
-        </p:nvSpPr>
-        <p:spPr/>
-        <p:txBody>
-          <a:bodyPr/>
-          <a:lstStyle/>
-          <a:p>
-            <a:fld id="{F7021451-1387-4CA6-816F-3879F97B5CBC}" type="slidenum">
-              <a:rPr lang="en-US"/>
-              <a:t>11</a:t>
-            </a:fld>
-            <a:endParaRPr lang="en-US"/>
-          </a:p>
-        </p:txBody>
-      </p:sp>
-    </p:spTree>
-    <p:extLst>
-      <p:ext uri="{BB962C8B-B14F-4D97-AF65-F5344CB8AC3E}">
-        <p14:creationId xmlns:p14="http://schemas.microsoft.com/office/powerpoint/2010/main" val="1024086991"/>
-      </p:ext>
-    </p:extLst>
-  </p:cSld>
-  <p:clrMapOvr>
-    <a:masterClrMapping/>
-  </p:clrMapOvr>
-</p:notes>
-</file>
-
-<file path=ppt/notesSlides/notesSlide12.xml><?xml version="1.0" encoding="utf-8"?>
-<p:notes xmlns:a="http://schemas.openxmlformats.org/drawingml/2006/main" xmlns:r="http://schemas.openxmlformats.org/officeDocument/2006/relationships" xmlns:p="http://schemas.openxmlformats.org/presentationml/2006/main">
-  <p:cSld>
-    <p:spTree>
-      <p:nvGrpSpPr>
-        <p:cNvPr id="1" name=""/>
-        <p:cNvGrpSpPr/>
-        <p:nvPr/>
-      </p:nvGrpSpPr>
-      <p:grpSpPr>
-        <a:xfrm>
-          <a:off x="0" y="0"/>
-          <a:ext cx="0" cy="0"/>
-          <a:chOff x="0" y="0"/>
-          <a:chExt cx="0" cy="0"/>
-        </a:xfrm>
-      </p:grpSpPr>
-      <p:sp>
-        <p:nvSpPr>
-          <p:cNvPr id="2" name="Slide Image Placeholder 1"/>
-          <p:cNvSpPr>
-            <a:spLocks noGrp="1" noRot="1" noChangeAspect="1"/>
-          </p:cNvSpPr>
-          <p:nvPr>
-            <p:ph type="sldImg"/>
-          </p:nvPr>
-        </p:nvSpPr>
-        <p:spPr/>
-      </p:sp>
-      <p:sp>
-        <p:nvSpPr>
-          <p:cNvPr id="3" name="Notes Placeholder 2"/>
-          <p:cNvSpPr>
-            <a:spLocks noGrp="1"/>
-          </p:cNvSpPr>
-          <p:nvPr>
-            <p:ph type="body" idx="1"/>
-          </p:nvPr>
-        </p:nvSpPr>
-        <p:spPr/>
-        <p:txBody>
-          <a:bodyPr/>
-          <a:lstStyle/>
-          <a:p>
-            <a:r>
-              <a:rPr lang="en-US" dirty="0"/>
-              <a:t/>
-            </a:r>
-            <a:endParaRPr lang="en-US" dirty="0"/>
-          </a:p>
-        </p:txBody>
-      </p:sp>
-      <p:sp>
-        <p:nvSpPr>
-          <p:cNvPr id="4" name="Slide Number Placeholder 3"/>
-          <p:cNvSpPr>
-            <a:spLocks noGrp="1"/>
-          </p:cNvSpPr>
-          <p:nvPr>
-            <p:ph type="sldNum" sz="quarter" idx="10"/>
-          </p:nvPr>
-        </p:nvSpPr>
-        <p:spPr/>
-        <p:txBody>
-          <a:bodyPr/>
-          <a:lstStyle/>
-          <a:p>
-            <a:fld id="{F7021451-1387-4CA6-816F-3879F97B5CBC}" type="slidenum">
-              <a:rPr lang="en-US"/>
-              <a:t>12</a:t>
-            </a:fld>
-            <a:endParaRPr lang="en-US"/>
-          </a:p>
-        </p:txBody>
-      </p:sp>
-    </p:spTree>
-    <p:extLst>
-      <p:ext uri="{BB962C8B-B14F-4D97-AF65-F5344CB8AC3E}">
-        <p14:creationId xmlns:p14="http://schemas.microsoft.com/office/powerpoint/2010/main" val="1024086991"/>
-      </p:ext>
-    </p:extLst>
-  </p:cSld>
-  <p:clrMapOvr>
-    <a:masterClrMapping/>
-  </p:clrMapOvr>
-</p:notes>
-</file>
-
-<file path=ppt/notesSlides/notesSlide13.xml><?xml version="1.0" encoding="utf-8"?>
-<p:notes xmlns:a="http://schemas.openxmlformats.org/drawingml/2006/main" xmlns:r="http://schemas.openxmlformats.org/officeDocument/2006/relationships" xmlns:p="http://schemas.openxmlformats.org/presentationml/2006/main">
-  <p:cSld>
-    <p:spTree>
-      <p:nvGrpSpPr>
-        <p:cNvPr id="1" name=""/>
-        <p:cNvGrpSpPr/>
-        <p:nvPr/>
-      </p:nvGrpSpPr>
-      <p:grpSpPr>
-        <a:xfrm>
-          <a:off x="0" y="0"/>
-          <a:ext cx="0" cy="0"/>
-          <a:chOff x="0" y="0"/>
-          <a:chExt cx="0" cy="0"/>
-        </a:xfrm>
-      </p:grpSpPr>
-      <p:sp>
-        <p:nvSpPr>
-          <p:cNvPr id="2" name="Slide Image Placeholder 1"/>
-          <p:cNvSpPr>
-            <a:spLocks noGrp="1" noRot="1" noChangeAspect="1"/>
-          </p:cNvSpPr>
-          <p:nvPr>
-            <p:ph type="sldImg"/>
-          </p:nvPr>
-        </p:nvSpPr>
-        <p:spPr/>
-      </p:sp>
-      <p:sp>
-        <p:nvSpPr>
-          <p:cNvPr id="3" name="Notes Placeholder 2"/>
-          <p:cNvSpPr>
-            <a:spLocks noGrp="1"/>
-          </p:cNvSpPr>
-          <p:nvPr>
-            <p:ph type="body" idx="1"/>
-          </p:nvPr>
-        </p:nvSpPr>
-        <p:spPr/>
-        <p:txBody>
-          <a:bodyPr/>
-          <a:lstStyle/>
-          <a:p>
-            <a:r>
-              <a:rPr lang="en-US" dirty="0"/>
-              <a:t/>
-            </a:r>
-            <a:endParaRPr lang="en-US" dirty="0"/>
-          </a:p>
-        </p:txBody>
-      </p:sp>
-      <p:sp>
-        <p:nvSpPr>
-          <p:cNvPr id="4" name="Slide Number Placeholder 3"/>
-          <p:cNvSpPr>
-            <a:spLocks noGrp="1"/>
-          </p:cNvSpPr>
-          <p:nvPr>
-            <p:ph type="sldNum" sz="quarter" idx="10"/>
-          </p:nvPr>
-        </p:nvSpPr>
-        <p:spPr/>
-        <p:txBody>
-          <a:bodyPr/>
-          <a:lstStyle/>
-          <a:p>
-            <a:fld id="{F7021451-1387-4CA6-816F-3879F97B5CBC}" type="slidenum">
-              <a:rPr lang="en-US"/>
-              <a:t>13</a:t>
             </a:fld>
             <a:endParaRPr lang="en-US"/>
           </a:p>
@@ -1922,13 +1655,6 @@
 <file path=ppt/slides/slide1.xml><?xml version="1.0" encoding="utf-8"?>
 <p:sld xmlns:a="http://schemas.openxmlformats.org/drawingml/2006/main" xmlns:r="http://schemas.openxmlformats.org/officeDocument/2006/relationships" xmlns:p="http://schemas.openxmlformats.org/presentationml/2006/main">
   <p:cSld name="Slide 1">
-    <p:bg>
-      <p:bgPr>
-        <a:solidFill>
-          <a:srgbClr val="1B2A4A"/>
-        </a:solidFill>
-      </p:bgPr>
-    </p:bg>
     <p:spTree>
       <p:nvGrpSpPr>
         <p:cNvPr id="1" name=""/>
@@ -1951,8 +1677,28 @@
         </p:nvSpPr>
         <p:spPr>
           <a:xfrm>
-            <a:off x="0" y="4389120"/>
-            <a:ext cx="9144000" cy="54864"/>
+            <a:off x="0" y="0"/>
+            <a:ext cx="9144000" cy="5143500"/>
+          </a:xfrm>
+          <a:prstGeom prst="rect">
+            <a:avLst/>
+          </a:prstGeom>
+          <a:solidFill>
+            <a:srgbClr val="1B2A4A"/>
+          </a:solidFill>
+          <a:ln/>
+        </p:spPr>
+      </p:sp>
+      <p:sp>
+        <p:nvSpPr>
+          <p:cNvPr id="3" name="Shape 1"/>
+          <p:cNvSpPr/>
+          <p:nvPr/>
+        </p:nvSpPr>
+        <p:spPr>
+          <a:xfrm>
+            <a:off x="0" y="4777740"/>
+            <a:ext cx="9144000" cy="365760"/>
           </a:xfrm>
           <a:prstGeom prst="rect">
             <a:avLst/>
@@ -1965,36 +1711,14 @@
       </p:sp>
       <p:sp>
         <p:nvSpPr>
-          <p:cNvPr id="3" name="Shape 1"/>
-          <p:cNvSpPr/>
-          <p:nvPr/>
-        </p:nvSpPr>
-        <p:spPr>
-          <a:xfrm>
-            <a:off x="457200" y="365760"/>
-            <a:ext cx="1097280" cy="365760"/>
-          </a:xfrm>
-          <a:prstGeom prst="roundRect">
-            <a:avLst>
-              <a:gd name="adj" fmla="val 25000"/>
-            </a:avLst>
-          </a:prstGeom>
-          <a:solidFill>
-            <a:srgbClr val="C8372D"/>
-          </a:solidFill>
-          <a:ln/>
-        </p:spPr>
-      </p:sp>
-      <p:sp>
-        <p:nvSpPr>
           <p:cNvPr id="4" name="Text 2"/>
           <p:cNvSpPr/>
           <p:nvPr/>
         </p:nvSpPr>
         <p:spPr>
           <a:xfrm>
-            <a:off x="457200" y="365760"/>
-            <a:ext cx="1097280" cy="365760"/>
+            <a:off x="731520" y="1097280"/>
+            <a:ext cx="7680960" cy="457200"/>
           </a:xfrm>
           <a:prstGeom prst="rect">
             <a:avLst/>
@@ -2006,21 +1730,21 @@
           <a:bodyPr wrap="square" rtlCol="0" anchor="ctr"/>
           <a:lstStyle/>
           <a:p>
-            <a:pPr algn="ctr" indent="0" marL="0">
+            <a:pPr indent="0" marL="0">
               <a:buNone/>
             </a:pPr>
             <a:r>
-              <a:rPr lang="en-US" sz="1000" b="1" dirty="0">
-                <a:solidFill>
-                  <a:srgbClr val="FFFFFF"/>
+              <a:rPr lang="en-US" sz="1400" b="1" spc="400" kern="0" dirty="0">
+                <a:solidFill>
+                  <a:srgbClr val="C8372D"/>
                 </a:solidFill>
                 <a:latin typeface="Calibri" pitchFamily="34" charset="0"/>
                 <a:ea typeface="Calibri" pitchFamily="34" charset="-122"/>
                 <a:cs typeface="Calibri" pitchFamily="34" charset="-120"/>
               </a:rPr>
-              <a:t>MR ZOCCHI</a:t>
-            </a:r>
-            <a:endParaRPr lang="en-US" sz="1000" dirty="0"/>
+              <a:t>GRADE 7 MATHEMATICS</a:t>
+            </a:r>
+            <a:endParaRPr lang="en-US" sz="1400" dirty="0"/>
           </a:p>
         </p:txBody>
       </p:sp>
@@ -2032,8 +1756,8 @@
         </p:nvSpPr>
         <p:spPr>
           <a:xfrm>
-            <a:off x="457200" y="1371600"/>
-            <a:ext cx="8229600" cy="1828800"/>
+            <a:off x="731520" y="1645920"/>
+            <a:ext cx="7680960" cy="1463040"/>
           </a:xfrm>
           <a:prstGeom prst="rect">
             <a:avLst/>
@@ -2049,7 +1773,7 @@
               <a:buNone/>
             </a:pPr>
             <a:r>
-              <a:rPr lang="en-US" sz="3600" b="1" dirty="0">
+              <a:rPr lang="en-US" sz="4000" b="1" dirty="0">
                 <a:solidFill>
                   <a:srgbClr val="FFFFFF"/>
                 </a:solidFill>
@@ -2057,9 +1781,26 @@
                 <a:ea typeface="Georgia" pitchFamily="34" charset="-122"/>
                 <a:cs typeface="Georgia" pitchFamily="34" charset="-120"/>
               </a:rPr>
-              <a:t>Plotting Linear Graphs</a:t>
-            </a:r>
-            <a:endParaRPr lang="en-US" sz="3600" dirty="0"/>
+              <a:t>Plotting Linear</a:t>
+            </a:r>
+            <a:endParaRPr lang="en-US" sz="4000" dirty="0"/>
+          </a:p>
+          <a:p>
+            <a:pPr indent="0" marL="0">
+              <a:buNone/>
+            </a:pPr>
+            <a:r>
+              <a:rPr lang="en-US" sz="4000" b="1" dirty="0">
+                <a:solidFill>
+                  <a:srgbClr val="FFFFFF"/>
+                </a:solidFill>
+                <a:latin typeface="Georgia" pitchFamily="34" charset="0"/>
+                <a:ea typeface="Georgia" pitchFamily="34" charset="-122"/>
+                <a:cs typeface="Georgia" pitchFamily="34" charset="-120"/>
+              </a:rPr>
+              <a:t>Graphs</a:t>
+            </a:r>
+            <a:endParaRPr lang="en-US" sz="4000" dirty="0"/>
           </a:p>
         </p:txBody>
       </p:sp>
@@ -2071,8 +1812,8 @@
         </p:nvSpPr>
         <p:spPr>
           <a:xfrm>
-            <a:off x="457200" y="3840480"/>
-            <a:ext cx="3657600" cy="457200"/>
+            <a:off x="731520" y="3200400"/>
+            <a:ext cx="7680960" cy="548640"/>
           </a:xfrm>
           <a:prstGeom prst="rect">
             <a:avLst/>
@@ -2088,17 +1829,56 @@
               <a:buNone/>
             </a:pPr>
             <a:r>
-              <a:rPr lang="en-US" sz="1400" i="1" dirty="0">
-                <a:solidFill>
-                  <a:srgbClr val="E9C46A"/>
+              <a:rPr lang="en-US" sz="1600" i="1" dirty="0">
+                <a:solidFill>
+                  <a:srgbClr val="9B9690"/>
                 </a:solidFill>
                 <a:latin typeface="Calibri" pitchFamily="34" charset="0"/>
                 <a:ea typeface="Calibri" pitchFamily="34" charset="-122"/>
                 <a:cs typeface="Calibri" pitchFamily="34" charset="-120"/>
               </a:rPr>
-              <a:t>mrzocchi.com</a:t>
-            </a:r>
-            <a:endParaRPr lang="en-US" sz="1400" dirty="0"/>
+              <a:t>y = mx + c — the equation of a straight line</a:t>
+            </a:r>
+            <a:endParaRPr lang="en-US" sz="1600" dirty="0"/>
+          </a:p>
+        </p:txBody>
+      </p:sp>
+      <p:sp>
+        <p:nvSpPr>
+          <p:cNvPr id="7" name="Text 5"/>
+          <p:cNvSpPr/>
+          <p:nvPr/>
+        </p:nvSpPr>
+        <p:spPr>
+          <a:xfrm>
+            <a:off x="731520" y="4206240"/>
+            <a:ext cx="3657600" cy="365760"/>
+          </a:xfrm>
+          <a:prstGeom prst="rect">
+            <a:avLst/>
+          </a:prstGeom>
+          <a:noFill/>
+          <a:ln/>
+        </p:spPr>
+        <p:txBody>
+          <a:bodyPr wrap="square" rtlCol="0" anchor="ctr"/>
+          <a:lstStyle/>
+          <a:p>
+            <a:pPr indent="0" marL="0">
+              <a:buNone/>
+            </a:pPr>
+            <a:r>
+              <a:rPr lang="en-US" sz="1200" dirty="0">
+                <a:solidFill>
+                  <a:srgbClr val="6B6660"/>
+                </a:solidFill>
+                <a:latin typeface="Calibri" pitchFamily="34" charset="0"/>
+                <a:ea typeface="Calibri" pitchFamily="34" charset="-122"/>
+                <a:cs typeface="Calibri" pitchFamily="34" charset="-120"/>
+              </a:rPr>
+              <a:t>Mr Zocchi</a:t>
+            </a:r>
+            <a:endParaRPr lang="en-US" sz="1200" dirty="0"/>
           </a:p>
         </p:txBody>
       </p:sp>
@@ -2136,7 +1916,27 @@
         <p:spPr>
           <a:xfrm>
             <a:off x="0" y="0"/>
-            <a:ext cx="9144000" cy="54864"/>
+            <a:ext cx="9144000" cy="5143500"/>
+          </a:xfrm>
+          <a:prstGeom prst="rect">
+            <a:avLst/>
+          </a:prstGeom>
+          <a:solidFill>
+            <a:srgbClr val="1B2A4A"/>
+          </a:solidFill>
+          <a:ln/>
+        </p:spPr>
+      </p:sp>
+      <p:sp>
+        <p:nvSpPr>
+          <p:cNvPr id="3" name="Shape 1"/>
+          <p:cNvSpPr/>
+          <p:nvPr/>
+        </p:nvSpPr>
+        <p:spPr>
+          <a:xfrm>
+            <a:off x="0" y="4777740"/>
+            <a:ext cx="9144000" cy="365760"/>
           </a:xfrm>
           <a:prstGeom prst="rect">
             <a:avLst/>
@@ -2149,14 +1949,14 @@
       </p:sp>
       <p:sp>
         <p:nvSpPr>
-          <p:cNvPr id="3" name="Text 1"/>
-          <p:cNvSpPr/>
-          <p:nvPr/>
-        </p:nvSpPr>
-        <p:spPr>
-          <a:xfrm>
-            <a:off x="457200" y="228600"/>
-            <a:ext cx="8229600" cy="548640"/>
+          <p:cNvPr id="4" name="Text 2"/>
+          <p:cNvSpPr/>
+          <p:nvPr/>
+        </p:nvSpPr>
+        <p:spPr>
+          <a:xfrm>
+            <a:off x="731520" y="1371600"/>
+            <a:ext cx="7680960" cy="914400"/>
           </a:xfrm>
           <a:prstGeom prst="rect">
             <a:avLst/>
@@ -2165,84 +1965,37 @@
           <a:ln/>
         </p:spPr>
         <p:txBody>
-          <a:bodyPr wrap="square" lIns="0" tIns="0" rIns="0" bIns="0" rtlCol="0" anchor="ctr"/>
+          <a:bodyPr wrap="square" rtlCol="0" anchor="ctr"/>
           <a:lstStyle/>
           <a:p>
-            <a:pPr indent="0" marL="0">
+            <a:pPr algn="ctr" indent="0" marL="0">
               <a:buNone/>
             </a:pPr>
             <a:r>
-              <a:rPr lang="en-US" sz="2400" b="1" dirty="0">
-                <a:solidFill>
-                  <a:srgbClr val="1B2A4A"/>
+              <a:rPr lang="en-US" sz="3600" b="1" dirty="0">
+                <a:solidFill>
+                  <a:srgbClr val="FFFFFF"/>
                 </a:solidFill>
                 <a:latin typeface="Georgia" pitchFamily="34" charset="0"/>
                 <a:ea typeface="Georgia" pitchFamily="34" charset="-122"/>
                 <a:cs typeface="Georgia" pitchFamily="34" charset="-120"/>
               </a:rPr>
-              <a:t>Check Your Understanding</a:t>
-            </a:r>
-            <a:endParaRPr lang="en-US" sz="2400" dirty="0"/>
-          </a:p>
-        </p:txBody>
-      </p:sp>
-      <p:sp>
-        <p:nvSpPr>
-          <p:cNvPr id="4" name="Shape 2"/>
-          <p:cNvSpPr/>
-          <p:nvPr/>
-        </p:nvSpPr>
-        <p:spPr>
-          <a:xfrm>
-            <a:off x="457200" y="868680"/>
-            <a:ext cx="1828800" cy="27432"/>
-          </a:xfrm>
-          <a:prstGeom prst="rect">
-            <a:avLst/>
-          </a:prstGeom>
-          <a:solidFill>
-            <a:srgbClr val="C8372D"/>
-          </a:solidFill>
-          <a:ln/>
-        </p:spPr>
-      </p:sp>
-      <p:sp>
-        <p:nvSpPr>
-          <p:cNvPr id="5" name="Shape 3"/>
-          <p:cNvSpPr/>
-          <p:nvPr/>
-        </p:nvSpPr>
-        <p:spPr>
-          <a:xfrm>
-            <a:off x="457200" y="1188720"/>
-            <a:ext cx="8229600" cy="1371600"/>
-          </a:xfrm>
-          <a:prstGeom prst="roundRect">
-            <a:avLst>
-              <a:gd name="adj" fmla="val 10000"/>
-            </a:avLst>
-          </a:prstGeom>
-          <a:solidFill>
-            <a:srgbClr val="FAF8F5"/>
-          </a:solidFill>
-          <a:ln w="12700">
-            <a:solidFill>
-              <a:srgbClr val="E5E2DC"/>
-            </a:solidFill>
-            <a:prstDash val="solid"/>
-          </a:ln>
-        </p:spPr>
-      </p:sp>
-      <p:sp>
-        <p:nvSpPr>
-          <p:cNvPr id="6" name="Text 4"/>
-          <p:cNvSpPr/>
-          <p:nvPr/>
-        </p:nvSpPr>
-        <p:spPr>
-          <a:xfrm>
-            <a:off x="731520" y="1188720"/>
-            <a:ext cx="7680960" cy="1371600"/>
+              <a:t>Review &amp; Practise</a:t>
+            </a:r>
+            <a:endParaRPr lang="en-US" sz="3600" dirty="0"/>
+          </a:p>
+        </p:txBody>
+      </p:sp>
+      <p:sp>
+        <p:nvSpPr>
+          <p:cNvPr id="5" name="Text 3"/>
+          <p:cNvSpPr/>
+          <p:nvPr/>
+        </p:nvSpPr>
+        <p:spPr>
+          <a:xfrm>
+            <a:off x="731520" y="2560320"/>
+            <a:ext cx="7680960" cy="548640"/>
           </a:xfrm>
           <a:prstGeom prst="rect">
             <a:avLst/>
@@ -2254,899 +2007,21 @@
           <a:bodyPr wrap="square" rtlCol="0" anchor="ctr"/>
           <a:lstStyle/>
           <a:p>
-            <a:pPr indent="0" marL="0">
+            <a:pPr algn="ctr" indent="0" marL="0">
               <a:buNone/>
             </a:pPr>
             <a:r>
-              <a:rPr lang="en-US" sz="1800" b="1" dirty="0">
-                <a:solidFill>
-                  <a:srgbClr val="1B2A4A"/>
-                </a:solidFill>
-                <a:latin typeface="Georgia" pitchFamily="34" charset="0"/>
-                <a:ea typeface="Georgia" pitchFamily="34" charset="-122"/>
-                <a:cs typeface="Georgia" pitchFamily="34" charset="-120"/>
-              </a:rPr>
-              <a:t>❓  Expand and simplify: 3(x + 5) + 2(x − 1)</a:t>
-            </a:r>
-            <a:endParaRPr lang="en-US" sz="1800" dirty="0"/>
-          </a:p>
-        </p:txBody>
-      </p:sp>
-      <p:sp>
-        <p:nvSpPr>
-          <p:cNvPr id="7" name="Shape 5"/>
-          <p:cNvSpPr/>
-          <p:nvPr/>
-        </p:nvSpPr>
-        <p:spPr>
-          <a:xfrm>
-            <a:off x="457200" y="2926080"/>
-            <a:ext cx="8229600" cy="1463040"/>
-          </a:xfrm>
-          <a:prstGeom prst="roundRect">
-            <a:avLst>
-              <a:gd name="adj" fmla="val 9375"/>
-            </a:avLst>
-          </a:prstGeom>
-          <a:solidFill>
-            <a:srgbClr val="E8F5F3"/>
-          </a:solidFill>
-          <a:ln/>
-        </p:spPr>
-      </p:sp>
-      <p:sp>
-        <p:nvSpPr>
-          <p:cNvPr id="8" name="Shape 6"/>
-          <p:cNvSpPr/>
-          <p:nvPr/>
-        </p:nvSpPr>
-        <p:spPr>
-          <a:xfrm>
-            <a:off x="457200" y="2926080"/>
-            <a:ext cx="54864" cy="1463040"/>
-          </a:xfrm>
-          <a:prstGeom prst="rect">
-            <a:avLst/>
-          </a:prstGeom>
-          <a:solidFill>
-            <a:srgbClr val="C8372D"/>
-          </a:solidFill>
-          <a:ln/>
-        </p:spPr>
-      </p:sp>
-      <p:sp>
-        <p:nvSpPr>
-          <p:cNvPr id="9" name="Text 7"/>
-          <p:cNvSpPr/>
-          <p:nvPr/>
-        </p:nvSpPr>
-        <p:spPr>
-          <a:xfrm>
-            <a:off x="731520" y="2926080"/>
-            <a:ext cx="7680960" cy="1463040"/>
-          </a:xfrm>
-          <a:prstGeom prst="rect">
-            <a:avLst/>
-          </a:prstGeom>
-          <a:noFill/>
-          <a:ln/>
-        </p:spPr>
-        <p:txBody>
-          <a:bodyPr wrap="square" rtlCol="0" anchor="ctr"/>
-          <a:lstStyle/>
-          <a:p>
-            <a:pPr indent="0" marL="0">
-              <a:lnSpc>
-                <a:spcPct val="140000"/>
-              </a:lnSpc>
-              <a:buNone/>
-            </a:pPr>
-            <a:r>
-              <a:rPr lang="en-US" sz="1600" dirty="0">
-                <a:solidFill>
-                  <a:srgbClr val="3D3A36"/>
+              <a:rPr lang="en-US" sz="2000" dirty="0">
+                <a:solidFill>
+                  <a:srgbClr val="C8372D"/>
                 </a:solidFill>
                 <a:latin typeface="Calibri" pitchFamily="34" charset="0"/>
                 <a:ea typeface="Calibri" pitchFamily="34" charset="-122"/>
                 <a:cs typeface="Calibri" pitchFamily="34" charset="-120"/>
               </a:rPr>
-              <a:t>3x + 15 + 2x − 2 = 5x + 13.</a:t>
-            </a:r>
-            <a:endParaRPr lang="en-US" sz="1600" dirty="0"/>
-          </a:p>
-        </p:txBody>
-      </p:sp>
-      <p:sp>
-        <p:nvSpPr>
-          <p:cNvPr id="10" name="Text 8"/>
-          <p:cNvSpPr/>
-          <p:nvPr/>
-        </p:nvSpPr>
-        <p:spPr>
-          <a:xfrm>
-            <a:off x="7315200" y="4754880"/>
-            <a:ext cx="1828800" cy="274320"/>
-          </a:xfrm>
-          <a:prstGeom prst="rect">
-            <a:avLst/>
-          </a:prstGeom>
-          <a:noFill/>
-          <a:ln/>
-        </p:spPr>
-        <p:txBody>
-          <a:bodyPr wrap="square" rtlCol="0" anchor="ctr"/>
-          <a:lstStyle/>
-          <a:p>
-            <a:pPr algn="r" indent="0" marL="0">
-              <a:buNone/>
-            </a:pPr>
-            <a:r>
-              <a:rPr lang="en-US" sz="900" dirty="0">
-                <a:solidFill>
-                  <a:srgbClr val="9B9690"/>
-                </a:solidFill>
-                <a:latin typeface="Calibri" pitchFamily="34" charset="0"/>
-                <a:ea typeface="Calibri" pitchFamily="34" charset="-122"/>
-                <a:cs typeface="Calibri" pitchFamily="34" charset="-120"/>
-              </a:rPr>
               <a:t>mrzocchi.com</a:t>
             </a:r>
-            <a:endParaRPr lang="en-US" sz="900" dirty="0"/>
-          </a:p>
-        </p:txBody>
-      </p:sp>
-    </p:spTree>
-  </p:cSld>
-  <p:clrMapOvr>
-    <a:masterClrMapping/>
-  </p:clrMapOvr>
-</p:sld>
-</file>
-
-<file path=ppt/slides/slide11.xml><?xml version="1.0" encoding="utf-8"?>
-<p:sld xmlns:a="http://schemas.openxmlformats.org/drawingml/2006/main" xmlns:r="http://schemas.openxmlformats.org/officeDocument/2006/relationships" xmlns:p="http://schemas.openxmlformats.org/presentationml/2006/main">
-  <p:cSld name="Slide 11">
-    <p:spTree>
-      <p:nvGrpSpPr>
-        <p:cNvPr id="1" name=""/>
-        <p:cNvGrpSpPr/>
-        <p:nvPr/>
-      </p:nvGrpSpPr>
-      <p:grpSpPr>
-        <a:xfrm>
-          <a:off x="0" y="0"/>
-          <a:ext cx="0" cy="0"/>
-          <a:chOff x="0" y="0"/>
-          <a:chExt cx="0" cy="0"/>
-        </a:xfrm>
-      </p:grpSpPr>
-      <p:sp>
-        <p:nvSpPr>
-          <p:cNvPr id="2" name="Shape 0"/>
-          <p:cNvSpPr/>
-          <p:nvPr/>
-        </p:nvSpPr>
-        <p:spPr>
-          <a:xfrm>
-            <a:off x="0" y="0"/>
-            <a:ext cx="9144000" cy="54864"/>
-          </a:xfrm>
-          <a:prstGeom prst="rect">
-            <a:avLst/>
-          </a:prstGeom>
-          <a:solidFill>
-            <a:srgbClr val="C8372D"/>
-          </a:solidFill>
-          <a:ln/>
-        </p:spPr>
-      </p:sp>
-      <p:sp>
-        <p:nvSpPr>
-          <p:cNvPr id="3" name="Text 1"/>
-          <p:cNvSpPr/>
-          <p:nvPr/>
-        </p:nvSpPr>
-        <p:spPr>
-          <a:xfrm>
-            <a:off x="457200" y="228600"/>
-            <a:ext cx="8229600" cy="548640"/>
-          </a:xfrm>
-          <a:prstGeom prst="rect">
-            <a:avLst/>
-          </a:prstGeom>
-          <a:noFill/>
-          <a:ln/>
-        </p:spPr>
-        <p:txBody>
-          <a:bodyPr wrap="square" lIns="0" tIns="0" rIns="0" bIns="0" rtlCol="0" anchor="ctr"/>
-          <a:lstStyle/>
-          <a:p>
-            <a:pPr indent="0" marL="0">
-              <a:buNone/>
-            </a:pPr>
-            <a:r>
-              <a:rPr lang="en-US" sz="2400" b="1" dirty="0">
-                <a:solidFill>
-                  <a:srgbClr val="1B2A4A"/>
-                </a:solidFill>
-                <a:latin typeface="Georgia" pitchFamily="34" charset="0"/>
-                <a:ea typeface="Georgia" pitchFamily="34" charset="-122"/>
-                <a:cs typeface="Georgia" pitchFamily="34" charset="-120"/>
-              </a:rPr>
-              <a:t>Check Your Understanding</a:t>
-            </a:r>
-            <a:endParaRPr lang="en-US" sz="2400" dirty="0"/>
-          </a:p>
-        </p:txBody>
-      </p:sp>
-      <p:sp>
-        <p:nvSpPr>
-          <p:cNvPr id="4" name="Shape 2"/>
-          <p:cNvSpPr/>
-          <p:nvPr/>
-        </p:nvSpPr>
-        <p:spPr>
-          <a:xfrm>
-            <a:off x="457200" y="868680"/>
-            <a:ext cx="1828800" cy="27432"/>
-          </a:xfrm>
-          <a:prstGeom prst="rect">
-            <a:avLst/>
-          </a:prstGeom>
-          <a:solidFill>
-            <a:srgbClr val="C8372D"/>
-          </a:solidFill>
-          <a:ln/>
-        </p:spPr>
-      </p:sp>
-      <p:sp>
-        <p:nvSpPr>
-          <p:cNvPr id="5" name="Shape 3"/>
-          <p:cNvSpPr/>
-          <p:nvPr/>
-        </p:nvSpPr>
-        <p:spPr>
-          <a:xfrm>
-            <a:off x="457200" y="1188720"/>
-            <a:ext cx="8229600" cy="1371600"/>
-          </a:xfrm>
-          <a:prstGeom prst="roundRect">
-            <a:avLst>
-              <a:gd name="adj" fmla="val 10000"/>
-            </a:avLst>
-          </a:prstGeom>
-          <a:solidFill>
-            <a:srgbClr val="FAF8F5"/>
-          </a:solidFill>
-          <a:ln w="12700">
-            <a:solidFill>
-              <a:srgbClr val="E5E2DC"/>
-            </a:solidFill>
-            <a:prstDash val="solid"/>
-          </a:ln>
-        </p:spPr>
-      </p:sp>
-      <p:sp>
-        <p:nvSpPr>
-          <p:cNvPr id="6" name="Text 4"/>
-          <p:cNvSpPr/>
-          <p:nvPr/>
-        </p:nvSpPr>
-        <p:spPr>
-          <a:xfrm>
-            <a:off x="731520" y="1188720"/>
-            <a:ext cx="7680960" cy="1371600"/>
-          </a:xfrm>
-          <a:prstGeom prst="rect">
-            <a:avLst/>
-          </a:prstGeom>
-          <a:noFill/>
-          <a:ln/>
-        </p:spPr>
-        <p:txBody>
-          <a:bodyPr wrap="square" rtlCol="0" anchor="ctr"/>
-          <a:lstStyle/>
-          <a:p>
-            <a:pPr indent="0" marL="0">
-              <a:buNone/>
-            </a:pPr>
-            <a:r>
-              <a:rPr lang="en-US" sz="1800" b="1" dirty="0">
-                <a:solidFill>
-                  <a:srgbClr val="1B2A4A"/>
-                </a:solidFill>
-                <a:latin typeface="Georgia" pitchFamily="34" charset="0"/>
-                <a:ea typeface="Georgia" pitchFamily="34" charset="-122"/>
-                <a:cs typeface="Georgia" pitchFamily="34" charset="-120"/>
-              </a:rPr>
-              <a:t>❓  Factorise: 10x + 15</a:t>
-            </a:r>
-            <a:endParaRPr lang="en-US" sz="1800" dirty="0"/>
-          </a:p>
-        </p:txBody>
-      </p:sp>
-      <p:sp>
-        <p:nvSpPr>
-          <p:cNvPr id="7" name="Shape 5"/>
-          <p:cNvSpPr/>
-          <p:nvPr/>
-        </p:nvSpPr>
-        <p:spPr>
-          <a:xfrm>
-            <a:off x="457200" y="2926080"/>
-            <a:ext cx="8229600" cy="1463040"/>
-          </a:xfrm>
-          <a:prstGeom prst="roundRect">
-            <a:avLst>
-              <a:gd name="adj" fmla="val 9375"/>
-            </a:avLst>
-          </a:prstGeom>
-          <a:solidFill>
-            <a:srgbClr val="E8F5F3"/>
-          </a:solidFill>
-          <a:ln/>
-        </p:spPr>
-      </p:sp>
-      <p:sp>
-        <p:nvSpPr>
-          <p:cNvPr id="8" name="Shape 6"/>
-          <p:cNvSpPr/>
-          <p:nvPr/>
-        </p:nvSpPr>
-        <p:spPr>
-          <a:xfrm>
-            <a:off x="457200" y="2926080"/>
-            <a:ext cx="54864" cy="1463040"/>
-          </a:xfrm>
-          <a:prstGeom prst="rect">
-            <a:avLst/>
-          </a:prstGeom>
-          <a:solidFill>
-            <a:srgbClr val="C8372D"/>
-          </a:solidFill>
-          <a:ln/>
-        </p:spPr>
-      </p:sp>
-      <p:sp>
-        <p:nvSpPr>
-          <p:cNvPr id="9" name="Text 7"/>
-          <p:cNvSpPr/>
-          <p:nvPr/>
-        </p:nvSpPr>
-        <p:spPr>
-          <a:xfrm>
-            <a:off x="731520" y="2926080"/>
-            <a:ext cx="7680960" cy="1463040"/>
-          </a:xfrm>
-          <a:prstGeom prst="rect">
-            <a:avLst/>
-          </a:prstGeom>
-          <a:noFill/>
-          <a:ln/>
-        </p:spPr>
-        <p:txBody>
-          <a:bodyPr wrap="square" rtlCol="0" anchor="ctr"/>
-          <a:lstStyle/>
-          <a:p>
-            <a:pPr indent="0" marL="0">
-              <a:lnSpc>
-                <a:spcPct val="140000"/>
-              </a:lnSpc>
-              <a:buNone/>
-            </a:pPr>
-            <a:r>
-              <a:rPr lang="en-US" sz="1600" dirty="0">
-                <a:solidFill>
-                  <a:srgbClr val="3D3A36"/>
-                </a:solidFill>
-                <a:latin typeface="Calibri" pitchFamily="34" charset="0"/>
-                <a:ea typeface="Calibri" pitchFamily="34" charset="-122"/>
-                <a:cs typeface="Calibri" pitchFamily="34" charset="-120"/>
-              </a:rPr>
-              <a:t>5(2x + 3) — HCF of 10 and 15 is 5.</a:t>
-            </a:r>
-            <a:endParaRPr lang="en-US" sz="1600" dirty="0"/>
-          </a:p>
-        </p:txBody>
-      </p:sp>
-      <p:sp>
-        <p:nvSpPr>
-          <p:cNvPr id="10" name="Text 8"/>
-          <p:cNvSpPr/>
-          <p:nvPr/>
-        </p:nvSpPr>
-        <p:spPr>
-          <a:xfrm>
-            <a:off x="7315200" y="4754880"/>
-            <a:ext cx="1828800" cy="274320"/>
-          </a:xfrm>
-          <a:prstGeom prst="rect">
-            <a:avLst/>
-          </a:prstGeom>
-          <a:noFill/>
-          <a:ln/>
-        </p:spPr>
-        <p:txBody>
-          <a:bodyPr wrap="square" rtlCol="0" anchor="ctr"/>
-          <a:lstStyle/>
-          <a:p>
-            <a:pPr algn="r" indent="0" marL="0">
-              <a:buNone/>
-            </a:pPr>
-            <a:r>
-              <a:rPr lang="en-US" sz="900" dirty="0">
-                <a:solidFill>
-                  <a:srgbClr val="9B9690"/>
-                </a:solidFill>
-                <a:latin typeface="Calibri" pitchFamily="34" charset="0"/>
-                <a:ea typeface="Calibri" pitchFamily="34" charset="-122"/>
-                <a:cs typeface="Calibri" pitchFamily="34" charset="-120"/>
-              </a:rPr>
-              <a:t>mrzocchi.com</a:t>
-            </a:r>
-            <a:endParaRPr lang="en-US" sz="900" dirty="0"/>
-          </a:p>
-        </p:txBody>
-      </p:sp>
-    </p:spTree>
-  </p:cSld>
-  <p:clrMapOvr>
-    <a:masterClrMapping/>
-  </p:clrMapOvr>
-</p:sld>
-</file>
-
-<file path=ppt/slides/slide12.xml><?xml version="1.0" encoding="utf-8"?>
-<p:sld xmlns:a="http://schemas.openxmlformats.org/drawingml/2006/main" xmlns:r="http://schemas.openxmlformats.org/officeDocument/2006/relationships" xmlns:p="http://schemas.openxmlformats.org/presentationml/2006/main">
-  <p:cSld name="Slide 12">
-    <p:spTree>
-      <p:nvGrpSpPr>
-        <p:cNvPr id="1" name=""/>
-        <p:cNvGrpSpPr/>
-        <p:nvPr/>
-      </p:nvGrpSpPr>
-      <p:grpSpPr>
-        <a:xfrm>
-          <a:off x="0" y="0"/>
-          <a:ext cx="0" cy="0"/>
-          <a:chOff x="0" y="0"/>
-          <a:chExt cx="0" cy="0"/>
-        </a:xfrm>
-      </p:grpSpPr>
-      <p:sp>
-        <p:nvSpPr>
-          <p:cNvPr id="2" name="Shape 0"/>
-          <p:cNvSpPr/>
-          <p:nvPr/>
-        </p:nvSpPr>
-        <p:spPr>
-          <a:xfrm>
-            <a:off x="0" y="0"/>
-            <a:ext cx="9144000" cy="54864"/>
-          </a:xfrm>
-          <a:prstGeom prst="rect">
-            <a:avLst/>
-          </a:prstGeom>
-          <a:solidFill>
-            <a:srgbClr val="C8372D"/>
-          </a:solidFill>
-          <a:ln/>
-        </p:spPr>
-      </p:sp>
-      <p:sp>
-        <p:nvSpPr>
-          <p:cNvPr id="3" name="Text 1"/>
-          <p:cNvSpPr/>
-          <p:nvPr/>
-        </p:nvSpPr>
-        <p:spPr>
-          <a:xfrm>
-            <a:off x="457200" y="228600"/>
-            <a:ext cx="8229600" cy="548640"/>
-          </a:xfrm>
-          <a:prstGeom prst="rect">
-            <a:avLst/>
-          </a:prstGeom>
-          <a:noFill/>
-          <a:ln/>
-        </p:spPr>
-        <p:txBody>
-          <a:bodyPr wrap="square" lIns="0" tIns="0" rIns="0" bIns="0" rtlCol="0" anchor="ctr"/>
-          <a:lstStyle/>
-          <a:p>
-            <a:pPr indent="0" marL="0">
-              <a:buNone/>
-            </a:pPr>
-            <a:r>
-              <a:rPr lang="en-US" sz="2400" b="1" dirty="0">
-                <a:solidFill>
-                  <a:srgbClr val="1B2A4A"/>
-                </a:solidFill>
-                <a:latin typeface="Georgia" pitchFamily="34" charset="0"/>
-                <a:ea typeface="Georgia" pitchFamily="34" charset="-122"/>
-                <a:cs typeface="Georgia" pitchFamily="34" charset="-120"/>
-              </a:rPr>
-              <a:t>Check Your Understanding</a:t>
-            </a:r>
-            <a:endParaRPr lang="en-US" sz="2400" dirty="0"/>
-          </a:p>
-        </p:txBody>
-      </p:sp>
-      <p:sp>
-        <p:nvSpPr>
-          <p:cNvPr id="4" name="Shape 2"/>
-          <p:cNvSpPr/>
-          <p:nvPr/>
-        </p:nvSpPr>
-        <p:spPr>
-          <a:xfrm>
-            <a:off x="457200" y="868680"/>
-            <a:ext cx="1828800" cy="27432"/>
-          </a:xfrm>
-          <a:prstGeom prst="rect">
-            <a:avLst/>
-          </a:prstGeom>
-          <a:solidFill>
-            <a:srgbClr val="C8372D"/>
-          </a:solidFill>
-          <a:ln/>
-        </p:spPr>
-      </p:sp>
-      <p:sp>
-        <p:nvSpPr>
-          <p:cNvPr id="5" name="Shape 3"/>
-          <p:cNvSpPr/>
-          <p:nvPr/>
-        </p:nvSpPr>
-        <p:spPr>
-          <a:xfrm>
-            <a:off x="457200" y="1188720"/>
-            <a:ext cx="8229600" cy="1371600"/>
-          </a:xfrm>
-          <a:prstGeom prst="roundRect">
-            <a:avLst>
-              <a:gd name="adj" fmla="val 10000"/>
-            </a:avLst>
-          </a:prstGeom>
-          <a:solidFill>
-            <a:srgbClr val="FAF8F5"/>
-          </a:solidFill>
-          <a:ln w="12700">
-            <a:solidFill>
-              <a:srgbClr val="E5E2DC"/>
-            </a:solidFill>
-            <a:prstDash val="solid"/>
-          </a:ln>
-        </p:spPr>
-      </p:sp>
-      <p:sp>
-        <p:nvSpPr>
-          <p:cNvPr id="6" name="Text 4"/>
-          <p:cNvSpPr/>
-          <p:nvPr/>
-        </p:nvSpPr>
-        <p:spPr>
-          <a:xfrm>
-            <a:off x="731520" y="1188720"/>
-            <a:ext cx="7680960" cy="1371600"/>
-          </a:xfrm>
-          <a:prstGeom prst="rect">
-            <a:avLst/>
-          </a:prstGeom>
-          <a:noFill/>
-          <a:ln/>
-        </p:spPr>
-        <p:txBody>
-          <a:bodyPr wrap="square" rtlCol="0" anchor="ctr"/>
-          <a:lstStyle/>
-          <a:p>
-            <a:pPr indent="0" marL="0">
-              <a:buNone/>
-            </a:pPr>
-            <a:r>
-              <a:rPr lang="en-US" sz="1800" b="1" dirty="0">
-                <a:solidFill>
-                  <a:srgbClr val="1B2A4A"/>
-                </a:solidFill>
-                <a:latin typeface="Georgia" pitchFamily="34" charset="0"/>
-                <a:ea typeface="Georgia" pitchFamily="34" charset="-122"/>
-                <a:cs typeface="Georgia" pitchFamily="34" charset="-120"/>
-              </a:rPr>
-              <a:t>❓  Solve: 5x − 3 = 2x + 12</a:t>
-            </a:r>
-            <a:endParaRPr lang="en-US" sz="1800" dirty="0"/>
-          </a:p>
-        </p:txBody>
-      </p:sp>
-      <p:sp>
-        <p:nvSpPr>
-          <p:cNvPr id="7" name="Shape 5"/>
-          <p:cNvSpPr/>
-          <p:nvPr/>
-        </p:nvSpPr>
-        <p:spPr>
-          <a:xfrm>
-            <a:off x="457200" y="2926080"/>
-            <a:ext cx="8229600" cy="1463040"/>
-          </a:xfrm>
-          <a:prstGeom prst="roundRect">
-            <a:avLst>
-              <a:gd name="adj" fmla="val 9375"/>
-            </a:avLst>
-          </a:prstGeom>
-          <a:solidFill>
-            <a:srgbClr val="E8F5F3"/>
-          </a:solidFill>
-          <a:ln/>
-        </p:spPr>
-      </p:sp>
-      <p:sp>
-        <p:nvSpPr>
-          <p:cNvPr id="8" name="Shape 6"/>
-          <p:cNvSpPr/>
-          <p:nvPr/>
-        </p:nvSpPr>
-        <p:spPr>
-          <a:xfrm>
-            <a:off x="457200" y="2926080"/>
-            <a:ext cx="54864" cy="1463040"/>
-          </a:xfrm>
-          <a:prstGeom prst="rect">
-            <a:avLst/>
-          </a:prstGeom>
-          <a:solidFill>
-            <a:srgbClr val="C8372D"/>
-          </a:solidFill>
-          <a:ln/>
-        </p:spPr>
-      </p:sp>
-      <p:sp>
-        <p:nvSpPr>
-          <p:cNvPr id="9" name="Text 7"/>
-          <p:cNvSpPr/>
-          <p:nvPr/>
-        </p:nvSpPr>
-        <p:spPr>
-          <a:xfrm>
-            <a:off x="731520" y="2926080"/>
-            <a:ext cx="7680960" cy="1463040"/>
-          </a:xfrm>
-          <a:prstGeom prst="rect">
-            <a:avLst/>
-          </a:prstGeom>
-          <a:noFill/>
-          <a:ln/>
-        </p:spPr>
-        <p:txBody>
-          <a:bodyPr wrap="square" rtlCol="0" anchor="ctr"/>
-          <a:lstStyle/>
-          <a:p>
-            <a:pPr indent="0" marL="0">
-              <a:lnSpc>
-                <a:spcPct val="140000"/>
-              </a:lnSpc>
-              <a:buNone/>
-            </a:pPr>
-            <a:r>
-              <a:rPr lang="en-US" sz="1600" dirty="0">
-                <a:solidFill>
-                  <a:srgbClr val="3D3A36"/>
-                </a:solidFill>
-                <a:latin typeface="Calibri" pitchFamily="34" charset="0"/>
-                <a:ea typeface="Calibri" pitchFamily="34" charset="-122"/>
-                <a:cs typeface="Calibri" pitchFamily="34" charset="-120"/>
-              </a:rPr>
-              <a:t>3x = 15, so x = 5. (Collect x terms, then divide.)</a:t>
-            </a:r>
-            <a:endParaRPr lang="en-US" sz="1600" dirty="0"/>
-          </a:p>
-        </p:txBody>
-      </p:sp>
-      <p:sp>
-        <p:nvSpPr>
-          <p:cNvPr id="10" name="Text 8"/>
-          <p:cNvSpPr/>
-          <p:nvPr/>
-        </p:nvSpPr>
-        <p:spPr>
-          <a:xfrm>
-            <a:off x="7315200" y="4754880"/>
-            <a:ext cx="1828800" cy="274320"/>
-          </a:xfrm>
-          <a:prstGeom prst="rect">
-            <a:avLst/>
-          </a:prstGeom>
-          <a:noFill/>
-          <a:ln/>
-        </p:spPr>
-        <p:txBody>
-          <a:bodyPr wrap="square" rtlCol="0" anchor="ctr"/>
-          <a:lstStyle/>
-          <a:p>
-            <a:pPr algn="r" indent="0" marL="0">
-              <a:buNone/>
-            </a:pPr>
-            <a:r>
-              <a:rPr lang="en-US" sz="900" dirty="0">
-                <a:solidFill>
-                  <a:srgbClr val="9B9690"/>
-                </a:solidFill>
-                <a:latin typeface="Calibri" pitchFamily="34" charset="0"/>
-                <a:ea typeface="Calibri" pitchFamily="34" charset="-122"/>
-                <a:cs typeface="Calibri" pitchFamily="34" charset="-120"/>
-              </a:rPr>
-              <a:t>mrzocchi.com</a:t>
-            </a:r>
-            <a:endParaRPr lang="en-US" sz="900" dirty="0"/>
-          </a:p>
-        </p:txBody>
-      </p:sp>
-    </p:spTree>
-  </p:cSld>
-  <p:clrMapOvr>
-    <a:masterClrMapping/>
-  </p:clrMapOvr>
-</p:sld>
-</file>
-
-<file path=ppt/slides/slide13.xml><?xml version="1.0" encoding="utf-8"?>
-<p:sld xmlns:a="http://schemas.openxmlformats.org/drawingml/2006/main" xmlns:r="http://schemas.openxmlformats.org/officeDocument/2006/relationships" xmlns:p="http://schemas.openxmlformats.org/presentationml/2006/main">
-  <p:cSld name="Slide 13">
-    <p:bg>
-      <p:bgPr>
-        <a:solidFill>
-          <a:srgbClr val="1B2A4A"/>
-        </a:solidFill>
-      </p:bgPr>
-    </p:bg>
-    <p:spTree>
-      <p:nvGrpSpPr>
-        <p:cNvPr id="1" name=""/>
-        <p:cNvGrpSpPr/>
-        <p:nvPr/>
-      </p:nvGrpSpPr>
-      <p:grpSpPr>
-        <a:xfrm>
-          <a:off x="0" y="0"/>
-          <a:ext cx="0" cy="0"/>
-          <a:chOff x="0" y="0"/>
-          <a:chExt cx="0" cy="0"/>
-        </a:xfrm>
-      </p:grpSpPr>
-      <p:sp>
-        <p:nvSpPr>
-          <p:cNvPr id="2" name="Shape 0"/>
-          <p:cNvSpPr/>
-          <p:nvPr/>
-        </p:nvSpPr>
-        <p:spPr>
-          <a:xfrm>
-            <a:off x="0" y="4389120"/>
-            <a:ext cx="9144000" cy="54864"/>
-          </a:xfrm>
-          <a:prstGeom prst="rect">
-            <a:avLst/>
-          </a:prstGeom>
-          <a:solidFill>
-            <a:srgbClr val="C8372D"/>
-          </a:solidFill>
-          <a:ln/>
-        </p:spPr>
-      </p:sp>
-      <p:sp>
-        <p:nvSpPr>
-          <p:cNvPr id="3" name="Text 1"/>
-          <p:cNvSpPr/>
-          <p:nvPr/>
-        </p:nvSpPr>
-        <p:spPr>
-          <a:xfrm>
-            <a:off x="457200" y="1371600"/>
-            <a:ext cx="8229600" cy="1371600"/>
-          </a:xfrm>
-          <a:prstGeom prst="rect">
-            <a:avLst/>
-          </a:prstGeom>
-          <a:noFill/>
-          <a:ln/>
-        </p:spPr>
-        <p:txBody>
-          <a:bodyPr wrap="square" rtlCol="0" anchor="ctr"/>
-          <a:lstStyle/>
-          <a:p>
-            <a:pPr algn="ctr" indent="0" marL="0">
-              <a:buNone/>
-            </a:pPr>
-            <a:r>
-              <a:rPr lang="en-US" sz="3600" b="1" dirty="0">
-                <a:solidFill>
-                  <a:srgbClr val="FFFFFF"/>
-                </a:solidFill>
-                <a:latin typeface="Georgia" pitchFamily="34" charset="0"/>
-                <a:ea typeface="Georgia" pitchFamily="34" charset="-122"/>
-                <a:cs typeface="Georgia" pitchFamily="34" charset="-120"/>
-              </a:rPr>
-              <a:t>Keep Practising!</a:t>
-            </a:r>
-            <a:endParaRPr lang="en-US" sz="3600" dirty="0"/>
-          </a:p>
-        </p:txBody>
-      </p:sp>
-      <p:sp>
-        <p:nvSpPr>
-          <p:cNvPr id="4" name="Text 2"/>
-          <p:cNvSpPr/>
-          <p:nvPr/>
-        </p:nvSpPr>
-        <p:spPr>
-          <a:xfrm>
-            <a:off x="457200" y="2743200"/>
-            <a:ext cx="8229600" cy="731520"/>
-          </a:xfrm>
-          <a:prstGeom prst="rect">
-            <a:avLst/>
-          </a:prstGeom>
-          <a:noFill/>
-          <a:ln/>
-        </p:spPr>
-        <p:txBody>
-          <a:bodyPr wrap="square" rtlCol="0" anchor="ctr"/>
-          <a:lstStyle/>
-          <a:p>
-            <a:pPr algn="ctr" indent="0" marL="0">
-              <a:buNone/>
-            </a:pPr>
-            <a:r>
-              <a:rPr lang="en-US" sz="1800" dirty="0">
-                <a:solidFill>
-                  <a:srgbClr val="E9C46A"/>
-                </a:solidFill>
-                <a:latin typeface="Calibri" pitchFamily="34" charset="0"/>
-                <a:ea typeface="Calibri" pitchFamily="34" charset="-122"/>
-                <a:cs typeface="Calibri" pitchFamily="34" charset="-120"/>
-              </a:rPr>
-              <a:t>Use the Self-Quiz on mrzocchi.com to test yourself</a:t>
-            </a:r>
-            <a:endParaRPr lang="en-US" sz="1800" dirty="0"/>
-          </a:p>
-        </p:txBody>
-      </p:sp>
-      <p:sp>
-        <p:nvSpPr>
-          <p:cNvPr id="5" name="Text 3"/>
-          <p:cNvSpPr/>
-          <p:nvPr/>
-        </p:nvSpPr>
-        <p:spPr>
-          <a:xfrm>
-            <a:off x="457200" y="3840480"/>
-            <a:ext cx="8229600" cy="457200"/>
-          </a:xfrm>
-          <a:prstGeom prst="rect">
-            <a:avLst/>
-          </a:prstGeom>
-          <a:noFill/>
-          <a:ln/>
-        </p:spPr>
-        <p:txBody>
-          <a:bodyPr wrap="square" rtlCol="0" anchor="ctr"/>
-          <a:lstStyle/>
-          <a:p>
-            <a:pPr algn="ctr" indent="0" marL="0">
-              <a:buNone/>
-            </a:pPr>
-            <a:r>
-              <a:rPr lang="en-US" sz="1400" dirty="0">
-                <a:solidFill>
-                  <a:srgbClr val="9B9690"/>
-                </a:solidFill>
-                <a:latin typeface="Calibri" pitchFamily="34" charset="0"/>
-                <a:ea typeface="Calibri" pitchFamily="34" charset="-122"/>
-                <a:cs typeface="Calibri" pitchFamily="34" charset="-120"/>
-              </a:rPr>
-              <a:t>mrzocchi.com</a:t>
-            </a:r>
-            <a:endParaRPr lang="en-US" sz="1400" dirty="0"/>
+            <a:endParaRPr lang="en-US" sz="2000" dirty="0"/>
           </a:p>
         </p:txBody>
       </p:sp>
@@ -3184,13 +2059,13 @@
         <p:spPr>
           <a:xfrm>
             <a:off x="0" y="0"/>
-            <a:ext cx="9144000" cy="54864"/>
+            <a:ext cx="9144000" cy="5143500"/>
           </a:xfrm>
           <a:prstGeom prst="rect">
             <a:avLst/>
           </a:prstGeom>
           <a:solidFill>
-            <a:srgbClr val="C8372D"/>
+            <a:srgbClr val="111D35"/>
           </a:solidFill>
           <a:ln/>
         </p:spPr>
@@ -3203,8 +2078,8 @@
         </p:nvSpPr>
         <p:spPr>
           <a:xfrm>
-            <a:off x="457200" y="228600"/>
-            <a:ext cx="8229600" cy="548640"/>
+            <a:off x="6858000" y="182880"/>
+            <a:ext cx="2286000" cy="2743200"/>
           </a:xfrm>
           <a:prstGeom prst="rect">
             <a:avLst/>
@@ -3213,77 +2088,39 @@
           <a:ln/>
         </p:spPr>
         <p:txBody>
-          <a:bodyPr wrap="square" lIns="0" tIns="0" rIns="0" bIns="0" rtlCol="0" anchor="ctr"/>
+          <a:bodyPr wrap="square" rtlCol="0" anchor="ctr"/>
           <a:lstStyle/>
           <a:p>
-            <a:pPr indent="0" marL="0">
+            <a:pPr algn="ctr" indent="0" marL="0">
               <a:buNone/>
             </a:pPr>
             <a:r>
-              <a:rPr lang="en-US" sz="2400" b="1" dirty="0">
-                <a:solidFill>
-                  <a:srgbClr val="1B2A4A"/>
+              <a:rPr lang="en-US" sz="16000" b="1" dirty="0">
+                <a:solidFill>
+                  <a:srgbClr val="C8372D">
+                    <a:alpha val="80000"/>
+                  </a:srgbClr>
                 </a:solidFill>
                 <a:latin typeface="Georgia" pitchFamily="34" charset="0"/>
                 <a:ea typeface="Georgia" pitchFamily="34" charset="-122"/>
                 <a:cs typeface="Georgia" pitchFamily="34" charset="-120"/>
               </a:rPr>
-              <a:t>What We're Learning</a:t>
-            </a:r>
-            <a:endParaRPr lang="en-US" sz="2400" dirty="0"/>
-          </a:p>
-        </p:txBody>
-      </p:sp>
-      <p:sp>
-        <p:nvSpPr>
-          <p:cNvPr id="4" name="Shape 2"/>
-          <p:cNvSpPr/>
-          <p:nvPr/>
-        </p:nvSpPr>
-        <p:spPr>
-          <a:xfrm>
-            <a:off x="457200" y="868680"/>
-            <a:ext cx="1828800" cy="27432"/>
-          </a:xfrm>
-          <a:prstGeom prst="rect">
-            <a:avLst/>
-          </a:prstGeom>
-          <a:solidFill>
-            <a:srgbClr val="C8372D"/>
-          </a:solidFill>
-          <a:ln/>
-        </p:spPr>
-      </p:sp>
-      <p:sp>
-        <p:nvSpPr>
-          <p:cNvPr id="5" name="Shape 3"/>
-          <p:cNvSpPr/>
-          <p:nvPr/>
-        </p:nvSpPr>
-        <p:spPr>
-          <a:xfrm>
-            <a:off x="457200" y="1188720"/>
-            <a:ext cx="320040" cy="320040"/>
-          </a:xfrm>
-          <a:prstGeom prst="ellipse">
-            <a:avLst/>
-          </a:prstGeom>
-          <a:solidFill>
-            <a:srgbClr val="C8372D"/>
-          </a:solidFill>
-          <a:ln/>
-        </p:spPr>
-      </p:sp>
-      <p:sp>
-        <p:nvSpPr>
-          <p:cNvPr id="6" name="Text 4"/>
-          <p:cNvSpPr/>
-          <p:nvPr/>
-        </p:nvSpPr>
-        <p:spPr>
-          <a:xfrm>
-            <a:off x="457200" y="1188720"/>
-            <a:ext cx="320040" cy="320040"/>
+              <a:t>?</a:t>
+            </a:r>
+            <a:endParaRPr lang="en-US" sz="16000" dirty="0"/>
+          </a:p>
+        </p:txBody>
+      </p:sp>
+      <p:sp>
+        <p:nvSpPr>
+          <p:cNvPr id="4" name="Text 2"/>
+          <p:cNvSpPr/>
+          <p:nvPr/>
+        </p:nvSpPr>
+        <p:spPr>
+          <a:xfrm>
+            <a:off x="731520" y="548640"/>
+            <a:ext cx="2743200" cy="365760"/>
           </a:xfrm>
           <a:prstGeom prst="rect">
             <a:avLst/>
@@ -3295,19 +2132,19 @@
           <a:bodyPr wrap="square" rtlCol="0" anchor="ctr"/>
           <a:lstStyle/>
           <a:p>
-            <a:pPr algn="ctr" indent="0" marL="0">
+            <a:pPr indent="0" marL="0">
               <a:buNone/>
             </a:pPr>
             <a:r>
-              <a:rPr lang="en-US" sz="1200" b="1" dirty="0">
-                <a:solidFill>
-                  <a:srgbClr val="FFFFFF"/>
+              <a:rPr lang="en-US" sz="1200" b="1" spc="400" kern="0" dirty="0">
+                <a:solidFill>
+                  <a:srgbClr val="C8372D"/>
                 </a:solidFill>
                 <a:latin typeface="Calibri" pitchFamily="34" charset="0"/>
                 <a:ea typeface="Calibri" pitchFamily="34" charset="-122"/>
                 <a:cs typeface="Calibri" pitchFamily="34" charset="-120"/>
               </a:rPr>
-              <a:t>1</a:t>
+              <a:t>INQUIRY</a:t>
             </a:r>
             <a:endParaRPr lang="en-US" sz="1200" dirty="0"/>
           </a:p>
@@ -3315,14 +2152,53 @@
       </p:sp>
       <p:sp>
         <p:nvSpPr>
-          <p:cNvPr id="7" name="Text 5"/>
-          <p:cNvSpPr/>
-          <p:nvPr/>
-        </p:nvSpPr>
-        <p:spPr>
-          <a:xfrm>
-            <a:off x="914400" y="1143000"/>
-            <a:ext cx="7772400" cy="411480"/>
+          <p:cNvPr id="5" name="Text 3"/>
+          <p:cNvSpPr/>
+          <p:nvPr/>
+        </p:nvSpPr>
+        <p:spPr>
+          <a:xfrm>
+            <a:off x="731520" y="1005840"/>
+            <a:ext cx="6858000" cy="1463040"/>
+          </a:xfrm>
+          <a:prstGeom prst="rect">
+            <a:avLst/>
+          </a:prstGeom>
+          <a:noFill/>
+          <a:ln/>
+        </p:spPr>
+        <p:txBody>
+          <a:bodyPr wrap="square" rtlCol="0" anchor="t"/>
+          <a:lstStyle/>
+          <a:p>
+            <a:pPr indent="0" marL="0">
+              <a:buNone/>
+            </a:pPr>
+            <a:r>
+              <a:rPr lang="en-US" sz="2800" b="1" dirty="0">
+                <a:solidFill>
+                  <a:srgbClr val="FFFFFF"/>
+                </a:solidFill>
+                <a:latin typeface="Georgia" pitchFamily="34" charset="0"/>
+                <a:ea typeface="Georgia" pitchFamily="34" charset="-122"/>
+                <a:cs typeface="Georgia" pitchFamily="34" charset="-120"/>
+              </a:rPr>
+              <a:t>A Nanjing taxi charges 11 yuan base + 2.40 yuan per km. A Seoul taxi charges 4,800 won base + 1,000 won per km. If you graph both, what do the lines tell you?</a:t>
+            </a:r>
+            <a:endParaRPr lang="en-US" sz="2800" dirty="0"/>
+          </a:p>
+        </p:txBody>
+      </p:sp>
+      <p:sp>
+        <p:nvSpPr>
+          <p:cNvPr id="6" name="Text 4"/>
+          <p:cNvSpPr/>
+          <p:nvPr/>
+        </p:nvSpPr>
+        <p:spPr>
+          <a:xfrm>
+            <a:off x="731520" y="2560320"/>
+            <a:ext cx="6858000" cy="548640"/>
           </a:xfrm>
           <a:prstGeom prst="rect">
             <a:avLst/>
@@ -3338,50 +2214,50 @@
               <a:buNone/>
             </a:pPr>
             <a:r>
-              <a:rPr lang="en-US" sz="1600" dirty="0">
-                <a:solidFill>
-                  <a:srgbClr val="3D3A36"/>
+              <a:rPr lang="en-US" sz="1400" i="1" dirty="0">
+                <a:solidFill>
+                  <a:srgbClr val="9B9690"/>
                 </a:solidFill>
                 <a:latin typeface="Calibri" pitchFamily="34" charset="0"/>
                 <a:ea typeface="Calibri" pitchFamily="34" charset="-122"/>
                 <a:cs typeface="Calibri" pitchFamily="34" charset="-120"/>
               </a:rPr>
-              <a:t>We are extending algebraic skills to include expanding brackets, solving multi-step equations and inequalities, finding nth term rules, and plotting linear graphs.</a:t>
-            </a:r>
-            <a:endParaRPr lang="en-US" sz="1600" dirty="0"/>
-          </a:p>
-        </p:txBody>
-      </p:sp>
-      <p:sp>
-        <p:nvSpPr>
-          <p:cNvPr id="8" name="Shape 6"/>
-          <p:cNvSpPr/>
-          <p:nvPr/>
-        </p:nvSpPr>
-        <p:spPr>
-          <a:xfrm>
-            <a:off x="457200" y="1783080"/>
-            <a:ext cx="320040" cy="320040"/>
-          </a:xfrm>
-          <a:prstGeom prst="ellipse">
+              <a:t>Every linear equation produces a straight line. The slope and starting point tell the whole story.</a:t>
+            </a:r>
+            <a:endParaRPr lang="en-US" sz="1400" dirty="0"/>
+          </a:p>
+        </p:txBody>
+      </p:sp>
+      <p:sp>
+        <p:nvSpPr>
+          <p:cNvPr id="7" name="Shape 5"/>
+          <p:cNvSpPr/>
+          <p:nvPr/>
+        </p:nvSpPr>
+        <p:spPr>
+          <a:xfrm>
+            <a:off x="548640" y="3200400"/>
+            <a:ext cx="7315200" cy="1645920"/>
+          </a:xfrm>
+          <a:prstGeom prst="rect">
             <a:avLst/>
           </a:prstGeom>
           <a:solidFill>
-            <a:srgbClr val="C8372D"/>
+            <a:srgbClr val="243660"/>
           </a:solidFill>
           <a:ln/>
         </p:spPr>
       </p:sp>
       <p:sp>
         <p:nvSpPr>
-          <p:cNvPr id="9" name="Text 7"/>
-          <p:cNvSpPr/>
-          <p:nvPr/>
-        </p:nvSpPr>
-        <p:spPr>
-          <a:xfrm>
-            <a:off x="457200" y="1783080"/>
-            <a:ext cx="320040" cy="320040"/>
+          <p:cNvPr id="8" name="Text 6"/>
+          <p:cNvSpPr/>
+          <p:nvPr/>
+        </p:nvSpPr>
+        <p:spPr>
+          <a:xfrm>
+            <a:off x="731520" y="3246120"/>
+            <a:ext cx="3657600" cy="320040"/>
           </a:xfrm>
           <a:prstGeom prst="rect">
             <a:avLst/>
@@ -3393,34 +2269,34 @@
           <a:bodyPr wrap="square" rtlCol="0" anchor="ctr"/>
           <a:lstStyle/>
           <a:p>
-            <a:pPr algn="ctr" indent="0" marL="0">
+            <a:pPr indent="0" marL="0">
               <a:buNone/>
             </a:pPr>
             <a:r>
-              <a:rPr lang="en-US" sz="1200" b="1" dirty="0">
-                <a:solidFill>
-                  <a:srgbClr val="FFFFFF"/>
+              <a:rPr lang="en-US" sz="1100" b="1" spc="200" kern="0" dirty="0">
+                <a:solidFill>
+                  <a:srgbClr val="C8372D"/>
                 </a:solidFill>
                 <a:latin typeface="Calibri" pitchFamily="34" charset="0"/>
                 <a:ea typeface="Calibri" pitchFamily="34" charset="-122"/>
                 <a:cs typeface="Calibri" pitchFamily="34" charset="-120"/>
               </a:rPr>
-              <a:t>2</a:t>
-            </a:r>
-            <a:endParaRPr lang="en-US" sz="1200" dirty="0"/>
-          </a:p>
-        </p:txBody>
-      </p:sp>
-      <p:sp>
-        <p:nvSpPr>
-          <p:cNvPr id="10" name="Text 8"/>
-          <p:cNvSpPr/>
-          <p:nvPr/>
-        </p:nvSpPr>
-        <p:spPr>
-          <a:xfrm>
-            <a:off x="914400" y="1737360"/>
-            <a:ext cx="7772400" cy="411480"/>
+              <a:t>Think — Pair — Share</a:t>
+            </a:r>
+            <a:endParaRPr lang="en-US" sz="1100" dirty="0"/>
+          </a:p>
+        </p:txBody>
+      </p:sp>
+      <p:sp>
+        <p:nvSpPr>
+          <p:cNvPr id="9" name="Text 7"/>
+          <p:cNvSpPr/>
+          <p:nvPr/>
+        </p:nvSpPr>
+        <p:spPr>
+          <a:xfrm>
+            <a:off x="731520" y="3566160"/>
+            <a:ext cx="6949440" cy="1188720"/>
           </a:xfrm>
           <a:prstGeom prst="rect">
             <a:avLst/>
@@ -3432,256 +2308,67 @@
           <a:bodyPr wrap="square" rtlCol="0" anchor="ctr"/>
           <a:lstStyle/>
           <a:p>
-            <a:pPr indent="0" marL="0">
-              <a:buNone/>
-            </a:pPr>
-            <a:r>
-              <a:rPr lang="en-US" sz="1600" dirty="0">
-                <a:solidFill>
-                  <a:srgbClr val="3D3A36"/>
+            <a:pPr marL="342900" indent="-342900">
+              <a:spcAft>
+                <a:spcPts val="600"/>
+              </a:spcAft>
+              <a:buSzPct val="100000"/>
+              <a:buChar char="•"/>
+            </a:pPr>
+            <a:r>
+              <a:rPr lang="en-US" sz="1400" dirty="0">
+                <a:solidFill>
+                  <a:srgbClr val="E5E2DC"/>
                 </a:solidFill>
                 <a:latin typeface="Calibri" pitchFamily="34" charset="0"/>
                 <a:ea typeface="Calibri" pitchFamily="34" charset="-122"/>
                 <a:cs typeface="Calibri" pitchFamily="34" charset="-120"/>
               </a:rPr>
-              <a:t>Key Concept: Logic</a:t>
-            </a:r>
-            <a:endParaRPr lang="en-US" sz="1600" dirty="0"/>
-          </a:p>
-        </p:txBody>
-      </p:sp>
-      <p:sp>
-        <p:nvSpPr>
-          <p:cNvPr id="11" name="Shape 9"/>
-          <p:cNvSpPr/>
-          <p:nvPr/>
-        </p:nvSpPr>
-        <p:spPr>
-          <a:xfrm>
-            <a:off x="457200" y="2377440"/>
-            <a:ext cx="320040" cy="320040"/>
-          </a:xfrm>
-          <a:prstGeom prst="ellipse">
-            <a:avLst/>
-          </a:prstGeom>
-          <a:solidFill>
-            <a:srgbClr val="C8372D"/>
-          </a:solidFill>
-          <a:ln/>
-        </p:spPr>
-      </p:sp>
-      <p:sp>
-        <p:nvSpPr>
-          <p:cNvPr id="12" name="Text 10"/>
-          <p:cNvSpPr/>
-          <p:nvPr/>
-        </p:nvSpPr>
-        <p:spPr>
-          <a:xfrm>
-            <a:off x="457200" y="2377440"/>
-            <a:ext cx="320040" cy="320040"/>
-          </a:xfrm>
-          <a:prstGeom prst="rect">
-            <a:avLst/>
-          </a:prstGeom>
-          <a:noFill/>
-          <a:ln/>
-        </p:spPr>
-        <p:txBody>
-          <a:bodyPr wrap="square" rtlCol="0" anchor="ctr"/>
-          <a:lstStyle/>
-          <a:p>
-            <a:pPr algn="ctr" indent="0" marL="0">
-              <a:buNone/>
-            </a:pPr>
-            <a:r>
-              <a:rPr lang="en-US" sz="1200" b="1" dirty="0">
-                <a:solidFill>
-                  <a:srgbClr val="FFFFFF"/>
+              <a:t>What does the starting point (y-intercept) represent?</a:t>
+            </a:r>
+            <a:endParaRPr lang="en-US" sz="1400" dirty="0"/>
+          </a:p>
+          <a:p>
+            <a:pPr marL="342900" indent="-342900">
+              <a:spcAft>
+                <a:spcPts val="600"/>
+              </a:spcAft>
+              <a:buSzPct val="100000"/>
+              <a:buChar char="•"/>
+            </a:pPr>
+            <a:r>
+              <a:rPr lang="en-US" sz="1400" dirty="0">
+                <a:solidFill>
+                  <a:srgbClr val="E5E2DC"/>
                 </a:solidFill>
                 <a:latin typeface="Calibri" pitchFamily="34" charset="0"/>
                 <a:ea typeface="Calibri" pitchFamily="34" charset="-122"/>
                 <a:cs typeface="Calibri" pitchFamily="34" charset="-120"/>
               </a:rPr>
-              <a:t>3</a:t>
-            </a:r>
-            <a:endParaRPr lang="en-US" sz="1200" dirty="0"/>
-          </a:p>
-        </p:txBody>
-      </p:sp>
-      <p:sp>
-        <p:nvSpPr>
-          <p:cNvPr id="13" name="Text 11"/>
-          <p:cNvSpPr/>
-          <p:nvPr/>
-        </p:nvSpPr>
-        <p:spPr>
-          <a:xfrm>
-            <a:off x="914400" y="2331720"/>
-            <a:ext cx="7772400" cy="411480"/>
-          </a:xfrm>
-          <a:prstGeom prst="rect">
-            <a:avLst/>
-          </a:prstGeom>
-          <a:noFill/>
-          <a:ln/>
-        </p:spPr>
-        <p:txBody>
-          <a:bodyPr wrap="square" rtlCol="0" anchor="ctr"/>
-          <a:lstStyle/>
-          <a:p>
-            <a:pPr indent="0" marL="0">
-              <a:buNone/>
-            </a:pPr>
-            <a:r>
-              <a:rPr lang="en-US" sz="1600" dirty="0">
-                <a:solidFill>
-                  <a:srgbClr val="3D3A36"/>
+              <a:t>What does the steepness (gradient) represent?</a:t>
+            </a:r>
+            <a:endParaRPr lang="en-US" sz="1400" dirty="0"/>
+          </a:p>
+          <a:p>
+            <a:pPr marL="342900" indent="-342900">
+              <a:spcAft>
+                <a:spcPts val="600"/>
+              </a:spcAft>
+              <a:buSzPct val="100000"/>
+              <a:buChar char="•"/>
+            </a:pPr>
+            <a:r>
+              <a:rPr lang="en-US" sz="1400" dirty="0">
+                <a:solidFill>
+                  <a:srgbClr val="E5E2DC"/>
                 </a:solidFill>
                 <a:latin typeface="Calibri" pitchFamily="34" charset="0"/>
                 <a:ea typeface="Calibri" pitchFamily="34" charset="-122"/>
                 <a:cs typeface="Calibri" pitchFamily="34" charset="-120"/>
               </a:rPr>
-              <a:t>Global Context: Identities and Relationships</a:t>
-            </a:r>
-            <a:endParaRPr lang="en-US" sz="1600" dirty="0"/>
-          </a:p>
-        </p:txBody>
-      </p:sp>
-      <p:sp>
-        <p:nvSpPr>
-          <p:cNvPr id="14" name="Shape 12"/>
-          <p:cNvSpPr/>
-          <p:nvPr/>
-        </p:nvSpPr>
-        <p:spPr>
-          <a:xfrm>
-            <a:off x="457200" y="2971800"/>
-            <a:ext cx="320040" cy="320040"/>
-          </a:xfrm>
-          <a:prstGeom prst="ellipse">
-            <a:avLst/>
-          </a:prstGeom>
-          <a:solidFill>
-            <a:srgbClr val="E5E2DC"/>
-          </a:solidFill>
-          <a:ln/>
-        </p:spPr>
-      </p:sp>
-      <p:sp>
-        <p:nvSpPr>
-          <p:cNvPr id="15" name="Text 13"/>
-          <p:cNvSpPr/>
-          <p:nvPr/>
-        </p:nvSpPr>
-        <p:spPr>
-          <a:xfrm>
-            <a:off x="457200" y="2971800"/>
-            <a:ext cx="320040" cy="320040"/>
-          </a:xfrm>
-          <a:prstGeom prst="rect">
-            <a:avLst/>
-          </a:prstGeom>
-          <a:noFill/>
-          <a:ln/>
-        </p:spPr>
-        <p:txBody>
-          <a:bodyPr wrap="square" rtlCol="0" anchor="ctr"/>
-          <a:lstStyle/>
-          <a:p>
-            <a:pPr algn="ctr" indent="0" marL="0">
-              <a:buNone/>
-            </a:pPr>
-            <a:r>
-              <a:rPr lang="en-US" sz="1200" b="1" dirty="0">
-                <a:solidFill>
-                  <a:srgbClr val="FFFFFF"/>
-                </a:solidFill>
-                <a:latin typeface="Calibri" pitchFamily="34" charset="0"/>
-                <a:ea typeface="Calibri" pitchFamily="34" charset="-122"/>
-                <a:cs typeface="Calibri" pitchFamily="34" charset="-120"/>
-              </a:rPr>
-              <a:t>4</a:t>
-            </a:r>
-            <a:endParaRPr lang="en-US" sz="1200" dirty="0"/>
-          </a:p>
-        </p:txBody>
-      </p:sp>
-      <p:sp>
-        <p:nvSpPr>
-          <p:cNvPr id="16" name="Text 14"/>
-          <p:cNvSpPr/>
-          <p:nvPr/>
-        </p:nvSpPr>
-        <p:spPr>
-          <a:xfrm>
-            <a:off x="914400" y="2926080"/>
-            <a:ext cx="7772400" cy="411480"/>
-          </a:xfrm>
-          <a:prstGeom prst="rect">
-            <a:avLst/>
-          </a:prstGeom>
-          <a:noFill/>
-          <a:ln/>
-        </p:spPr>
-        <p:txBody>
-          <a:bodyPr wrap="square" rtlCol="0" anchor="ctr"/>
-          <a:lstStyle/>
-          <a:p>
-            <a:pPr indent="0" marL="0">
-              <a:buNone/>
-            </a:pPr>
-            <a:r>
-              <a:rPr lang="en-US" sz="1600" dirty="0">
-                <a:solidFill>
-                  <a:srgbClr val="3D3A36"/>
-                </a:solidFill>
-                <a:latin typeface="Calibri" pitchFamily="34" charset="0"/>
-                <a:ea typeface="Calibri" pitchFamily="34" charset="-122"/>
-                <a:cs typeface="Calibri" pitchFamily="34" charset="-120"/>
-              </a:rPr>
-              <a:t>"Logic allows us to generalise relationships, predict outcomes, and represent them graphically."</a:t>
-            </a:r>
-            <a:endParaRPr lang="en-US" sz="1600" dirty="0"/>
-          </a:p>
-        </p:txBody>
-      </p:sp>
-      <p:sp>
-        <p:nvSpPr>
-          <p:cNvPr id="17" name="Text 15"/>
-          <p:cNvSpPr/>
-          <p:nvPr/>
-        </p:nvSpPr>
-        <p:spPr>
-          <a:xfrm>
-            <a:off x="7315200" y="4754880"/>
-            <a:ext cx="1828800" cy="274320"/>
-          </a:xfrm>
-          <a:prstGeom prst="rect">
-            <a:avLst/>
-          </a:prstGeom>
-          <a:noFill/>
-          <a:ln/>
-        </p:spPr>
-        <p:txBody>
-          <a:bodyPr wrap="square" rtlCol="0" anchor="ctr"/>
-          <a:lstStyle/>
-          <a:p>
-            <a:pPr algn="r" indent="0" marL="0">
-              <a:buNone/>
-            </a:pPr>
-            <a:r>
-              <a:rPr lang="en-US" sz="900" dirty="0">
-                <a:solidFill>
-                  <a:srgbClr val="9B9690"/>
-                </a:solidFill>
-                <a:latin typeface="Calibri" pitchFamily="34" charset="0"/>
-                <a:ea typeface="Calibri" pitchFamily="34" charset="-122"/>
-                <a:cs typeface="Calibri" pitchFamily="34" charset="-120"/>
-              </a:rPr>
-              <a:t>mrzocchi.com</a:t>
-            </a:r>
-            <a:endParaRPr lang="en-US" sz="900" dirty="0"/>
+              <a:t>Where would the two lines cross? What would that mean?</a:t>
+            </a:r>
+            <a:endParaRPr lang="en-US" sz="1400" dirty="0"/>
           </a:p>
         </p:txBody>
       </p:sp>
@@ -3696,6 +2383,13 @@
 <file path=ppt/slides/slide3.xml><?xml version="1.0" encoding="utf-8"?>
 <p:sld xmlns:a="http://schemas.openxmlformats.org/drawingml/2006/main" xmlns:r="http://schemas.openxmlformats.org/officeDocument/2006/relationships" xmlns:p="http://schemas.openxmlformats.org/presentationml/2006/main">
   <p:cSld name="Slide 3">
+    <p:bg>
+      <p:bgPr>
+        <a:solidFill>
+          <a:srgbClr val="FAF8F5"/>
+        </a:solidFill>
+      </p:bgPr>
+    </p:bg>
     <p:spTree>
       <p:nvGrpSpPr>
         <p:cNvPr id="1" name=""/>
@@ -3719,7 +2413,27 @@
         <p:spPr>
           <a:xfrm>
             <a:off x="0" y="0"/>
-            <a:ext cx="9144000" cy="54864"/>
+            <a:ext cx="9144000" cy="822960"/>
+          </a:xfrm>
+          <a:prstGeom prst="rect">
+            <a:avLst/>
+          </a:prstGeom>
+          <a:solidFill>
+            <a:srgbClr val="FFFFFF"/>
+          </a:solidFill>
+          <a:ln/>
+        </p:spPr>
+      </p:sp>
+      <p:sp>
+        <p:nvSpPr>
+          <p:cNvPr id="3" name="Shape 1"/>
+          <p:cNvSpPr/>
+          <p:nvPr/>
+        </p:nvSpPr>
+        <p:spPr>
+          <a:xfrm>
+            <a:off x="0" y="795528"/>
+            <a:ext cx="9144000" cy="27432"/>
           </a:xfrm>
           <a:prstGeom prst="rect">
             <a:avLst/>
@@ -3732,14 +2446,14 @@
       </p:sp>
       <p:sp>
         <p:nvSpPr>
-          <p:cNvPr id="3" name="Text 1"/>
-          <p:cNvSpPr/>
-          <p:nvPr/>
-        </p:nvSpPr>
-        <p:spPr>
-          <a:xfrm>
-            <a:off x="457200" y="228600"/>
-            <a:ext cx="8229600" cy="548640"/>
+          <p:cNvPr id="4" name="Text 2"/>
+          <p:cNvSpPr/>
+          <p:nvPr/>
+        </p:nvSpPr>
+        <p:spPr>
+          <a:xfrm>
+            <a:off x="640080" y="91440"/>
+            <a:ext cx="7863840" cy="640080"/>
           </a:xfrm>
           <a:prstGeom prst="rect">
             <a:avLst/>
@@ -3755,7 +2469,7 @@
               <a:buNone/>
             </a:pPr>
             <a:r>
-              <a:rPr lang="en-US" sz="2400" b="1" dirty="0">
+              <a:rPr lang="en-US" sz="2200" b="1" dirty="0">
                 <a:solidFill>
                   <a:srgbClr val="1B2A4A"/>
                 </a:solidFill>
@@ -3763,22 +2477,176 @@
                 <a:ea typeface="Georgia" pitchFamily="34" charset="-122"/>
                 <a:cs typeface="Georgia" pitchFamily="34" charset="-120"/>
               </a:rPr>
-              <a:t>Key Vocabulary</a:t>
-            </a:r>
-            <a:endParaRPr lang="en-US" sz="2400" dirty="0"/>
-          </a:p>
-        </p:txBody>
-      </p:sp>
-      <p:sp>
-        <p:nvSpPr>
-          <p:cNvPr id="4" name="Shape 2"/>
-          <p:cNvSpPr/>
-          <p:nvPr/>
-        </p:nvSpPr>
-        <p:spPr>
-          <a:xfrm>
-            <a:off x="457200" y="868680"/>
-            <a:ext cx="1828800" cy="27432"/>
+              <a:t>y = mx + c</a:t>
+            </a:r>
+            <a:endParaRPr lang="en-US" sz="2200" dirty="0"/>
+          </a:p>
+        </p:txBody>
+      </p:sp>
+      <p:sp>
+        <p:nvSpPr>
+          <p:cNvPr id="5" name="Text 3"/>
+          <p:cNvSpPr/>
+          <p:nvPr/>
+        </p:nvSpPr>
+        <p:spPr>
+          <a:xfrm>
+            <a:off x="640080" y="1005840"/>
+            <a:ext cx="7863840" cy="2926080"/>
+          </a:xfrm>
+          <a:prstGeom prst="rect">
+            <a:avLst/>
+          </a:prstGeom>
+          <a:noFill/>
+          <a:ln/>
+        </p:spPr>
+        <p:txBody>
+          <a:bodyPr wrap="square" rtlCol="0" anchor="ctr"/>
+          <a:lstStyle/>
+          <a:p>
+            <a:pPr marL="342900" indent="-342900">
+              <a:spcAft>
+                <a:spcPts val="800"/>
+              </a:spcAft>
+              <a:buSzPct val="100000"/>
+              <a:buChar char="•"/>
+            </a:pPr>
+            <a:r>
+              <a:rPr lang="en-US" sz="1600" dirty="0">
+                <a:solidFill>
+                  <a:srgbClr val="3D3A36"/>
+                </a:solidFill>
+                <a:latin typeface="Calibri" pitchFamily="34" charset="0"/>
+                <a:ea typeface="Calibri" pitchFamily="34" charset="-122"/>
+                <a:cs typeface="Calibri" pitchFamily="34" charset="-120"/>
+              </a:rPr>
+              <a:t>m = gradient (slope) — how steep the line is.</a:t>
+            </a:r>
+            <a:endParaRPr lang="en-US" sz="1600" dirty="0"/>
+          </a:p>
+          <a:p>
+            <a:pPr marL="342900" indent="-342900">
+              <a:spcAft>
+                <a:spcPts val="800"/>
+              </a:spcAft>
+              <a:buSzPct val="100000"/>
+              <a:buChar char="•"/>
+            </a:pPr>
+            <a:r>
+              <a:rPr lang="en-US" sz="1600" dirty="0">
+                <a:solidFill>
+                  <a:srgbClr val="3D3A36"/>
+                </a:solidFill>
+                <a:latin typeface="Calibri" pitchFamily="34" charset="0"/>
+                <a:ea typeface="Calibri" pitchFamily="34" charset="-122"/>
+                <a:cs typeface="Calibri" pitchFamily="34" charset="-120"/>
+              </a:rPr>
+              <a:t>c = y-intercept — where the line crosses the y-axis.</a:t>
+            </a:r>
+            <a:endParaRPr lang="en-US" sz="1600" dirty="0"/>
+          </a:p>
+          <a:p>
+            <a:pPr marL="342900" indent="-342900">
+              <a:spcAft>
+                <a:spcPts val="800"/>
+              </a:spcAft>
+              <a:buSzPct val="100000"/>
+              <a:buChar char="•"/>
+            </a:pPr>
+            <a:r>
+              <a:rPr lang="en-US" sz="1600" dirty="0">
+                <a:solidFill>
+                  <a:srgbClr val="3D3A36"/>
+                </a:solidFill>
+                <a:latin typeface="Calibri" pitchFamily="34" charset="0"/>
+                <a:ea typeface="Calibri" pitchFamily="34" charset="-122"/>
+                <a:cs typeface="Calibri" pitchFamily="34" charset="-120"/>
+              </a:rPr>
+              <a:t>y = 2x + 3: gradient 2, crosses y-axis at 3.</a:t>
+            </a:r>
+            <a:endParaRPr lang="en-US" sz="1600" dirty="0"/>
+          </a:p>
+          <a:p>
+            <a:pPr marL="342900" indent="-342900">
+              <a:spcAft>
+                <a:spcPts val="800"/>
+              </a:spcAft>
+              <a:buSzPct val="100000"/>
+              <a:buChar char="•"/>
+            </a:pPr>
+            <a:r>
+              <a:rPr lang="en-US" sz="1600" dirty="0">
+                <a:solidFill>
+                  <a:srgbClr val="3D3A36"/>
+                </a:solidFill>
+                <a:latin typeface="Calibri" pitchFamily="34" charset="0"/>
+                <a:ea typeface="Calibri" pitchFamily="34" charset="-122"/>
+                <a:cs typeface="Calibri" pitchFamily="34" charset="-120"/>
+              </a:rPr>
+              <a:t>Positive gradient → line goes UP (left to right).</a:t>
+            </a:r>
+            <a:endParaRPr lang="en-US" sz="1600" dirty="0"/>
+          </a:p>
+          <a:p>
+            <a:pPr marL="342900" indent="-342900">
+              <a:spcAft>
+                <a:spcPts val="800"/>
+              </a:spcAft>
+              <a:buSzPct val="100000"/>
+              <a:buChar char="•"/>
+            </a:pPr>
+            <a:r>
+              <a:rPr lang="en-US" sz="1600" dirty="0">
+                <a:solidFill>
+                  <a:srgbClr val="3D3A36"/>
+                </a:solidFill>
+                <a:latin typeface="Calibri" pitchFamily="34" charset="0"/>
+                <a:ea typeface="Calibri" pitchFamily="34" charset="-122"/>
+                <a:cs typeface="Calibri" pitchFamily="34" charset="-120"/>
+              </a:rPr>
+              <a:t>Negative gradient → line goes DOWN (left to right).</a:t>
+            </a:r>
+            <a:endParaRPr lang="en-US" sz="1600" dirty="0"/>
+          </a:p>
+        </p:txBody>
+      </p:sp>
+      <p:sp>
+        <p:nvSpPr>
+          <p:cNvPr id="6" name="Shape 4"/>
+          <p:cNvSpPr/>
+          <p:nvPr/>
+        </p:nvSpPr>
+        <p:spPr>
+          <a:xfrm>
+            <a:off x="640080" y="4114800"/>
+            <a:ext cx="7863840" cy="731520"/>
+          </a:xfrm>
+          <a:prstGeom prst="rect">
+            <a:avLst/>
+          </a:prstGeom>
+          <a:solidFill>
+            <a:srgbClr val="E8F5F3"/>
+          </a:solidFill>
+          <a:ln/>
+          <a:effectLst>
+            <a:outerShdw sx="100000" sy="100000" kx="0" ky="0" algn="bl" rotWithShape="0" blurRad="76200" dist="25400" dir="8100000">
+              <a:srgbClr val="000000">
+                <a:alpha val="12000"/>
+              </a:srgbClr>
+            </a:outerShdw>
+          </a:effectLst>
+        </p:spPr>
+      </p:sp>
+      <p:sp>
+        <p:nvSpPr>
+          <p:cNvPr id="7" name="Shape 5"/>
+          <p:cNvSpPr/>
+          <p:nvPr/>
+        </p:nvSpPr>
+        <p:spPr>
+          <a:xfrm>
+            <a:off x="640080" y="4114800"/>
+            <a:ext cx="64008" cy="731520"/>
           </a:xfrm>
           <a:prstGeom prst="rect">
             <a:avLst/>
@@ -3791,14 +2659,14 @@
       </p:sp>
       <p:sp>
         <p:nvSpPr>
-          <p:cNvPr id="5" name="Text 3"/>
-          <p:cNvSpPr/>
-          <p:nvPr/>
-        </p:nvSpPr>
-        <p:spPr>
-          <a:xfrm>
-            <a:off x="457200" y="1188720"/>
-            <a:ext cx="8229600" cy="548640"/>
+          <p:cNvPr id="8" name="Text 6"/>
+          <p:cNvSpPr/>
+          <p:nvPr/>
+        </p:nvSpPr>
+        <p:spPr>
+          <a:xfrm>
+            <a:off x="914400" y="4160520"/>
+            <a:ext cx="7406640" cy="640080"/>
           </a:xfrm>
           <a:prstGeom prst="rect">
             <a:avLst/>
@@ -3814,137 +2682,17 @@
               <a:buNone/>
             </a:pPr>
             <a:r>
-              <a:rPr lang="en-US" sz="2800" b="1" dirty="0">
-                <a:solidFill>
-                  <a:srgbClr val="C8372D"/>
-                </a:solidFill>
-                <a:latin typeface="Georgia" pitchFamily="34" charset="0"/>
-                <a:ea typeface="Georgia" pitchFamily="34" charset="-122"/>
-                <a:cs typeface="Georgia" pitchFamily="34" charset="-120"/>
-              </a:rPr>
-              <a:t>Expression</a:t>
-            </a:r>
-            <a:endParaRPr lang="en-US" sz="2800" dirty="0"/>
-          </a:p>
-        </p:txBody>
-      </p:sp>
-      <p:sp>
-        <p:nvSpPr>
-          <p:cNvPr id="6" name="Text 4"/>
-          <p:cNvSpPr/>
-          <p:nvPr/>
-        </p:nvSpPr>
-        <p:spPr>
-          <a:xfrm>
-            <a:off x="457200" y="1691640"/>
-            <a:ext cx="8229600" cy="365760"/>
-          </a:xfrm>
-          <a:prstGeom prst="rect">
-            <a:avLst/>
-          </a:prstGeom>
-          <a:noFill/>
-          <a:ln/>
-        </p:spPr>
-        <p:txBody>
-          <a:bodyPr wrap="square" rtlCol="0" anchor="ctr"/>
-          <a:lstStyle/>
-          <a:p>
-            <a:pPr indent="0" marL="0">
-              <a:buNone/>
-            </a:pPr>
-            <a:r>
-              <a:rPr lang="en-US" sz="1600" i="1" dirty="0">
-                <a:solidFill>
-                  <a:srgbClr val="9B9690"/>
+              <a:rPr lang="en-US" sz="1300" i="1" dirty="0">
+                <a:solidFill>
+                  <a:srgbClr val="3D3A36"/>
                 </a:solidFill>
                 <a:latin typeface="Calibri" pitchFamily="34" charset="0"/>
                 <a:ea typeface="Calibri" pitchFamily="34" charset="-122"/>
                 <a:cs typeface="Calibri" pitchFamily="34" charset="-120"/>
               </a:rPr>
-              <a:t>代数式</a:t>
-            </a:r>
-            <a:endParaRPr lang="en-US" sz="1600" dirty="0"/>
-          </a:p>
-        </p:txBody>
-      </p:sp>
-      <p:sp>
-        <p:nvSpPr>
-          <p:cNvPr id="7" name="Text 5"/>
-          <p:cNvSpPr/>
-          <p:nvPr/>
-        </p:nvSpPr>
-        <p:spPr>
-          <a:xfrm>
-            <a:off x="457200" y="2194560"/>
-            <a:ext cx="8229600" cy="1828800"/>
-          </a:xfrm>
-          <a:prstGeom prst="rect">
-            <a:avLst/>
-          </a:prstGeom>
-          <a:noFill/>
-          <a:ln/>
-        </p:spPr>
-        <p:txBody>
-          <a:bodyPr wrap="square" rtlCol="0" anchor="ctr"/>
-          <a:lstStyle/>
-          <a:p>
-            <a:pPr indent="0" marL="0">
-              <a:lnSpc>
-                <a:spcPct val="150000"/>
-              </a:lnSpc>
-              <a:buNone/>
-            </a:pPr>
-            <a:r>
-              <a:rPr lang="en-US" sz="1800" dirty="0">
-                <a:solidFill>
-                  <a:srgbClr val="6B6660"/>
-                </a:solidFill>
-                <a:latin typeface="Calibri" pitchFamily="34" charset="0"/>
-                <a:ea typeface="Calibri" pitchFamily="34" charset="-122"/>
-                <a:cs typeface="Calibri" pitchFamily="34" charset="-120"/>
-              </a:rPr>
-              <a:t>Numbers, variables, and operations combined. No equals sign. e.g. 3x + 5.</a:t>
-            </a:r>
-            <a:endParaRPr lang="en-US" sz="1800" dirty="0"/>
-          </a:p>
-        </p:txBody>
-      </p:sp>
-      <p:sp>
-        <p:nvSpPr>
-          <p:cNvPr id="8" name="Text 6"/>
-          <p:cNvSpPr/>
-          <p:nvPr/>
-        </p:nvSpPr>
-        <p:spPr>
-          <a:xfrm>
-            <a:off x="7315200" y="4754880"/>
-            <a:ext cx="1828800" cy="274320"/>
-          </a:xfrm>
-          <a:prstGeom prst="rect">
-            <a:avLst/>
-          </a:prstGeom>
-          <a:noFill/>
-          <a:ln/>
-        </p:spPr>
-        <p:txBody>
-          <a:bodyPr wrap="square" rtlCol="0" anchor="ctr"/>
-          <a:lstStyle/>
-          <a:p>
-            <a:pPr algn="r" indent="0" marL="0">
-              <a:buNone/>
-            </a:pPr>
-            <a:r>
-              <a:rPr lang="en-US" sz="900" dirty="0">
-                <a:solidFill>
-                  <a:srgbClr val="9B9690"/>
-                </a:solidFill>
-                <a:latin typeface="Calibri" pitchFamily="34" charset="0"/>
-                <a:ea typeface="Calibri" pitchFamily="34" charset="-122"/>
-                <a:cs typeface="Calibri" pitchFamily="34" charset="-120"/>
-              </a:rPr>
-              <a:t>mrzocchi.com</a:t>
-            </a:r>
-            <a:endParaRPr lang="en-US" sz="900" dirty="0"/>
+              <a:t>Taxi: C = 2.4d + 11. Gradient = 2.40 (cost per km). Intercept = 11 (base charge).</a:t>
+            </a:r>
+            <a:endParaRPr lang="en-US" sz="1300" dirty="0"/>
           </a:p>
         </p:txBody>
       </p:sp>
@@ -3959,6 +2707,13 @@
 <file path=ppt/slides/slide4.xml><?xml version="1.0" encoding="utf-8"?>
 <p:sld xmlns:a="http://schemas.openxmlformats.org/drawingml/2006/main" xmlns:r="http://schemas.openxmlformats.org/officeDocument/2006/relationships" xmlns:p="http://schemas.openxmlformats.org/presentationml/2006/main">
   <p:cSld name="Slide 4">
+    <p:bg>
+      <p:bgPr>
+        <a:solidFill>
+          <a:srgbClr val="FAF8F5"/>
+        </a:solidFill>
+      </p:bgPr>
+    </p:bg>
     <p:spTree>
       <p:nvGrpSpPr>
         <p:cNvPr id="1" name=""/>
@@ -3982,7 +2737,27 @@
         <p:spPr>
           <a:xfrm>
             <a:off x="0" y="0"/>
-            <a:ext cx="9144000" cy="54864"/>
+            <a:ext cx="9144000" cy="822960"/>
+          </a:xfrm>
+          <a:prstGeom prst="rect">
+            <a:avLst/>
+          </a:prstGeom>
+          <a:solidFill>
+            <a:srgbClr val="FFFFFF"/>
+          </a:solidFill>
+          <a:ln/>
+        </p:spPr>
+      </p:sp>
+      <p:sp>
+        <p:nvSpPr>
+          <p:cNvPr id="3" name="Shape 1"/>
+          <p:cNvSpPr/>
+          <p:nvPr/>
+        </p:nvSpPr>
+        <p:spPr>
+          <a:xfrm>
+            <a:off x="0" y="795528"/>
+            <a:ext cx="9144000" cy="27432"/>
           </a:xfrm>
           <a:prstGeom prst="rect">
             <a:avLst/>
@@ -3995,14 +2770,14 @@
       </p:sp>
       <p:sp>
         <p:nvSpPr>
-          <p:cNvPr id="3" name="Text 1"/>
-          <p:cNvSpPr/>
-          <p:nvPr/>
-        </p:nvSpPr>
-        <p:spPr>
-          <a:xfrm>
-            <a:off x="457200" y="228600"/>
-            <a:ext cx="8229600" cy="548640"/>
+          <p:cNvPr id="4" name="Text 2"/>
+          <p:cNvSpPr/>
+          <p:nvPr/>
+        </p:nvSpPr>
+        <p:spPr>
+          <a:xfrm>
+            <a:off x="640080" y="91440"/>
+            <a:ext cx="7863840" cy="640080"/>
           </a:xfrm>
           <a:prstGeom prst="rect">
             <a:avLst/>
@@ -4018,7 +2793,7 @@
               <a:buNone/>
             </a:pPr>
             <a:r>
-              <a:rPr lang="en-US" sz="2400" b="1" dirty="0">
+              <a:rPr lang="en-US" sz="2200" b="1" dirty="0">
                 <a:solidFill>
                   <a:srgbClr val="1B2A4A"/>
                 </a:solidFill>
@@ -4026,31 +2801,11 @@
                 <a:ea typeface="Georgia" pitchFamily="34" charset="-122"/>
                 <a:cs typeface="Georgia" pitchFamily="34" charset="-120"/>
               </a:rPr>
-              <a:t>Key Vocabulary</a:t>
-            </a:r>
-            <a:endParaRPr lang="en-US" sz="2400" dirty="0"/>
-          </a:p>
-        </p:txBody>
-      </p:sp>
-      <p:sp>
-        <p:nvSpPr>
-          <p:cNvPr id="4" name="Shape 2"/>
-          <p:cNvSpPr/>
-          <p:nvPr/>
-        </p:nvSpPr>
-        <p:spPr>
-          <a:xfrm>
-            <a:off x="457200" y="868680"/>
-            <a:ext cx="1828800" cy="27432"/>
-          </a:xfrm>
-          <a:prstGeom prst="rect">
-            <a:avLst/>
-          </a:prstGeom>
-          <a:solidFill>
-            <a:srgbClr val="C8372D"/>
-          </a:solidFill>
-          <a:ln/>
-        </p:spPr>
+              <a:t>Plotting a Line — Method</a:t>
+            </a:r>
+            <a:endParaRPr lang="en-US" sz="2200" dirty="0"/>
+          </a:p>
+        </p:txBody>
       </p:sp>
       <p:sp>
         <p:nvSpPr>
@@ -4060,8 +2815,8 @@
         </p:nvSpPr>
         <p:spPr>
           <a:xfrm>
-            <a:off x="457200" y="1188720"/>
-            <a:ext cx="8229600" cy="548640"/>
+            <a:off x="640080" y="1005840"/>
+            <a:ext cx="7863840" cy="2926080"/>
           </a:xfrm>
           <a:prstGeom prst="rect">
             <a:avLst/>
@@ -4073,141 +2828,109 @@
           <a:bodyPr wrap="square" rtlCol="0" anchor="ctr"/>
           <a:lstStyle/>
           <a:p>
-            <a:pPr indent="0" marL="0">
-              <a:buNone/>
-            </a:pPr>
-            <a:r>
-              <a:rPr lang="en-US" sz="2800" b="1" dirty="0">
-                <a:solidFill>
-                  <a:srgbClr val="C8372D"/>
-                </a:solidFill>
-                <a:latin typeface="Georgia" pitchFamily="34" charset="0"/>
-                <a:ea typeface="Georgia" pitchFamily="34" charset="-122"/>
-                <a:cs typeface="Georgia" pitchFamily="34" charset="-120"/>
-              </a:rPr>
-              <a:t>Equation</a:t>
-            </a:r>
-            <a:endParaRPr lang="en-US" sz="2800" dirty="0"/>
-          </a:p>
-        </p:txBody>
-      </p:sp>
-      <p:sp>
-        <p:nvSpPr>
-          <p:cNvPr id="6" name="Text 4"/>
-          <p:cNvSpPr/>
-          <p:nvPr/>
-        </p:nvSpPr>
-        <p:spPr>
-          <a:xfrm>
-            <a:off x="457200" y="1691640"/>
-            <a:ext cx="8229600" cy="365760"/>
-          </a:xfrm>
-          <a:prstGeom prst="rect">
-            <a:avLst/>
-          </a:prstGeom>
-          <a:noFill/>
-          <a:ln/>
-        </p:spPr>
-        <p:txBody>
-          <a:bodyPr wrap="square" rtlCol="0" anchor="ctr"/>
-          <a:lstStyle/>
-          <a:p>
-            <a:pPr indent="0" marL="0">
-              <a:buNone/>
-            </a:pPr>
-            <a:r>
-              <a:rPr lang="en-US" sz="1600" i="1" dirty="0">
-                <a:solidFill>
-                  <a:srgbClr val="9B9690"/>
+            <a:pPr marL="342900" indent="-342900">
+              <a:spcAft>
+                <a:spcPts val="800"/>
+              </a:spcAft>
+              <a:buSzPct val="100000"/>
+              <a:buChar char="•"/>
+            </a:pPr>
+            <a:r>
+              <a:rPr lang="en-US" sz="1600" dirty="0">
+                <a:solidFill>
+                  <a:srgbClr val="3D3A36"/>
                 </a:solidFill>
                 <a:latin typeface="Calibri" pitchFamily="34" charset="0"/>
                 <a:ea typeface="Calibri" pitchFamily="34" charset="-122"/>
                 <a:cs typeface="Calibri" pitchFamily="34" charset="-120"/>
               </a:rPr>
-              <a:t>方程</a:t>
+              <a:t>Step 1: Make a table of values (pick 3–5 x values).</a:t>
             </a:r>
             <a:endParaRPr lang="en-US" sz="1600" dirty="0"/>
           </a:p>
-        </p:txBody>
-      </p:sp>
-      <p:sp>
-        <p:nvSpPr>
-          <p:cNvPr id="7" name="Text 5"/>
-          <p:cNvSpPr/>
-          <p:nvPr/>
-        </p:nvSpPr>
-        <p:spPr>
-          <a:xfrm>
-            <a:off x="457200" y="2194560"/>
-            <a:ext cx="8229600" cy="1828800"/>
-          </a:xfrm>
-          <a:prstGeom prst="rect">
-            <a:avLst/>
-          </a:prstGeom>
-          <a:noFill/>
-          <a:ln/>
-        </p:spPr>
-        <p:txBody>
-          <a:bodyPr wrap="square" rtlCol="0" anchor="ctr"/>
-          <a:lstStyle/>
-          <a:p>
-            <a:pPr indent="0" marL="0">
-              <a:lnSpc>
-                <a:spcPct val="150000"/>
-              </a:lnSpc>
-              <a:buNone/>
-            </a:pPr>
-            <a:r>
-              <a:rPr lang="en-US" sz="1800" dirty="0">
-                <a:solidFill>
-                  <a:srgbClr val="6B6660"/>
+          <a:p>
+            <a:pPr marL="342900" indent="-342900">
+              <a:spcAft>
+                <a:spcPts val="800"/>
+              </a:spcAft>
+              <a:buSzPct val="100000"/>
+              <a:buChar char="•"/>
+            </a:pPr>
+            <a:r>
+              <a:rPr lang="en-US" sz="1600" dirty="0">
+                <a:solidFill>
+                  <a:srgbClr val="3D3A36"/>
                 </a:solidFill>
                 <a:latin typeface="Calibri" pitchFamily="34" charset="0"/>
                 <a:ea typeface="Calibri" pitchFamily="34" charset="-122"/>
                 <a:cs typeface="Calibri" pitchFamily="34" charset="-120"/>
               </a:rPr>
-              <a:t>A mathematical statement with an equals sign. e.g. 3x + 5 = 20.</a:t>
-            </a:r>
-            <a:endParaRPr lang="en-US" sz="1800" dirty="0"/>
-          </a:p>
-        </p:txBody>
-      </p:sp>
-      <p:sp>
-        <p:nvSpPr>
-          <p:cNvPr id="8" name="Text 6"/>
-          <p:cNvSpPr/>
-          <p:nvPr/>
-        </p:nvSpPr>
-        <p:spPr>
-          <a:xfrm>
-            <a:off x="7315200" y="4754880"/>
-            <a:ext cx="1828800" cy="274320"/>
-          </a:xfrm>
-          <a:prstGeom prst="rect">
-            <a:avLst/>
-          </a:prstGeom>
-          <a:noFill/>
-          <a:ln/>
-        </p:spPr>
-        <p:txBody>
-          <a:bodyPr wrap="square" rtlCol="0" anchor="ctr"/>
-          <a:lstStyle/>
-          <a:p>
-            <a:pPr algn="r" indent="0" marL="0">
-              <a:buNone/>
-            </a:pPr>
-            <a:r>
-              <a:rPr lang="en-US" sz="900" dirty="0">
-                <a:solidFill>
-                  <a:srgbClr val="9B9690"/>
+              <a:t>Step 2: Substitute each x into the equation to find y.</a:t>
+            </a:r>
+            <a:endParaRPr lang="en-US" sz="1600" dirty="0"/>
+          </a:p>
+          <a:p>
+            <a:pPr marL="342900" indent="-342900">
+              <a:spcAft>
+                <a:spcPts val="800"/>
+              </a:spcAft>
+              <a:buSzPct val="100000"/>
+              <a:buChar char="•"/>
+            </a:pPr>
+            <a:r>
+              <a:rPr lang="en-US" sz="1600" dirty="0">
+                <a:solidFill>
+                  <a:srgbClr val="3D3A36"/>
                 </a:solidFill>
                 <a:latin typeface="Calibri" pitchFamily="34" charset="0"/>
                 <a:ea typeface="Calibri" pitchFamily="34" charset="-122"/>
                 <a:cs typeface="Calibri" pitchFamily="34" charset="-120"/>
               </a:rPr>
-              <a:t>mrzocchi.com</a:t>
-            </a:r>
-            <a:endParaRPr lang="en-US" sz="900" dirty="0"/>
+              <a:t>Step 3: Plot the coordinate pairs (x, y) on a grid.</a:t>
+            </a:r>
+            <a:endParaRPr lang="en-US" sz="1600" dirty="0"/>
+          </a:p>
+          <a:p>
+            <a:pPr marL="342900" indent="-342900">
+              <a:spcAft>
+                <a:spcPts val="800"/>
+              </a:spcAft>
+              <a:buSzPct val="100000"/>
+              <a:buChar char="•"/>
+            </a:pPr>
+            <a:r>
+              <a:rPr lang="en-US" sz="1600" dirty="0">
+                <a:solidFill>
+                  <a:srgbClr val="3D3A36"/>
+                </a:solidFill>
+                <a:latin typeface="Calibri" pitchFamily="34" charset="0"/>
+                <a:ea typeface="Calibri" pitchFamily="34" charset="-122"/>
+                <a:cs typeface="Calibri" pitchFamily="34" charset="-120"/>
+              </a:rPr>
+              <a:t>Step 4: Join with a straight line using a ruler.</a:t>
+            </a:r>
+            <a:endParaRPr lang="en-US" sz="1600" dirty="0"/>
+          </a:p>
+          <a:p>
+            <a:pPr marL="342900" indent="-342900">
+              <a:spcAft>
+                <a:spcPts val="800"/>
+              </a:spcAft>
+              <a:buSzPct val="100000"/>
+              <a:buChar char="•"/>
+            </a:pPr>
+            <a:r>
+              <a:rPr lang="en-US" sz="1600" dirty="0">
+                <a:solidFill>
+                  <a:srgbClr val="3D3A36"/>
+                </a:solidFill>
+                <a:latin typeface="Calibri" pitchFamily="34" charset="0"/>
+                <a:ea typeface="Calibri" pitchFamily="34" charset="-122"/>
+                <a:cs typeface="Calibri" pitchFamily="34" charset="-120"/>
+              </a:rPr>
+              <a:t>Step 5: Label your line with its equation.</a:t>
+            </a:r>
+            <a:endParaRPr lang="en-US" sz="1600" dirty="0"/>
           </a:p>
         </p:txBody>
       </p:sp>
@@ -4222,6 +2945,13 @@
 <file path=ppt/slides/slide5.xml><?xml version="1.0" encoding="utf-8"?>
 <p:sld xmlns:a="http://schemas.openxmlformats.org/drawingml/2006/main" xmlns:r="http://schemas.openxmlformats.org/officeDocument/2006/relationships" xmlns:p="http://schemas.openxmlformats.org/presentationml/2006/main">
   <p:cSld name="Slide 5">
+    <p:bg>
+      <p:bgPr>
+        <a:solidFill>
+          <a:srgbClr val="FAF8F5"/>
+        </a:solidFill>
+      </p:bgPr>
+    </p:bg>
     <p:spTree>
       <p:nvGrpSpPr>
         <p:cNvPr id="1" name=""/>
@@ -4245,7 +2975,27 @@
         <p:spPr>
           <a:xfrm>
             <a:off x="0" y="0"/>
-            <a:ext cx="9144000" cy="54864"/>
+            <a:ext cx="9144000" cy="822960"/>
+          </a:xfrm>
+          <a:prstGeom prst="rect">
+            <a:avLst/>
+          </a:prstGeom>
+          <a:solidFill>
+            <a:srgbClr val="FFFFFF"/>
+          </a:solidFill>
+          <a:ln/>
+        </p:spPr>
+      </p:sp>
+      <p:sp>
+        <p:nvSpPr>
+          <p:cNvPr id="3" name="Shape 1"/>
+          <p:cNvSpPr/>
+          <p:nvPr/>
+        </p:nvSpPr>
+        <p:spPr>
+          <a:xfrm>
+            <a:off x="0" y="795528"/>
+            <a:ext cx="9144000" cy="27432"/>
           </a:xfrm>
           <a:prstGeom prst="rect">
             <a:avLst/>
@@ -4258,14 +3008,14 @@
       </p:sp>
       <p:sp>
         <p:nvSpPr>
-          <p:cNvPr id="3" name="Text 1"/>
-          <p:cNvSpPr/>
-          <p:nvPr/>
-        </p:nvSpPr>
-        <p:spPr>
-          <a:xfrm>
-            <a:off x="457200" y="228600"/>
-            <a:ext cx="8229600" cy="548640"/>
+          <p:cNvPr id="4" name="Text 2"/>
+          <p:cNvSpPr/>
+          <p:nvPr/>
+        </p:nvSpPr>
+        <p:spPr>
+          <a:xfrm>
+            <a:off x="640080" y="91440"/>
+            <a:ext cx="7863840" cy="640080"/>
           </a:xfrm>
           <a:prstGeom prst="rect">
             <a:avLst/>
@@ -4281,7 +3031,7 @@
               <a:buNone/>
             </a:pPr>
             <a:r>
-              <a:rPr lang="en-US" sz="2400" b="1" dirty="0">
+              <a:rPr lang="en-US" sz="2200" b="1" dirty="0">
                 <a:solidFill>
                   <a:srgbClr val="1B2A4A"/>
                 </a:solidFill>
@@ -4289,191 +3039,1366 @@
                 <a:ea typeface="Georgia" pitchFamily="34" charset="-122"/>
                 <a:cs typeface="Georgia" pitchFamily="34" charset="-120"/>
               </a:rPr>
-              <a:t>Key Vocabulary</a:t>
-            </a:r>
-            <a:endParaRPr lang="en-US" sz="2400" dirty="0"/>
-          </a:p>
-        </p:txBody>
-      </p:sp>
-      <p:sp>
-        <p:nvSpPr>
-          <p:cNvPr id="4" name="Shape 2"/>
-          <p:cNvSpPr/>
-          <p:nvPr/>
-        </p:nvSpPr>
-        <p:spPr>
-          <a:xfrm>
-            <a:off x="457200" y="868680"/>
-            <a:ext cx="1828800" cy="27432"/>
-          </a:xfrm>
-          <a:prstGeom prst="rect">
-            <a:avLst/>
-          </a:prstGeom>
-          <a:solidFill>
-            <a:srgbClr val="C8372D"/>
-          </a:solidFill>
-          <a:ln/>
-        </p:spPr>
-      </p:sp>
-      <p:sp>
-        <p:nvSpPr>
-          <p:cNvPr id="5" name="Text 3"/>
-          <p:cNvSpPr/>
-          <p:nvPr/>
-        </p:nvSpPr>
-        <p:spPr>
-          <a:xfrm>
-            <a:off x="457200" y="1188720"/>
-            <a:ext cx="8229600" cy="548640"/>
-          </a:xfrm>
-          <a:prstGeom prst="rect">
-            <a:avLst/>
-          </a:prstGeom>
-          <a:noFill/>
-          <a:ln/>
-        </p:spPr>
-        <p:txBody>
-          <a:bodyPr wrap="square" rtlCol="0" anchor="ctr"/>
-          <a:lstStyle/>
-          <a:p>
-            <a:pPr indent="0" marL="0">
-              <a:buNone/>
-            </a:pPr>
-            <a:r>
-              <a:rPr lang="en-US" sz="2800" b="1" dirty="0">
-                <a:solidFill>
-                  <a:srgbClr val="C8372D"/>
-                </a:solidFill>
-                <a:latin typeface="Georgia" pitchFamily="34" charset="0"/>
-                <a:ea typeface="Georgia" pitchFamily="34" charset="-122"/>
-                <a:cs typeface="Georgia" pitchFamily="34" charset="-120"/>
-              </a:rPr>
-              <a:t>Expand</a:t>
-            </a:r>
-            <a:endParaRPr lang="en-US" sz="2800" dirty="0"/>
-          </a:p>
-        </p:txBody>
-      </p:sp>
-      <p:sp>
-        <p:nvSpPr>
-          <p:cNvPr id="6" name="Text 4"/>
-          <p:cNvSpPr/>
-          <p:nvPr/>
-        </p:nvSpPr>
-        <p:spPr>
-          <a:xfrm>
-            <a:off x="457200" y="1691640"/>
-            <a:ext cx="8229600" cy="365760"/>
-          </a:xfrm>
-          <a:prstGeom prst="rect">
-            <a:avLst/>
-          </a:prstGeom>
-          <a:noFill/>
-          <a:ln/>
-        </p:spPr>
-        <p:txBody>
-          <a:bodyPr wrap="square" rtlCol="0" anchor="ctr"/>
-          <a:lstStyle/>
-          <a:p>
-            <a:pPr indent="0" marL="0">
-              <a:buNone/>
-            </a:pPr>
-            <a:r>
-              <a:rPr lang="en-US" sz="1600" i="1" dirty="0">
-                <a:solidFill>
-                  <a:srgbClr val="9B9690"/>
-                </a:solidFill>
-                <a:latin typeface="Calibri" pitchFamily="34" charset="0"/>
-                <a:ea typeface="Calibri" pitchFamily="34" charset="-122"/>
-                <a:cs typeface="Calibri" pitchFamily="34" charset="-120"/>
-              </a:rPr>
-              <a:t>展开</a:t>
-            </a:r>
-            <a:endParaRPr lang="en-US" sz="1600" dirty="0"/>
-          </a:p>
-        </p:txBody>
-      </p:sp>
-      <p:sp>
-        <p:nvSpPr>
-          <p:cNvPr id="7" name="Text 5"/>
-          <p:cNvSpPr/>
-          <p:nvPr/>
-        </p:nvSpPr>
-        <p:spPr>
-          <a:xfrm>
-            <a:off x="457200" y="2194560"/>
-            <a:ext cx="8229600" cy="1828800"/>
-          </a:xfrm>
-          <a:prstGeom prst="rect">
-            <a:avLst/>
-          </a:prstGeom>
-          <a:noFill/>
-          <a:ln/>
-        </p:spPr>
-        <p:txBody>
-          <a:bodyPr wrap="square" rtlCol="0" anchor="ctr"/>
-          <a:lstStyle/>
-          <a:p>
-            <a:pPr indent="0" marL="0">
-              <a:lnSpc>
-                <a:spcPct val="150000"/>
-              </a:lnSpc>
-              <a:buNone/>
-            </a:pPr>
-            <a:r>
-              <a:rPr lang="en-US" sz="1800" dirty="0">
-                <a:solidFill>
-                  <a:srgbClr val="6B6660"/>
-                </a:solidFill>
-                <a:latin typeface="Calibri" pitchFamily="34" charset="0"/>
-                <a:ea typeface="Calibri" pitchFamily="34" charset="-122"/>
-                <a:cs typeface="Calibri" pitchFamily="34" charset="-120"/>
-              </a:rPr>
-              <a:t>Multiply out brackets. e.g. 3(x + 4) = 3x + 12.</a:t>
-            </a:r>
-            <a:endParaRPr lang="en-US" sz="1800" dirty="0"/>
-          </a:p>
-        </p:txBody>
-      </p:sp>
-      <p:sp>
-        <p:nvSpPr>
-          <p:cNvPr id="8" name="Text 6"/>
-          <p:cNvSpPr/>
-          <p:nvPr/>
-        </p:nvSpPr>
-        <p:spPr>
-          <a:xfrm>
-            <a:off x="7315200" y="4754880"/>
-            <a:ext cx="1828800" cy="274320"/>
-          </a:xfrm>
-          <a:prstGeom prst="rect">
-            <a:avLst/>
-          </a:prstGeom>
-          <a:noFill/>
-          <a:ln/>
-        </p:spPr>
-        <p:txBody>
-          <a:bodyPr wrap="square" rtlCol="0" anchor="ctr"/>
-          <a:lstStyle/>
-          <a:p>
-            <a:pPr algn="r" indent="0" marL="0">
-              <a:buNone/>
-            </a:pPr>
-            <a:r>
-              <a:rPr lang="en-US" sz="900" dirty="0">
-                <a:solidFill>
-                  <a:srgbClr val="9B9690"/>
-                </a:solidFill>
-                <a:latin typeface="Calibri" pitchFamily="34" charset="0"/>
-                <a:ea typeface="Calibri" pitchFamily="34" charset="-122"/>
-                <a:cs typeface="Calibri" pitchFamily="34" charset="-120"/>
-              </a:rPr>
-              <a:t>mrzocchi.com</a:t>
-            </a:r>
-            <a:endParaRPr lang="en-US" sz="900" dirty="0"/>
-          </a:p>
-        </p:txBody>
-      </p:sp>
+              <a:t>Example: y = 2x + 1</a:t>
+            </a:r>
+            <a:endParaRPr lang="en-US" sz="2200" dirty="0"/>
+          </a:p>
+        </p:txBody>
+      </p:sp>
+      <p:graphicFrame>
+        <p:nvGraphicFramePr>
+          <p:cNvPr id="6" name="Table 0"/>
+          <p:cNvGraphicFramePr>
+            <a:graphicFrameLocks noGrp="1"/>
+          </p:cNvGraphicFramePr>
+          <p:nvPr>
+            <p:extLst>
+              <p:ext uri="{D42A27DB-BD31-4B8C-83A1-F6EECF244321}">
+                <p14:modId xmlns:p14="http://schemas.microsoft.com/office/powerpoint/2010/main" val="1579011935"/>
+              </p:ext>
+            </p:extLst>
+          </p:nvPr>
+        </p:nvGraphicFramePr>
+        <p:xfrm>
+          <a:off x="640080" y="1051560"/>
+          <a:ext cx="7863840" cy="914400"/>
+        </p:xfrm>
+        <a:graphic>
+          <a:graphicData uri="http://schemas.openxmlformats.org/drawingml/2006/table">
+            <a:tbl>
+              <a:tblPr/>
+              <a:tblGrid>
+                <a:gridCol w="1965960"/>
+                <a:gridCol w="1965960"/>
+                <a:gridCol w="1965960"/>
+                <a:gridCol w="1965960"/>
+              </a:tblGrid>
+              <a:tr h="502920">
+                <a:tc>
+                  <a:txBody>
+                    <a:bodyPr/>
+                    <a:lstStyle/>
+                    <a:p>
+                      <a:pPr indent="0" marL="0">
+                        <a:buNone/>
+                      </a:pPr>
+                      <a:r>
+                        <a:rPr lang="en-US" sz="1300" b="1" dirty="0">
+                          <a:solidFill>
+                            <a:srgbClr val="FFFFFF"/>
+                          </a:solidFill>
+                          <a:latin typeface="Calibri" pitchFamily="34" charset="0"/>
+                          <a:ea typeface="Calibri" pitchFamily="34" charset="-122"/>
+                          <a:cs typeface="Calibri" pitchFamily="34" charset="-120"/>
+                        </a:rPr>
+                        <a:t>x</a:t>
+                      </a:r>
+                      <a:endParaRPr lang="en-US" sz="1300" dirty="0">
+                        <a:latin typeface="Calibri" charset="0"/>
+                        <a:ea typeface="Calibri" charset="0"/>
+                        <a:cs typeface="Calibri" charset="0"/>
+                      </a:endParaRPr>
+                    </a:p>
+                  </a:txBody>
+                  <a:tcPr marL="91440" marR="91440" marT="45720" marB="45720">
+                    <a:lnL w="6350" cap="flat" cmpd="sng" algn="ctr">
+                      <a:solidFill>
+                        <a:srgbClr val="E5E2DC"/>
+                      </a:solidFill>
+                      <a:prstDash val="solid"/>
+                      <a:round/>
+                      <a:headEnd type="none" w="med" len="med"/>
+                      <a:tailEnd type="none" w="med" len="med"/>
+                    </a:lnL>
+                    <a:lnR w="6350" cap="flat" cmpd="sng" algn="ctr">
+                      <a:solidFill>
+                        <a:srgbClr val="E5E2DC"/>
+                      </a:solidFill>
+                      <a:prstDash val="solid"/>
+                      <a:round/>
+                      <a:headEnd type="none" w="med" len="med"/>
+                      <a:tailEnd type="none" w="med" len="med"/>
+                    </a:lnR>
+                    <a:lnT w="6350" cap="flat" cmpd="sng" algn="ctr">
+                      <a:solidFill>
+                        <a:srgbClr val="E5E2DC"/>
+                      </a:solidFill>
+                      <a:prstDash val="solid"/>
+                      <a:round/>
+                      <a:headEnd type="none" w="med" len="med"/>
+                      <a:tailEnd type="none" w="med" len="med"/>
+                    </a:lnT>
+                    <a:lnB w="6350" cap="flat" cmpd="sng" algn="ctr">
+                      <a:solidFill>
+                        <a:srgbClr val="E5E2DC"/>
+                      </a:solidFill>
+                      <a:prstDash val="solid"/>
+                      <a:round/>
+                      <a:headEnd type="none" w="med" len="med"/>
+                      <a:tailEnd type="none" w="med" len="med"/>
+                    </a:lnB>
+                    <a:solidFill>
+                      <a:srgbClr val="C8372D"/>
+                    </a:solidFill>
+                  </a:tcPr>
+                </a:tc>
+                <a:tc>
+                  <a:txBody>
+                    <a:bodyPr/>
+                    <a:lstStyle/>
+                    <a:p>
+                      <a:pPr indent="0" marL="0">
+                        <a:buNone/>
+                      </a:pPr>
+                      <a:r>
+                        <a:rPr lang="en-US" sz="1300" b="1" dirty="0">
+                          <a:solidFill>
+                            <a:srgbClr val="FFFFFF"/>
+                          </a:solidFill>
+                          <a:latin typeface="Calibri" pitchFamily="34" charset="0"/>
+                          <a:ea typeface="Calibri" pitchFamily="34" charset="-122"/>
+                          <a:cs typeface="Calibri" pitchFamily="34" charset="-120"/>
+                        </a:rPr>
+                        <a:t>Calculation</a:t>
+                      </a:r>
+                      <a:endParaRPr lang="en-US" sz="1300" dirty="0">
+                        <a:latin typeface="Calibri" charset="0"/>
+                        <a:ea typeface="Calibri" charset="0"/>
+                        <a:cs typeface="Calibri" charset="0"/>
+                      </a:endParaRPr>
+                    </a:p>
+                  </a:txBody>
+                  <a:tcPr marL="91440" marR="91440" marT="45720" marB="45720">
+                    <a:lnL w="6350" cap="flat" cmpd="sng" algn="ctr">
+                      <a:solidFill>
+                        <a:srgbClr val="E5E2DC"/>
+                      </a:solidFill>
+                      <a:prstDash val="solid"/>
+                      <a:round/>
+                      <a:headEnd type="none" w="med" len="med"/>
+                      <a:tailEnd type="none" w="med" len="med"/>
+                    </a:lnL>
+                    <a:lnR w="6350" cap="flat" cmpd="sng" algn="ctr">
+                      <a:solidFill>
+                        <a:srgbClr val="E5E2DC"/>
+                      </a:solidFill>
+                      <a:prstDash val="solid"/>
+                      <a:round/>
+                      <a:headEnd type="none" w="med" len="med"/>
+                      <a:tailEnd type="none" w="med" len="med"/>
+                    </a:lnR>
+                    <a:lnT w="6350" cap="flat" cmpd="sng" algn="ctr">
+                      <a:solidFill>
+                        <a:srgbClr val="E5E2DC"/>
+                      </a:solidFill>
+                      <a:prstDash val="solid"/>
+                      <a:round/>
+                      <a:headEnd type="none" w="med" len="med"/>
+                      <a:tailEnd type="none" w="med" len="med"/>
+                    </a:lnT>
+                    <a:lnB w="6350" cap="flat" cmpd="sng" algn="ctr">
+                      <a:solidFill>
+                        <a:srgbClr val="E5E2DC"/>
+                      </a:solidFill>
+                      <a:prstDash val="solid"/>
+                      <a:round/>
+                      <a:headEnd type="none" w="med" len="med"/>
+                      <a:tailEnd type="none" w="med" len="med"/>
+                    </a:lnB>
+                    <a:solidFill>
+                      <a:srgbClr val="C8372D"/>
+                    </a:solidFill>
+                  </a:tcPr>
+                </a:tc>
+                <a:tc>
+                  <a:txBody>
+                    <a:bodyPr/>
+                    <a:lstStyle/>
+                    <a:p>
+                      <a:pPr indent="0" marL="0">
+                        <a:buNone/>
+                      </a:pPr>
+                      <a:r>
+                        <a:rPr lang="en-US" sz="1300" b="1" dirty="0">
+                          <a:solidFill>
+                            <a:srgbClr val="FFFFFF"/>
+                          </a:solidFill>
+                          <a:latin typeface="Calibri" pitchFamily="34" charset="0"/>
+                          <a:ea typeface="Calibri" pitchFamily="34" charset="-122"/>
+                          <a:cs typeface="Calibri" pitchFamily="34" charset="-120"/>
+                        </a:rPr>
+                        <a:t>y</a:t>
+                      </a:r>
+                      <a:endParaRPr lang="en-US" sz="1300" dirty="0">
+                        <a:latin typeface="Calibri" charset="0"/>
+                        <a:ea typeface="Calibri" charset="0"/>
+                        <a:cs typeface="Calibri" charset="0"/>
+                      </a:endParaRPr>
+                    </a:p>
+                  </a:txBody>
+                  <a:tcPr marL="91440" marR="91440" marT="45720" marB="45720">
+                    <a:lnL w="6350" cap="flat" cmpd="sng" algn="ctr">
+                      <a:solidFill>
+                        <a:srgbClr val="E5E2DC"/>
+                      </a:solidFill>
+                      <a:prstDash val="solid"/>
+                      <a:round/>
+                      <a:headEnd type="none" w="med" len="med"/>
+                      <a:tailEnd type="none" w="med" len="med"/>
+                    </a:lnL>
+                    <a:lnR w="6350" cap="flat" cmpd="sng" algn="ctr">
+                      <a:solidFill>
+                        <a:srgbClr val="E5E2DC"/>
+                      </a:solidFill>
+                      <a:prstDash val="solid"/>
+                      <a:round/>
+                      <a:headEnd type="none" w="med" len="med"/>
+                      <a:tailEnd type="none" w="med" len="med"/>
+                    </a:lnR>
+                    <a:lnT w="6350" cap="flat" cmpd="sng" algn="ctr">
+                      <a:solidFill>
+                        <a:srgbClr val="E5E2DC"/>
+                      </a:solidFill>
+                      <a:prstDash val="solid"/>
+                      <a:round/>
+                      <a:headEnd type="none" w="med" len="med"/>
+                      <a:tailEnd type="none" w="med" len="med"/>
+                    </a:lnT>
+                    <a:lnB w="6350" cap="flat" cmpd="sng" algn="ctr">
+                      <a:solidFill>
+                        <a:srgbClr val="E5E2DC"/>
+                      </a:solidFill>
+                      <a:prstDash val="solid"/>
+                      <a:round/>
+                      <a:headEnd type="none" w="med" len="med"/>
+                      <a:tailEnd type="none" w="med" len="med"/>
+                    </a:lnB>
+                    <a:solidFill>
+                      <a:srgbClr val="C8372D"/>
+                    </a:solidFill>
+                  </a:tcPr>
+                </a:tc>
+                <a:tc>
+                  <a:txBody>
+                    <a:bodyPr/>
+                    <a:lstStyle/>
+                    <a:p>
+                      <a:pPr indent="0" marL="0">
+                        <a:buNone/>
+                      </a:pPr>
+                      <a:r>
+                        <a:rPr lang="en-US" sz="1300" b="1" dirty="0">
+                          <a:solidFill>
+                            <a:srgbClr val="FFFFFF"/>
+                          </a:solidFill>
+                          <a:latin typeface="Calibri" pitchFamily="34" charset="0"/>
+                          <a:ea typeface="Calibri" pitchFamily="34" charset="-122"/>
+                          <a:cs typeface="Calibri" pitchFamily="34" charset="-120"/>
+                        </a:rPr>
+                        <a:t>Coordinate</a:t>
+                      </a:r>
+                      <a:endParaRPr lang="en-US" sz="1300" dirty="0">
+                        <a:latin typeface="Calibri" charset="0"/>
+                        <a:ea typeface="Calibri" charset="0"/>
+                        <a:cs typeface="Calibri" charset="0"/>
+                      </a:endParaRPr>
+                    </a:p>
+                  </a:txBody>
+                  <a:tcPr marL="91440" marR="91440" marT="45720" marB="45720">
+                    <a:lnL w="6350" cap="flat" cmpd="sng" algn="ctr">
+                      <a:solidFill>
+                        <a:srgbClr val="E5E2DC"/>
+                      </a:solidFill>
+                      <a:prstDash val="solid"/>
+                      <a:round/>
+                      <a:headEnd type="none" w="med" len="med"/>
+                      <a:tailEnd type="none" w="med" len="med"/>
+                    </a:lnL>
+                    <a:lnR w="6350" cap="flat" cmpd="sng" algn="ctr">
+                      <a:solidFill>
+                        <a:srgbClr val="E5E2DC"/>
+                      </a:solidFill>
+                      <a:prstDash val="solid"/>
+                      <a:round/>
+                      <a:headEnd type="none" w="med" len="med"/>
+                      <a:tailEnd type="none" w="med" len="med"/>
+                    </a:lnR>
+                    <a:lnT w="6350" cap="flat" cmpd="sng" algn="ctr">
+                      <a:solidFill>
+                        <a:srgbClr val="E5E2DC"/>
+                      </a:solidFill>
+                      <a:prstDash val="solid"/>
+                      <a:round/>
+                      <a:headEnd type="none" w="med" len="med"/>
+                      <a:tailEnd type="none" w="med" len="med"/>
+                    </a:lnT>
+                    <a:lnB w="6350" cap="flat" cmpd="sng" algn="ctr">
+                      <a:solidFill>
+                        <a:srgbClr val="E5E2DC"/>
+                      </a:solidFill>
+                      <a:prstDash val="solid"/>
+                      <a:round/>
+                      <a:headEnd type="none" w="med" len="med"/>
+                      <a:tailEnd type="none" w="med" len="med"/>
+                    </a:lnB>
+                    <a:solidFill>
+                      <a:srgbClr val="C8372D"/>
+                    </a:solidFill>
+                  </a:tcPr>
+                </a:tc>
+              </a:tr>
+              <a:tr h="502920">
+                <a:tc>
+                  <a:txBody>
+                    <a:bodyPr/>
+                    <a:lstStyle/>
+                    <a:p>
+                      <a:pPr indent="0" marL="0">
+                        <a:buNone/>
+                      </a:pPr>
+                      <a:r>
+                        <a:rPr lang="en-US" sz="1300" dirty="0">
+                          <a:solidFill>
+                            <a:srgbClr val="3D3A36"/>
+                          </a:solidFill>
+                          <a:latin typeface="Calibri" pitchFamily="34" charset="0"/>
+                          <a:ea typeface="Calibri" pitchFamily="34" charset="-122"/>
+                          <a:cs typeface="Calibri" pitchFamily="34" charset="-120"/>
+                        </a:rPr>
+                        <a:t>-2</a:t>
+                      </a:r>
+                      <a:endParaRPr lang="en-US" sz="1300" dirty="0">
+                        <a:latin typeface="Calibri" charset="0"/>
+                        <a:ea typeface="Calibri" charset="0"/>
+                        <a:cs typeface="Calibri" charset="0"/>
+                      </a:endParaRPr>
+                    </a:p>
+                  </a:txBody>
+                  <a:tcPr marL="91440" marR="91440" marT="45720" marB="45720">
+                    <a:lnL w="6350" cap="flat" cmpd="sng" algn="ctr">
+                      <a:solidFill>
+                        <a:srgbClr val="E5E2DC"/>
+                      </a:solidFill>
+                      <a:prstDash val="solid"/>
+                      <a:round/>
+                      <a:headEnd type="none" w="med" len="med"/>
+                      <a:tailEnd type="none" w="med" len="med"/>
+                    </a:lnL>
+                    <a:lnR w="6350" cap="flat" cmpd="sng" algn="ctr">
+                      <a:solidFill>
+                        <a:srgbClr val="E5E2DC"/>
+                      </a:solidFill>
+                      <a:prstDash val="solid"/>
+                      <a:round/>
+                      <a:headEnd type="none" w="med" len="med"/>
+                      <a:tailEnd type="none" w="med" len="med"/>
+                    </a:lnR>
+                    <a:lnT w="6350" cap="flat" cmpd="sng" algn="ctr">
+                      <a:solidFill>
+                        <a:srgbClr val="E5E2DC"/>
+                      </a:solidFill>
+                      <a:prstDash val="solid"/>
+                      <a:round/>
+                      <a:headEnd type="none" w="med" len="med"/>
+                      <a:tailEnd type="none" w="med" len="med"/>
+                    </a:lnT>
+                    <a:lnB w="6350" cap="flat" cmpd="sng" algn="ctr">
+                      <a:solidFill>
+                        <a:srgbClr val="E5E2DC"/>
+                      </a:solidFill>
+                      <a:prstDash val="solid"/>
+                      <a:round/>
+                      <a:headEnd type="none" w="med" len="med"/>
+                      <a:tailEnd type="none" w="med" len="med"/>
+                    </a:lnB>
+                  </a:tcPr>
+                </a:tc>
+                <a:tc>
+                  <a:txBody>
+                    <a:bodyPr/>
+                    <a:lstStyle/>
+                    <a:p>
+                      <a:pPr indent="0" marL="0">
+                        <a:buNone/>
+                      </a:pPr>
+                      <a:r>
+                        <a:rPr lang="en-US" sz="1300" dirty="0">
+                          <a:solidFill>
+                            <a:srgbClr val="3D3A36"/>
+                          </a:solidFill>
+                          <a:latin typeface="Calibri" pitchFamily="34" charset="0"/>
+                          <a:ea typeface="Calibri" pitchFamily="34" charset="-122"/>
+                          <a:cs typeface="Calibri" pitchFamily="34" charset="-120"/>
+                        </a:rPr>
+                        <a:t>2(-2)+1</a:t>
+                      </a:r>
+                      <a:endParaRPr lang="en-US" sz="1300" dirty="0">
+                        <a:latin typeface="Calibri" charset="0"/>
+                        <a:ea typeface="Calibri" charset="0"/>
+                        <a:cs typeface="Calibri" charset="0"/>
+                      </a:endParaRPr>
+                    </a:p>
+                  </a:txBody>
+                  <a:tcPr marL="91440" marR="91440" marT="45720" marB="45720">
+                    <a:lnL w="6350" cap="flat" cmpd="sng" algn="ctr">
+                      <a:solidFill>
+                        <a:srgbClr val="E5E2DC"/>
+                      </a:solidFill>
+                      <a:prstDash val="solid"/>
+                      <a:round/>
+                      <a:headEnd type="none" w="med" len="med"/>
+                      <a:tailEnd type="none" w="med" len="med"/>
+                    </a:lnL>
+                    <a:lnR w="6350" cap="flat" cmpd="sng" algn="ctr">
+                      <a:solidFill>
+                        <a:srgbClr val="E5E2DC"/>
+                      </a:solidFill>
+                      <a:prstDash val="solid"/>
+                      <a:round/>
+                      <a:headEnd type="none" w="med" len="med"/>
+                      <a:tailEnd type="none" w="med" len="med"/>
+                    </a:lnR>
+                    <a:lnT w="6350" cap="flat" cmpd="sng" algn="ctr">
+                      <a:solidFill>
+                        <a:srgbClr val="E5E2DC"/>
+                      </a:solidFill>
+                      <a:prstDash val="solid"/>
+                      <a:round/>
+                      <a:headEnd type="none" w="med" len="med"/>
+                      <a:tailEnd type="none" w="med" len="med"/>
+                    </a:lnT>
+                    <a:lnB w="6350" cap="flat" cmpd="sng" algn="ctr">
+                      <a:solidFill>
+                        <a:srgbClr val="E5E2DC"/>
+                      </a:solidFill>
+                      <a:prstDash val="solid"/>
+                      <a:round/>
+                      <a:headEnd type="none" w="med" len="med"/>
+                      <a:tailEnd type="none" w="med" len="med"/>
+                    </a:lnB>
+                  </a:tcPr>
+                </a:tc>
+                <a:tc>
+                  <a:txBody>
+                    <a:bodyPr/>
+                    <a:lstStyle/>
+                    <a:p>
+                      <a:pPr indent="0" marL="0">
+                        <a:buNone/>
+                      </a:pPr>
+                      <a:r>
+                        <a:rPr lang="en-US" sz="1300" dirty="0">
+                          <a:solidFill>
+                            <a:srgbClr val="3D3A36"/>
+                          </a:solidFill>
+                          <a:latin typeface="Calibri" pitchFamily="34" charset="0"/>
+                          <a:ea typeface="Calibri" pitchFamily="34" charset="-122"/>
+                          <a:cs typeface="Calibri" pitchFamily="34" charset="-120"/>
+                        </a:rPr>
+                        <a:t>-3</a:t>
+                      </a:r>
+                      <a:endParaRPr lang="en-US" sz="1300" dirty="0">
+                        <a:latin typeface="Calibri" charset="0"/>
+                        <a:ea typeface="Calibri" charset="0"/>
+                        <a:cs typeface="Calibri" charset="0"/>
+                      </a:endParaRPr>
+                    </a:p>
+                  </a:txBody>
+                  <a:tcPr marL="91440" marR="91440" marT="45720" marB="45720">
+                    <a:lnL w="6350" cap="flat" cmpd="sng" algn="ctr">
+                      <a:solidFill>
+                        <a:srgbClr val="E5E2DC"/>
+                      </a:solidFill>
+                      <a:prstDash val="solid"/>
+                      <a:round/>
+                      <a:headEnd type="none" w="med" len="med"/>
+                      <a:tailEnd type="none" w="med" len="med"/>
+                    </a:lnL>
+                    <a:lnR w="6350" cap="flat" cmpd="sng" algn="ctr">
+                      <a:solidFill>
+                        <a:srgbClr val="E5E2DC"/>
+                      </a:solidFill>
+                      <a:prstDash val="solid"/>
+                      <a:round/>
+                      <a:headEnd type="none" w="med" len="med"/>
+                      <a:tailEnd type="none" w="med" len="med"/>
+                    </a:lnR>
+                    <a:lnT w="6350" cap="flat" cmpd="sng" algn="ctr">
+                      <a:solidFill>
+                        <a:srgbClr val="E5E2DC"/>
+                      </a:solidFill>
+                      <a:prstDash val="solid"/>
+                      <a:round/>
+                      <a:headEnd type="none" w="med" len="med"/>
+                      <a:tailEnd type="none" w="med" len="med"/>
+                    </a:lnT>
+                    <a:lnB w="6350" cap="flat" cmpd="sng" algn="ctr">
+                      <a:solidFill>
+                        <a:srgbClr val="E5E2DC"/>
+                      </a:solidFill>
+                      <a:prstDash val="solid"/>
+                      <a:round/>
+                      <a:headEnd type="none" w="med" len="med"/>
+                      <a:tailEnd type="none" w="med" len="med"/>
+                    </a:lnB>
+                  </a:tcPr>
+                </a:tc>
+                <a:tc>
+                  <a:txBody>
+                    <a:bodyPr/>
+                    <a:lstStyle/>
+                    <a:p>
+                      <a:pPr indent="0" marL="0">
+                        <a:buNone/>
+                      </a:pPr>
+                      <a:r>
+                        <a:rPr lang="en-US" sz="1300" dirty="0">
+                          <a:solidFill>
+                            <a:srgbClr val="3D3A36"/>
+                          </a:solidFill>
+                          <a:latin typeface="Calibri" pitchFamily="34" charset="0"/>
+                          <a:ea typeface="Calibri" pitchFamily="34" charset="-122"/>
+                          <a:cs typeface="Calibri" pitchFamily="34" charset="-120"/>
+                        </a:rPr>
+                        <a:t>(-2, -3)</a:t>
+                      </a:r>
+                      <a:endParaRPr lang="en-US" sz="1300" dirty="0">
+                        <a:latin typeface="Calibri" charset="0"/>
+                        <a:ea typeface="Calibri" charset="0"/>
+                        <a:cs typeface="Calibri" charset="0"/>
+                      </a:endParaRPr>
+                    </a:p>
+                  </a:txBody>
+                  <a:tcPr marL="91440" marR="91440" marT="45720" marB="45720">
+                    <a:lnL w="6350" cap="flat" cmpd="sng" algn="ctr">
+                      <a:solidFill>
+                        <a:srgbClr val="E5E2DC"/>
+                      </a:solidFill>
+                      <a:prstDash val="solid"/>
+                      <a:round/>
+                      <a:headEnd type="none" w="med" len="med"/>
+                      <a:tailEnd type="none" w="med" len="med"/>
+                    </a:lnL>
+                    <a:lnR w="6350" cap="flat" cmpd="sng" algn="ctr">
+                      <a:solidFill>
+                        <a:srgbClr val="E5E2DC"/>
+                      </a:solidFill>
+                      <a:prstDash val="solid"/>
+                      <a:round/>
+                      <a:headEnd type="none" w="med" len="med"/>
+                      <a:tailEnd type="none" w="med" len="med"/>
+                    </a:lnR>
+                    <a:lnT w="6350" cap="flat" cmpd="sng" algn="ctr">
+                      <a:solidFill>
+                        <a:srgbClr val="E5E2DC"/>
+                      </a:solidFill>
+                      <a:prstDash val="solid"/>
+                      <a:round/>
+                      <a:headEnd type="none" w="med" len="med"/>
+                      <a:tailEnd type="none" w="med" len="med"/>
+                    </a:lnT>
+                    <a:lnB w="6350" cap="flat" cmpd="sng" algn="ctr">
+                      <a:solidFill>
+                        <a:srgbClr val="E5E2DC"/>
+                      </a:solidFill>
+                      <a:prstDash val="solid"/>
+                      <a:round/>
+                      <a:headEnd type="none" w="med" len="med"/>
+                      <a:tailEnd type="none" w="med" len="med"/>
+                    </a:lnB>
+                  </a:tcPr>
+                </a:tc>
+              </a:tr>
+              <a:tr h="502920">
+                <a:tc>
+                  <a:txBody>
+                    <a:bodyPr/>
+                    <a:lstStyle/>
+                    <a:p>
+                      <a:pPr indent="0" marL="0">
+                        <a:buNone/>
+                      </a:pPr>
+                      <a:r>
+                        <a:rPr lang="en-US" sz="1300" dirty="0">
+                          <a:solidFill>
+                            <a:srgbClr val="3D3A36"/>
+                          </a:solidFill>
+                          <a:latin typeface="Calibri" pitchFamily="34" charset="0"/>
+                          <a:ea typeface="Calibri" pitchFamily="34" charset="-122"/>
+                          <a:cs typeface="Calibri" pitchFamily="34" charset="-120"/>
+                        </a:rPr>
+                        <a:t>0</a:t>
+                      </a:r>
+                      <a:endParaRPr lang="en-US" sz="1300" dirty="0">
+                        <a:latin typeface="Calibri" charset="0"/>
+                        <a:ea typeface="Calibri" charset="0"/>
+                        <a:cs typeface="Calibri" charset="0"/>
+                      </a:endParaRPr>
+                    </a:p>
+                  </a:txBody>
+                  <a:tcPr marL="91440" marR="91440" marT="45720" marB="45720">
+                    <a:lnL w="6350" cap="flat" cmpd="sng" algn="ctr">
+                      <a:solidFill>
+                        <a:srgbClr val="E5E2DC"/>
+                      </a:solidFill>
+                      <a:prstDash val="solid"/>
+                      <a:round/>
+                      <a:headEnd type="none" w="med" len="med"/>
+                      <a:tailEnd type="none" w="med" len="med"/>
+                    </a:lnL>
+                    <a:lnR w="6350" cap="flat" cmpd="sng" algn="ctr">
+                      <a:solidFill>
+                        <a:srgbClr val="E5E2DC"/>
+                      </a:solidFill>
+                      <a:prstDash val="solid"/>
+                      <a:round/>
+                      <a:headEnd type="none" w="med" len="med"/>
+                      <a:tailEnd type="none" w="med" len="med"/>
+                    </a:lnR>
+                    <a:lnT w="6350" cap="flat" cmpd="sng" algn="ctr">
+                      <a:solidFill>
+                        <a:srgbClr val="E5E2DC"/>
+                      </a:solidFill>
+                      <a:prstDash val="solid"/>
+                      <a:round/>
+                      <a:headEnd type="none" w="med" len="med"/>
+                      <a:tailEnd type="none" w="med" len="med"/>
+                    </a:lnT>
+                    <a:lnB w="6350" cap="flat" cmpd="sng" algn="ctr">
+                      <a:solidFill>
+                        <a:srgbClr val="E5E2DC"/>
+                      </a:solidFill>
+                      <a:prstDash val="solid"/>
+                      <a:round/>
+                      <a:headEnd type="none" w="med" len="med"/>
+                      <a:tailEnd type="none" w="med" len="med"/>
+                    </a:lnB>
+                  </a:tcPr>
+                </a:tc>
+                <a:tc>
+                  <a:txBody>
+                    <a:bodyPr/>
+                    <a:lstStyle/>
+                    <a:p>
+                      <a:pPr indent="0" marL="0">
+                        <a:buNone/>
+                      </a:pPr>
+                      <a:r>
+                        <a:rPr lang="en-US" sz="1300" dirty="0">
+                          <a:solidFill>
+                            <a:srgbClr val="3D3A36"/>
+                          </a:solidFill>
+                          <a:latin typeface="Calibri" pitchFamily="34" charset="0"/>
+                          <a:ea typeface="Calibri" pitchFamily="34" charset="-122"/>
+                          <a:cs typeface="Calibri" pitchFamily="34" charset="-120"/>
+                        </a:rPr>
+                        <a:t>2(0)+1</a:t>
+                      </a:r>
+                      <a:endParaRPr lang="en-US" sz="1300" dirty="0">
+                        <a:latin typeface="Calibri" charset="0"/>
+                        <a:ea typeface="Calibri" charset="0"/>
+                        <a:cs typeface="Calibri" charset="0"/>
+                      </a:endParaRPr>
+                    </a:p>
+                  </a:txBody>
+                  <a:tcPr marL="91440" marR="91440" marT="45720" marB="45720">
+                    <a:lnL w="6350" cap="flat" cmpd="sng" algn="ctr">
+                      <a:solidFill>
+                        <a:srgbClr val="E5E2DC"/>
+                      </a:solidFill>
+                      <a:prstDash val="solid"/>
+                      <a:round/>
+                      <a:headEnd type="none" w="med" len="med"/>
+                      <a:tailEnd type="none" w="med" len="med"/>
+                    </a:lnL>
+                    <a:lnR w="6350" cap="flat" cmpd="sng" algn="ctr">
+                      <a:solidFill>
+                        <a:srgbClr val="E5E2DC"/>
+                      </a:solidFill>
+                      <a:prstDash val="solid"/>
+                      <a:round/>
+                      <a:headEnd type="none" w="med" len="med"/>
+                      <a:tailEnd type="none" w="med" len="med"/>
+                    </a:lnR>
+                    <a:lnT w="6350" cap="flat" cmpd="sng" algn="ctr">
+                      <a:solidFill>
+                        <a:srgbClr val="E5E2DC"/>
+                      </a:solidFill>
+                      <a:prstDash val="solid"/>
+                      <a:round/>
+                      <a:headEnd type="none" w="med" len="med"/>
+                      <a:tailEnd type="none" w="med" len="med"/>
+                    </a:lnT>
+                    <a:lnB w="6350" cap="flat" cmpd="sng" algn="ctr">
+                      <a:solidFill>
+                        <a:srgbClr val="E5E2DC"/>
+                      </a:solidFill>
+                      <a:prstDash val="solid"/>
+                      <a:round/>
+                      <a:headEnd type="none" w="med" len="med"/>
+                      <a:tailEnd type="none" w="med" len="med"/>
+                    </a:lnB>
+                  </a:tcPr>
+                </a:tc>
+                <a:tc>
+                  <a:txBody>
+                    <a:bodyPr/>
+                    <a:lstStyle/>
+                    <a:p>
+                      <a:pPr indent="0" marL="0">
+                        <a:buNone/>
+                      </a:pPr>
+                      <a:r>
+                        <a:rPr lang="en-US" sz="1300" dirty="0">
+                          <a:solidFill>
+                            <a:srgbClr val="3D3A36"/>
+                          </a:solidFill>
+                          <a:latin typeface="Calibri" pitchFamily="34" charset="0"/>
+                          <a:ea typeface="Calibri" pitchFamily="34" charset="-122"/>
+                          <a:cs typeface="Calibri" pitchFamily="34" charset="-120"/>
+                        </a:rPr>
+                        <a:t>1</a:t>
+                      </a:r>
+                      <a:endParaRPr lang="en-US" sz="1300" dirty="0">
+                        <a:latin typeface="Calibri" charset="0"/>
+                        <a:ea typeface="Calibri" charset="0"/>
+                        <a:cs typeface="Calibri" charset="0"/>
+                      </a:endParaRPr>
+                    </a:p>
+                  </a:txBody>
+                  <a:tcPr marL="91440" marR="91440" marT="45720" marB="45720">
+                    <a:lnL w="6350" cap="flat" cmpd="sng" algn="ctr">
+                      <a:solidFill>
+                        <a:srgbClr val="E5E2DC"/>
+                      </a:solidFill>
+                      <a:prstDash val="solid"/>
+                      <a:round/>
+                      <a:headEnd type="none" w="med" len="med"/>
+                      <a:tailEnd type="none" w="med" len="med"/>
+                    </a:lnL>
+                    <a:lnR w="6350" cap="flat" cmpd="sng" algn="ctr">
+                      <a:solidFill>
+                        <a:srgbClr val="E5E2DC"/>
+                      </a:solidFill>
+                      <a:prstDash val="solid"/>
+                      <a:round/>
+                      <a:headEnd type="none" w="med" len="med"/>
+                      <a:tailEnd type="none" w="med" len="med"/>
+                    </a:lnR>
+                    <a:lnT w="6350" cap="flat" cmpd="sng" algn="ctr">
+                      <a:solidFill>
+                        <a:srgbClr val="E5E2DC"/>
+                      </a:solidFill>
+                      <a:prstDash val="solid"/>
+                      <a:round/>
+                      <a:headEnd type="none" w="med" len="med"/>
+                      <a:tailEnd type="none" w="med" len="med"/>
+                    </a:lnT>
+                    <a:lnB w="6350" cap="flat" cmpd="sng" algn="ctr">
+                      <a:solidFill>
+                        <a:srgbClr val="E5E2DC"/>
+                      </a:solidFill>
+                      <a:prstDash val="solid"/>
+                      <a:round/>
+                      <a:headEnd type="none" w="med" len="med"/>
+                      <a:tailEnd type="none" w="med" len="med"/>
+                    </a:lnB>
+                  </a:tcPr>
+                </a:tc>
+                <a:tc>
+                  <a:txBody>
+                    <a:bodyPr/>
+                    <a:lstStyle/>
+                    <a:p>
+                      <a:pPr indent="0" marL="0">
+                        <a:buNone/>
+                      </a:pPr>
+                      <a:r>
+                        <a:rPr lang="en-US" sz="1300" dirty="0">
+                          <a:solidFill>
+                            <a:srgbClr val="3D3A36"/>
+                          </a:solidFill>
+                          <a:latin typeface="Calibri" pitchFamily="34" charset="0"/>
+                          <a:ea typeface="Calibri" pitchFamily="34" charset="-122"/>
+                          <a:cs typeface="Calibri" pitchFamily="34" charset="-120"/>
+                        </a:rPr>
+                        <a:t>(0, 1)</a:t>
+                      </a:r>
+                      <a:endParaRPr lang="en-US" sz="1300" dirty="0">
+                        <a:latin typeface="Calibri" charset="0"/>
+                        <a:ea typeface="Calibri" charset="0"/>
+                        <a:cs typeface="Calibri" charset="0"/>
+                      </a:endParaRPr>
+                    </a:p>
+                  </a:txBody>
+                  <a:tcPr marL="91440" marR="91440" marT="45720" marB="45720">
+                    <a:lnL w="6350" cap="flat" cmpd="sng" algn="ctr">
+                      <a:solidFill>
+                        <a:srgbClr val="E5E2DC"/>
+                      </a:solidFill>
+                      <a:prstDash val="solid"/>
+                      <a:round/>
+                      <a:headEnd type="none" w="med" len="med"/>
+                      <a:tailEnd type="none" w="med" len="med"/>
+                    </a:lnL>
+                    <a:lnR w="6350" cap="flat" cmpd="sng" algn="ctr">
+                      <a:solidFill>
+                        <a:srgbClr val="E5E2DC"/>
+                      </a:solidFill>
+                      <a:prstDash val="solid"/>
+                      <a:round/>
+                      <a:headEnd type="none" w="med" len="med"/>
+                      <a:tailEnd type="none" w="med" len="med"/>
+                    </a:lnR>
+                    <a:lnT w="6350" cap="flat" cmpd="sng" algn="ctr">
+                      <a:solidFill>
+                        <a:srgbClr val="E5E2DC"/>
+                      </a:solidFill>
+                      <a:prstDash val="solid"/>
+                      <a:round/>
+                      <a:headEnd type="none" w="med" len="med"/>
+                      <a:tailEnd type="none" w="med" len="med"/>
+                    </a:lnT>
+                    <a:lnB w="6350" cap="flat" cmpd="sng" algn="ctr">
+                      <a:solidFill>
+                        <a:srgbClr val="E5E2DC"/>
+                      </a:solidFill>
+                      <a:prstDash val="solid"/>
+                      <a:round/>
+                      <a:headEnd type="none" w="med" len="med"/>
+                      <a:tailEnd type="none" w="med" len="med"/>
+                    </a:lnB>
+                  </a:tcPr>
+                </a:tc>
+              </a:tr>
+              <a:tr h="502920">
+                <a:tc>
+                  <a:txBody>
+                    <a:bodyPr/>
+                    <a:lstStyle/>
+                    <a:p>
+                      <a:pPr indent="0" marL="0">
+                        <a:buNone/>
+                      </a:pPr>
+                      <a:r>
+                        <a:rPr lang="en-US" sz="1300" dirty="0">
+                          <a:solidFill>
+                            <a:srgbClr val="3D3A36"/>
+                          </a:solidFill>
+                          <a:latin typeface="Calibri" pitchFamily="34" charset="0"/>
+                          <a:ea typeface="Calibri" pitchFamily="34" charset="-122"/>
+                          <a:cs typeface="Calibri" pitchFamily="34" charset="-120"/>
+                        </a:rPr>
+                        <a:t>1</a:t>
+                      </a:r>
+                      <a:endParaRPr lang="en-US" sz="1300" dirty="0">
+                        <a:latin typeface="Calibri" charset="0"/>
+                        <a:ea typeface="Calibri" charset="0"/>
+                        <a:cs typeface="Calibri" charset="0"/>
+                      </a:endParaRPr>
+                    </a:p>
+                  </a:txBody>
+                  <a:tcPr marL="91440" marR="91440" marT="45720" marB="45720">
+                    <a:lnL w="6350" cap="flat" cmpd="sng" algn="ctr">
+                      <a:solidFill>
+                        <a:srgbClr val="E5E2DC"/>
+                      </a:solidFill>
+                      <a:prstDash val="solid"/>
+                      <a:round/>
+                      <a:headEnd type="none" w="med" len="med"/>
+                      <a:tailEnd type="none" w="med" len="med"/>
+                    </a:lnL>
+                    <a:lnR w="6350" cap="flat" cmpd="sng" algn="ctr">
+                      <a:solidFill>
+                        <a:srgbClr val="E5E2DC"/>
+                      </a:solidFill>
+                      <a:prstDash val="solid"/>
+                      <a:round/>
+                      <a:headEnd type="none" w="med" len="med"/>
+                      <a:tailEnd type="none" w="med" len="med"/>
+                    </a:lnR>
+                    <a:lnT w="6350" cap="flat" cmpd="sng" algn="ctr">
+                      <a:solidFill>
+                        <a:srgbClr val="E5E2DC"/>
+                      </a:solidFill>
+                      <a:prstDash val="solid"/>
+                      <a:round/>
+                      <a:headEnd type="none" w="med" len="med"/>
+                      <a:tailEnd type="none" w="med" len="med"/>
+                    </a:lnT>
+                    <a:lnB w="6350" cap="flat" cmpd="sng" algn="ctr">
+                      <a:solidFill>
+                        <a:srgbClr val="E5E2DC"/>
+                      </a:solidFill>
+                      <a:prstDash val="solid"/>
+                      <a:round/>
+                      <a:headEnd type="none" w="med" len="med"/>
+                      <a:tailEnd type="none" w="med" len="med"/>
+                    </a:lnB>
+                  </a:tcPr>
+                </a:tc>
+                <a:tc>
+                  <a:txBody>
+                    <a:bodyPr/>
+                    <a:lstStyle/>
+                    <a:p>
+                      <a:pPr indent="0" marL="0">
+                        <a:buNone/>
+                      </a:pPr>
+                      <a:r>
+                        <a:rPr lang="en-US" sz="1300" dirty="0">
+                          <a:solidFill>
+                            <a:srgbClr val="3D3A36"/>
+                          </a:solidFill>
+                          <a:latin typeface="Calibri" pitchFamily="34" charset="0"/>
+                          <a:ea typeface="Calibri" pitchFamily="34" charset="-122"/>
+                          <a:cs typeface="Calibri" pitchFamily="34" charset="-120"/>
+                        </a:rPr>
+                        <a:t>2(1)+1</a:t>
+                      </a:r>
+                      <a:endParaRPr lang="en-US" sz="1300" dirty="0">
+                        <a:latin typeface="Calibri" charset="0"/>
+                        <a:ea typeface="Calibri" charset="0"/>
+                        <a:cs typeface="Calibri" charset="0"/>
+                      </a:endParaRPr>
+                    </a:p>
+                  </a:txBody>
+                  <a:tcPr marL="91440" marR="91440" marT="45720" marB="45720">
+                    <a:lnL w="6350" cap="flat" cmpd="sng" algn="ctr">
+                      <a:solidFill>
+                        <a:srgbClr val="E5E2DC"/>
+                      </a:solidFill>
+                      <a:prstDash val="solid"/>
+                      <a:round/>
+                      <a:headEnd type="none" w="med" len="med"/>
+                      <a:tailEnd type="none" w="med" len="med"/>
+                    </a:lnL>
+                    <a:lnR w="6350" cap="flat" cmpd="sng" algn="ctr">
+                      <a:solidFill>
+                        <a:srgbClr val="E5E2DC"/>
+                      </a:solidFill>
+                      <a:prstDash val="solid"/>
+                      <a:round/>
+                      <a:headEnd type="none" w="med" len="med"/>
+                      <a:tailEnd type="none" w="med" len="med"/>
+                    </a:lnR>
+                    <a:lnT w="6350" cap="flat" cmpd="sng" algn="ctr">
+                      <a:solidFill>
+                        <a:srgbClr val="E5E2DC"/>
+                      </a:solidFill>
+                      <a:prstDash val="solid"/>
+                      <a:round/>
+                      <a:headEnd type="none" w="med" len="med"/>
+                      <a:tailEnd type="none" w="med" len="med"/>
+                    </a:lnT>
+                    <a:lnB w="6350" cap="flat" cmpd="sng" algn="ctr">
+                      <a:solidFill>
+                        <a:srgbClr val="E5E2DC"/>
+                      </a:solidFill>
+                      <a:prstDash val="solid"/>
+                      <a:round/>
+                      <a:headEnd type="none" w="med" len="med"/>
+                      <a:tailEnd type="none" w="med" len="med"/>
+                    </a:lnB>
+                  </a:tcPr>
+                </a:tc>
+                <a:tc>
+                  <a:txBody>
+                    <a:bodyPr/>
+                    <a:lstStyle/>
+                    <a:p>
+                      <a:pPr indent="0" marL="0">
+                        <a:buNone/>
+                      </a:pPr>
+                      <a:r>
+                        <a:rPr lang="en-US" sz="1300" dirty="0">
+                          <a:solidFill>
+                            <a:srgbClr val="3D3A36"/>
+                          </a:solidFill>
+                          <a:latin typeface="Calibri" pitchFamily="34" charset="0"/>
+                          <a:ea typeface="Calibri" pitchFamily="34" charset="-122"/>
+                          <a:cs typeface="Calibri" pitchFamily="34" charset="-120"/>
+                        </a:rPr>
+                        <a:t>3</a:t>
+                      </a:r>
+                      <a:endParaRPr lang="en-US" sz="1300" dirty="0">
+                        <a:latin typeface="Calibri" charset="0"/>
+                        <a:ea typeface="Calibri" charset="0"/>
+                        <a:cs typeface="Calibri" charset="0"/>
+                      </a:endParaRPr>
+                    </a:p>
+                  </a:txBody>
+                  <a:tcPr marL="91440" marR="91440" marT="45720" marB="45720">
+                    <a:lnL w="6350" cap="flat" cmpd="sng" algn="ctr">
+                      <a:solidFill>
+                        <a:srgbClr val="E5E2DC"/>
+                      </a:solidFill>
+                      <a:prstDash val="solid"/>
+                      <a:round/>
+                      <a:headEnd type="none" w="med" len="med"/>
+                      <a:tailEnd type="none" w="med" len="med"/>
+                    </a:lnL>
+                    <a:lnR w="6350" cap="flat" cmpd="sng" algn="ctr">
+                      <a:solidFill>
+                        <a:srgbClr val="E5E2DC"/>
+                      </a:solidFill>
+                      <a:prstDash val="solid"/>
+                      <a:round/>
+                      <a:headEnd type="none" w="med" len="med"/>
+                      <a:tailEnd type="none" w="med" len="med"/>
+                    </a:lnR>
+                    <a:lnT w="6350" cap="flat" cmpd="sng" algn="ctr">
+                      <a:solidFill>
+                        <a:srgbClr val="E5E2DC"/>
+                      </a:solidFill>
+                      <a:prstDash val="solid"/>
+                      <a:round/>
+                      <a:headEnd type="none" w="med" len="med"/>
+                      <a:tailEnd type="none" w="med" len="med"/>
+                    </a:lnT>
+                    <a:lnB w="6350" cap="flat" cmpd="sng" algn="ctr">
+                      <a:solidFill>
+                        <a:srgbClr val="E5E2DC"/>
+                      </a:solidFill>
+                      <a:prstDash val="solid"/>
+                      <a:round/>
+                      <a:headEnd type="none" w="med" len="med"/>
+                      <a:tailEnd type="none" w="med" len="med"/>
+                    </a:lnB>
+                  </a:tcPr>
+                </a:tc>
+                <a:tc>
+                  <a:txBody>
+                    <a:bodyPr/>
+                    <a:lstStyle/>
+                    <a:p>
+                      <a:pPr indent="0" marL="0">
+                        <a:buNone/>
+                      </a:pPr>
+                      <a:r>
+                        <a:rPr lang="en-US" sz="1300" dirty="0">
+                          <a:solidFill>
+                            <a:srgbClr val="3D3A36"/>
+                          </a:solidFill>
+                          <a:latin typeface="Calibri" pitchFamily="34" charset="0"/>
+                          <a:ea typeface="Calibri" pitchFamily="34" charset="-122"/>
+                          <a:cs typeface="Calibri" pitchFamily="34" charset="-120"/>
+                        </a:rPr>
+                        <a:t>(1, 3)</a:t>
+                      </a:r>
+                      <a:endParaRPr lang="en-US" sz="1300" dirty="0">
+                        <a:latin typeface="Calibri" charset="0"/>
+                        <a:ea typeface="Calibri" charset="0"/>
+                        <a:cs typeface="Calibri" charset="0"/>
+                      </a:endParaRPr>
+                    </a:p>
+                  </a:txBody>
+                  <a:tcPr marL="91440" marR="91440" marT="45720" marB="45720">
+                    <a:lnL w="6350" cap="flat" cmpd="sng" algn="ctr">
+                      <a:solidFill>
+                        <a:srgbClr val="E5E2DC"/>
+                      </a:solidFill>
+                      <a:prstDash val="solid"/>
+                      <a:round/>
+                      <a:headEnd type="none" w="med" len="med"/>
+                      <a:tailEnd type="none" w="med" len="med"/>
+                    </a:lnL>
+                    <a:lnR w="6350" cap="flat" cmpd="sng" algn="ctr">
+                      <a:solidFill>
+                        <a:srgbClr val="E5E2DC"/>
+                      </a:solidFill>
+                      <a:prstDash val="solid"/>
+                      <a:round/>
+                      <a:headEnd type="none" w="med" len="med"/>
+                      <a:tailEnd type="none" w="med" len="med"/>
+                    </a:lnR>
+                    <a:lnT w="6350" cap="flat" cmpd="sng" algn="ctr">
+                      <a:solidFill>
+                        <a:srgbClr val="E5E2DC"/>
+                      </a:solidFill>
+                      <a:prstDash val="solid"/>
+                      <a:round/>
+                      <a:headEnd type="none" w="med" len="med"/>
+                      <a:tailEnd type="none" w="med" len="med"/>
+                    </a:lnT>
+                    <a:lnB w="6350" cap="flat" cmpd="sng" algn="ctr">
+                      <a:solidFill>
+                        <a:srgbClr val="E5E2DC"/>
+                      </a:solidFill>
+                      <a:prstDash val="solid"/>
+                      <a:round/>
+                      <a:headEnd type="none" w="med" len="med"/>
+                      <a:tailEnd type="none" w="med" len="med"/>
+                    </a:lnB>
+                  </a:tcPr>
+                </a:tc>
+              </a:tr>
+              <a:tr h="502920">
+                <a:tc>
+                  <a:txBody>
+                    <a:bodyPr/>
+                    <a:lstStyle/>
+                    <a:p>
+                      <a:pPr indent="0" marL="0">
+                        <a:buNone/>
+                      </a:pPr>
+                      <a:r>
+                        <a:rPr lang="en-US" sz="1300" dirty="0">
+                          <a:solidFill>
+                            <a:srgbClr val="3D3A36"/>
+                          </a:solidFill>
+                          <a:latin typeface="Calibri" pitchFamily="34" charset="0"/>
+                          <a:ea typeface="Calibri" pitchFamily="34" charset="-122"/>
+                          <a:cs typeface="Calibri" pitchFamily="34" charset="-120"/>
+                        </a:rPr>
+                        <a:t>3</a:t>
+                      </a:r>
+                      <a:endParaRPr lang="en-US" sz="1300" dirty="0">
+                        <a:latin typeface="Calibri" charset="0"/>
+                        <a:ea typeface="Calibri" charset="0"/>
+                        <a:cs typeface="Calibri" charset="0"/>
+                      </a:endParaRPr>
+                    </a:p>
+                  </a:txBody>
+                  <a:tcPr marL="91440" marR="91440" marT="45720" marB="45720">
+                    <a:lnL w="6350" cap="flat" cmpd="sng" algn="ctr">
+                      <a:solidFill>
+                        <a:srgbClr val="E5E2DC"/>
+                      </a:solidFill>
+                      <a:prstDash val="solid"/>
+                      <a:round/>
+                      <a:headEnd type="none" w="med" len="med"/>
+                      <a:tailEnd type="none" w="med" len="med"/>
+                    </a:lnL>
+                    <a:lnR w="6350" cap="flat" cmpd="sng" algn="ctr">
+                      <a:solidFill>
+                        <a:srgbClr val="E5E2DC"/>
+                      </a:solidFill>
+                      <a:prstDash val="solid"/>
+                      <a:round/>
+                      <a:headEnd type="none" w="med" len="med"/>
+                      <a:tailEnd type="none" w="med" len="med"/>
+                    </a:lnR>
+                    <a:lnT w="6350" cap="flat" cmpd="sng" algn="ctr">
+                      <a:solidFill>
+                        <a:srgbClr val="E5E2DC"/>
+                      </a:solidFill>
+                      <a:prstDash val="solid"/>
+                      <a:round/>
+                      <a:headEnd type="none" w="med" len="med"/>
+                      <a:tailEnd type="none" w="med" len="med"/>
+                    </a:lnT>
+                    <a:lnB w="6350" cap="flat" cmpd="sng" algn="ctr">
+                      <a:solidFill>
+                        <a:srgbClr val="E5E2DC"/>
+                      </a:solidFill>
+                      <a:prstDash val="solid"/>
+                      <a:round/>
+                      <a:headEnd type="none" w="med" len="med"/>
+                      <a:tailEnd type="none" w="med" len="med"/>
+                    </a:lnB>
+                  </a:tcPr>
+                </a:tc>
+                <a:tc>
+                  <a:txBody>
+                    <a:bodyPr/>
+                    <a:lstStyle/>
+                    <a:p>
+                      <a:pPr indent="0" marL="0">
+                        <a:buNone/>
+                      </a:pPr>
+                      <a:r>
+                        <a:rPr lang="en-US" sz="1300" dirty="0">
+                          <a:solidFill>
+                            <a:srgbClr val="3D3A36"/>
+                          </a:solidFill>
+                          <a:latin typeface="Calibri" pitchFamily="34" charset="0"/>
+                          <a:ea typeface="Calibri" pitchFamily="34" charset="-122"/>
+                          <a:cs typeface="Calibri" pitchFamily="34" charset="-120"/>
+                        </a:rPr>
+                        <a:t>2(3)+1</a:t>
+                      </a:r>
+                      <a:endParaRPr lang="en-US" sz="1300" dirty="0">
+                        <a:latin typeface="Calibri" charset="0"/>
+                        <a:ea typeface="Calibri" charset="0"/>
+                        <a:cs typeface="Calibri" charset="0"/>
+                      </a:endParaRPr>
+                    </a:p>
+                  </a:txBody>
+                  <a:tcPr marL="91440" marR="91440" marT="45720" marB="45720">
+                    <a:lnL w="6350" cap="flat" cmpd="sng" algn="ctr">
+                      <a:solidFill>
+                        <a:srgbClr val="E5E2DC"/>
+                      </a:solidFill>
+                      <a:prstDash val="solid"/>
+                      <a:round/>
+                      <a:headEnd type="none" w="med" len="med"/>
+                      <a:tailEnd type="none" w="med" len="med"/>
+                    </a:lnL>
+                    <a:lnR w="6350" cap="flat" cmpd="sng" algn="ctr">
+                      <a:solidFill>
+                        <a:srgbClr val="E5E2DC"/>
+                      </a:solidFill>
+                      <a:prstDash val="solid"/>
+                      <a:round/>
+                      <a:headEnd type="none" w="med" len="med"/>
+                      <a:tailEnd type="none" w="med" len="med"/>
+                    </a:lnR>
+                    <a:lnT w="6350" cap="flat" cmpd="sng" algn="ctr">
+                      <a:solidFill>
+                        <a:srgbClr val="E5E2DC"/>
+                      </a:solidFill>
+                      <a:prstDash val="solid"/>
+                      <a:round/>
+                      <a:headEnd type="none" w="med" len="med"/>
+                      <a:tailEnd type="none" w="med" len="med"/>
+                    </a:lnT>
+                    <a:lnB w="6350" cap="flat" cmpd="sng" algn="ctr">
+                      <a:solidFill>
+                        <a:srgbClr val="E5E2DC"/>
+                      </a:solidFill>
+                      <a:prstDash val="solid"/>
+                      <a:round/>
+                      <a:headEnd type="none" w="med" len="med"/>
+                      <a:tailEnd type="none" w="med" len="med"/>
+                    </a:lnB>
+                  </a:tcPr>
+                </a:tc>
+                <a:tc>
+                  <a:txBody>
+                    <a:bodyPr/>
+                    <a:lstStyle/>
+                    <a:p>
+                      <a:pPr indent="0" marL="0">
+                        <a:buNone/>
+                      </a:pPr>
+                      <a:r>
+                        <a:rPr lang="en-US" sz="1300" dirty="0">
+                          <a:solidFill>
+                            <a:srgbClr val="3D3A36"/>
+                          </a:solidFill>
+                          <a:latin typeface="Calibri" pitchFamily="34" charset="0"/>
+                          <a:ea typeface="Calibri" pitchFamily="34" charset="-122"/>
+                          <a:cs typeface="Calibri" pitchFamily="34" charset="-120"/>
+                        </a:rPr>
+                        <a:t>7</a:t>
+                      </a:r>
+                      <a:endParaRPr lang="en-US" sz="1300" dirty="0">
+                        <a:latin typeface="Calibri" charset="0"/>
+                        <a:ea typeface="Calibri" charset="0"/>
+                        <a:cs typeface="Calibri" charset="0"/>
+                      </a:endParaRPr>
+                    </a:p>
+                  </a:txBody>
+                  <a:tcPr marL="91440" marR="91440" marT="45720" marB="45720">
+                    <a:lnL w="6350" cap="flat" cmpd="sng" algn="ctr">
+                      <a:solidFill>
+                        <a:srgbClr val="E5E2DC"/>
+                      </a:solidFill>
+                      <a:prstDash val="solid"/>
+                      <a:round/>
+                      <a:headEnd type="none" w="med" len="med"/>
+                      <a:tailEnd type="none" w="med" len="med"/>
+                    </a:lnL>
+                    <a:lnR w="6350" cap="flat" cmpd="sng" algn="ctr">
+                      <a:solidFill>
+                        <a:srgbClr val="E5E2DC"/>
+                      </a:solidFill>
+                      <a:prstDash val="solid"/>
+                      <a:round/>
+                      <a:headEnd type="none" w="med" len="med"/>
+                      <a:tailEnd type="none" w="med" len="med"/>
+                    </a:lnR>
+                    <a:lnT w="6350" cap="flat" cmpd="sng" algn="ctr">
+                      <a:solidFill>
+                        <a:srgbClr val="E5E2DC"/>
+                      </a:solidFill>
+                      <a:prstDash val="solid"/>
+                      <a:round/>
+                      <a:headEnd type="none" w="med" len="med"/>
+                      <a:tailEnd type="none" w="med" len="med"/>
+                    </a:lnT>
+                    <a:lnB w="6350" cap="flat" cmpd="sng" algn="ctr">
+                      <a:solidFill>
+                        <a:srgbClr val="E5E2DC"/>
+                      </a:solidFill>
+                      <a:prstDash val="solid"/>
+                      <a:round/>
+                      <a:headEnd type="none" w="med" len="med"/>
+                      <a:tailEnd type="none" w="med" len="med"/>
+                    </a:lnB>
+                  </a:tcPr>
+                </a:tc>
+                <a:tc>
+                  <a:txBody>
+                    <a:bodyPr/>
+                    <a:lstStyle/>
+                    <a:p>
+                      <a:pPr indent="0" marL="0">
+                        <a:buNone/>
+                      </a:pPr>
+                      <a:r>
+                        <a:rPr lang="en-US" sz="1300" dirty="0">
+                          <a:solidFill>
+                            <a:srgbClr val="3D3A36"/>
+                          </a:solidFill>
+                          <a:latin typeface="Calibri" pitchFamily="34" charset="0"/>
+                          <a:ea typeface="Calibri" pitchFamily="34" charset="-122"/>
+                          <a:cs typeface="Calibri" pitchFamily="34" charset="-120"/>
+                        </a:rPr>
+                        <a:t>(3, 7)</a:t>
+                      </a:r>
+                      <a:endParaRPr lang="en-US" sz="1300" dirty="0">
+                        <a:latin typeface="Calibri" charset="0"/>
+                        <a:ea typeface="Calibri" charset="0"/>
+                        <a:cs typeface="Calibri" charset="0"/>
+                      </a:endParaRPr>
+                    </a:p>
+                  </a:txBody>
+                  <a:tcPr marL="91440" marR="91440" marT="45720" marB="45720">
+                    <a:lnL w="6350" cap="flat" cmpd="sng" algn="ctr">
+                      <a:solidFill>
+                        <a:srgbClr val="E5E2DC"/>
+                      </a:solidFill>
+                      <a:prstDash val="solid"/>
+                      <a:round/>
+                      <a:headEnd type="none" w="med" len="med"/>
+                      <a:tailEnd type="none" w="med" len="med"/>
+                    </a:lnL>
+                    <a:lnR w="6350" cap="flat" cmpd="sng" algn="ctr">
+                      <a:solidFill>
+                        <a:srgbClr val="E5E2DC"/>
+                      </a:solidFill>
+                      <a:prstDash val="solid"/>
+                      <a:round/>
+                      <a:headEnd type="none" w="med" len="med"/>
+                      <a:tailEnd type="none" w="med" len="med"/>
+                    </a:lnR>
+                    <a:lnT w="6350" cap="flat" cmpd="sng" algn="ctr">
+                      <a:solidFill>
+                        <a:srgbClr val="E5E2DC"/>
+                      </a:solidFill>
+                      <a:prstDash val="solid"/>
+                      <a:round/>
+                      <a:headEnd type="none" w="med" len="med"/>
+                      <a:tailEnd type="none" w="med" len="med"/>
+                    </a:lnT>
+                    <a:lnB w="6350" cap="flat" cmpd="sng" algn="ctr">
+                      <a:solidFill>
+                        <a:srgbClr val="E5E2DC"/>
+                      </a:solidFill>
+                      <a:prstDash val="solid"/>
+                      <a:round/>
+                      <a:headEnd type="none" w="med" len="med"/>
+                      <a:tailEnd type="none" w="med" len="med"/>
+                    </a:lnB>
+                  </a:tcPr>
+                </a:tc>
+              </a:tr>
+            </a:tbl>
+          </a:graphicData>
+        </a:graphic>
+      </p:graphicFrame>
     </p:spTree>
   </p:cSld>
   <p:clrMapOvr>
@@ -4485,6 +4410,13 @@
 <file path=ppt/slides/slide6.xml><?xml version="1.0" encoding="utf-8"?>
 <p:sld xmlns:a="http://schemas.openxmlformats.org/drawingml/2006/main" xmlns:r="http://schemas.openxmlformats.org/officeDocument/2006/relationships" xmlns:p="http://schemas.openxmlformats.org/presentationml/2006/main">
   <p:cSld name="Slide 6">
+    <p:bg>
+      <p:bgPr>
+        <a:solidFill>
+          <a:srgbClr val="FAF8F5"/>
+        </a:solidFill>
+      </p:bgPr>
+    </p:bg>
     <p:spTree>
       <p:nvGrpSpPr>
         <p:cNvPr id="1" name=""/>
@@ -4508,7 +4440,27 @@
         <p:spPr>
           <a:xfrm>
             <a:off x="0" y="0"/>
-            <a:ext cx="9144000" cy="54864"/>
+            <a:ext cx="9144000" cy="822960"/>
+          </a:xfrm>
+          <a:prstGeom prst="rect">
+            <a:avLst/>
+          </a:prstGeom>
+          <a:solidFill>
+            <a:srgbClr val="FFFFFF"/>
+          </a:solidFill>
+          <a:ln/>
+        </p:spPr>
+      </p:sp>
+      <p:sp>
+        <p:nvSpPr>
+          <p:cNvPr id="3" name="Shape 1"/>
+          <p:cNvSpPr/>
+          <p:nvPr/>
+        </p:nvSpPr>
+        <p:spPr>
+          <a:xfrm>
+            <a:off x="0" y="795528"/>
+            <a:ext cx="9144000" cy="27432"/>
           </a:xfrm>
           <a:prstGeom prst="rect">
             <a:avLst/>
@@ -4521,14 +4473,14 @@
       </p:sp>
       <p:sp>
         <p:nvSpPr>
-          <p:cNvPr id="3" name="Text 1"/>
-          <p:cNvSpPr/>
-          <p:nvPr/>
-        </p:nvSpPr>
-        <p:spPr>
-          <a:xfrm>
-            <a:off x="457200" y="228600"/>
-            <a:ext cx="8229600" cy="548640"/>
+          <p:cNvPr id="4" name="Text 2"/>
+          <p:cNvSpPr/>
+          <p:nvPr/>
+        </p:nvSpPr>
+        <p:spPr>
+          <a:xfrm>
+            <a:off x="640080" y="91440"/>
+            <a:ext cx="7863840" cy="640080"/>
           </a:xfrm>
           <a:prstGeom prst="rect">
             <a:avLst/>
@@ -4544,7 +4496,7 @@
               <a:buNone/>
             </a:pPr>
             <a:r>
-              <a:rPr lang="en-US" sz="2400" b="1" dirty="0">
+              <a:rPr lang="en-US" sz="2200" b="1" dirty="0">
                 <a:solidFill>
                   <a:srgbClr val="1B2A4A"/>
                 </a:solidFill>
@@ -4552,22 +4504,49 @@
                 <a:ea typeface="Georgia" pitchFamily="34" charset="-122"/>
                 <a:cs typeface="Georgia" pitchFamily="34" charset="-120"/>
               </a:rPr>
-              <a:t>Key Vocabulary</a:t>
-            </a:r>
-            <a:endParaRPr lang="en-US" sz="2400" dirty="0"/>
-          </a:p>
-        </p:txBody>
-      </p:sp>
-      <p:sp>
-        <p:nvSpPr>
-          <p:cNvPr id="4" name="Shape 2"/>
-          <p:cNvSpPr/>
-          <p:nvPr/>
-        </p:nvSpPr>
-        <p:spPr>
-          <a:xfrm>
-            <a:off x="457200" y="868680"/>
-            <a:ext cx="1828800" cy="27432"/>
+              <a:t>Reading the Gradient</a:t>
+            </a:r>
+            <a:endParaRPr lang="en-US" sz="2200" dirty="0"/>
+          </a:p>
+        </p:txBody>
+      </p:sp>
+      <p:sp>
+        <p:nvSpPr>
+          <p:cNvPr id="5" name="Shape 3"/>
+          <p:cNvSpPr/>
+          <p:nvPr/>
+        </p:nvSpPr>
+        <p:spPr>
+          <a:xfrm>
+            <a:off x="457200" y="1005840"/>
+            <a:ext cx="3931920" cy="3657600"/>
+          </a:xfrm>
+          <a:prstGeom prst="rect">
+            <a:avLst/>
+          </a:prstGeom>
+          <a:solidFill>
+            <a:srgbClr val="FFFFFF"/>
+          </a:solidFill>
+          <a:ln/>
+          <a:effectLst>
+            <a:outerShdw sx="100000" sy="100000" kx="0" ky="0" algn="bl" rotWithShape="0" blurRad="76200" dist="25400" dir="8100000">
+              <a:srgbClr val="000000">
+                <a:alpha val="12000"/>
+              </a:srgbClr>
+            </a:outerShdw>
+          </a:effectLst>
+        </p:spPr>
+      </p:sp>
+      <p:sp>
+        <p:nvSpPr>
+          <p:cNvPr id="6" name="Shape 4"/>
+          <p:cNvSpPr/>
+          <p:nvPr/>
+        </p:nvSpPr>
+        <p:spPr>
+          <a:xfrm>
+            <a:off x="457200" y="1005840"/>
+            <a:ext cx="3931920" cy="64008"/>
           </a:xfrm>
           <a:prstGeom prst="rect">
             <a:avLst/>
@@ -4580,14 +4559,14 @@
       </p:sp>
       <p:sp>
         <p:nvSpPr>
-          <p:cNvPr id="5" name="Text 3"/>
-          <p:cNvSpPr/>
-          <p:nvPr/>
-        </p:nvSpPr>
-        <p:spPr>
-          <a:xfrm>
-            <a:off x="457200" y="1188720"/>
-            <a:ext cx="8229600" cy="548640"/>
+          <p:cNvPr id="7" name="Text 5"/>
+          <p:cNvSpPr/>
+          <p:nvPr/>
+        </p:nvSpPr>
+        <p:spPr>
+          <a:xfrm>
+            <a:off x="640080" y="1188720"/>
+            <a:ext cx="3566160" cy="457200"/>
           </a:xfrm>
           <a:prstGeom prst="rect">
             <a:avLst/>
@@ -4603,54 +4582,15 @@
               <a:buNone/>
             </a:pPr>
             <a:r>
-              <a:rPr lang="en-US" sz="2800" b="1" dirty="0">
+              <a:rPr lang="en-US" sz="1600" b="1" dirty="0">
                 <a:solidFill>
                   <a:srgbClr val="C8372D"/>
-                </a:solidFill>
-                <a:latin typeface="Georgia" pitchFamily="34" charset="0"/>
-                <a:ea typeface="Georgia" pitchFamily="34" charset="-122"/>
-                <a:cs typeface="Georgia" pitchFamily="34" charset="-120"/>
-              </a:rPr>
-              <a:t>Factorise</a:t>
-            </a:r>
-            <a:endParaRPr lang="en-US" sz="2800" dirty="0"/>
-          </a:p>
-        </p:txBody>
-      </p:sp>
-      <p:sp>
-        <p:nvSpPr>
-          <p:cNvPr id="6" name="Text 4"/>
-          <p:cNvSpPr/>
-          <p:nvPr/>
-        </p:nvSpPr>
-        <p:spPr>
-          <a:xfrm>
-            <a:off x="457200" y="1691640"/>
-            <a:ext cx="8229600" cy="365760"/>
-          </a:xfrm>
-          <a:prstGeom prst="rect">
-            <a:avLst/>
-          </a:prstGeom>
-          <a:noFill/>
-          <a:ln/>
-        </p:spPr>
-        <p:txBody>
-          <a:bodyPr wrap="square" rtlCol="0" anchor="ctr"/>
-          <a:lstStyle/>
-          <a:p>
-            <a:pPr indent="0" marL="0">
-              <a:buNone/>
-            </a:pPr>
-            <a:r>
-              <a:rPr lang="en-US" sz="1600" i="1" dirty="0">
-                <a:solidFill>
-                  <a:srgbClr val="9B9690"/>
                 </a:solidFill>
                 <a:latin typeface="Calibri" pitchFamily="34" charset="0"/>
                 <a:ea typeface="Calibri" pitchFamily="34" charset="-122"/>
                 <a:cs typeface="Calibri" pitchFamily="34" charset="-120"/>
               </a:rPr>
-              <a:t>因式分解</a:t>
+              <a:t>What m Tells You</a:t>
             </a:r>
             <a:endParaRPr lang="en-US" sz="1600" dirty="0"/>
           </a:p>
@@ -4658,14 +4598,14 @@
       </p:sp>
       <p:sp>
         <p:nvSpPr>
-          <p:cNvPr id="7" name="Text 5"/>
-          <p:cNvSpPr/>
-          <p:nvPr/>
-        </p:nvSpPr>
-        <p:spPr>
-          <a:xfrm>
-            <a:off x="457200" y="2194560"/>
-            <a:ext cx="8229600" cy="1828800"/>
+          <p:cNvPr id="8" name="Text 6"/>
+          <p:cNvSpPr/>
+          <p:nvPr/>
+        </p:nvSpPr>
+        <p:spPr>
+          <a:xfrm>
+            <a:off x="640080" y="1691640"/>
+            <a:ext cx="3566160" cy="2743200"/>
           </a:xfrm>
           <a:prstGeom prst="rect">
             <a:avLst/>
@@ -4677,63 +4617,280 @@
           <a:bodyPr wrap="square" rtlCol="0" anchor="ctr"/>
           <a:lstStyle/>
           <a:p>
-            <a:pPr indent="0" marL="0">
-              <a:lnSpc>
-                <a:spcPct val="150000"/>
-              </a:lnSpc>
-              <a:buNone/>
-            </a:pPr>
-            <a:r>
-              <a:rPr lang="en-US" sz="1800" dirty="0">
-                <a:solidFill>
-                  <a:srgbClr val="6B6660"/>
+            <a:pPr marL="342900" indent="-342900">
+              <a:spcAft>
+                <a:spcPts val="600"/>
+              </a:spcAft>
+              <a:buSzPct val="100000"/>
+              <a:buChar char="•"/>
+            </a:pPr>
+            <a:r>
+              <a:rPr lang="en-US" sz="1400" dirty="0">
+                <a:solidFill>
+                  <a:srgbClr val="3D3A36"/>
                 </a:solidFill>
                 <a:latin typeface="Calibri" pitchFamily="34" charset="0"/>
                 <a:ea typeface="Calibri" pitchFamily="34" charset="-122"/>
                 <a:cs typeface="Calibri" pitchFamily="34" charset="-120"/>
               </a:rPr>
-              <a:t>The reverse of expanding — take out a common factor. e.g. 6x + 12 = 6(x + 2).</a:t>
-            </a:r>
-            <a:endParaRPr lang="en-US" sz="1800" dirty="0"/>
-          </a:p>
-        </p:txBody>
-      </p:sp>
-      <p:sp>
-        <p:nvSpPr>
-          <p:cNvPr id="8" name="Text 6"/>
-          <p:cNvSpPr/>
-          <p:nvPr/>
-        </p:nvSpPr>
-        <p:spPr>
-          <a:xfrm>
-            <a:off x="7315200" y="4754880"/>
-            <a:ext cx="1828800" cy="274320"/>
-          </a:xfrm>
-          <a:prstGeom prst="rect">
-            <a:avLst/>
-          </a:prstGeom>
-          <a:noFill/>
-          <a:ln/>
-        </p:spPr>
-        <p:txBody>
-          <a:bodyPr wrap="square" rtlCol="0" anchor="ctr"/>
-          <a:lstStyle/>
-          <a:p>
-            <a:pPr algn="r" indent="0" marL="0">
-              <a:buNone/>
-            </a:pPr>
-            <a:r>
-              <a:rPr lang="en-US" sz="900" dirty="0">
-                <a:solidFill>
-                  <a:srgbClr val="9B9690"/>
+              <a:t>m = 2 → for every 1 right, go 2 up.</a:t>
+            </a:r>
+            <a:endParaRPr lang="en-US" sz="1400" dirty="0"/>
+          </a:p>
+          <a:p>
+            <a:pPr marL="342900" indent="-342900">
+              <a:spcAft>
+                <a:spcPts val="600"/>
+              </a:spcAft>
+              <a:buSzPct val="100000"/>
+              <a:buChar char="•"/>
+            </a:pPr>
+            <a:r>
+              <a:rPr lang="en-US" sz="1400" dirty="0">
+                <a:solidFill>
+                  <a:srgbClr val="3D3A36"/>
                 </a:solidFill>
                 <a:latin typeface="Calibri" pitchFamily="34" charset="0"/>
                 <a:ea typeface="Calibri" pitchFamily="34" charset="-122"/>
                 <a:cs typeface="Calibri" pitchFamily="34" charset="-120"/>
               </a:rPr>
-              <a:t>mrzocchi.com</a:t>
-            </a:r>
-            <a:endParaRPr lang="en-US" sz="900" dirty="0"/>
+              <a:t>m = −1 → for every 1 right, go 1 down.</a:t>
+            </a:r>
+            <a:endParaRPr lang="en-US" sz="1400" dirty="0"/>
+          </a:p>
+          <a:p>
+            <a:pPr marL="342900" indent="-342900">
+              <a:spcAft>
+                <a:spcPts val="600"/>
+              </a:spcAft>
+              <a:buSzPct val="100000"/>
+              <a:buChar char="•"/>
+            </a:pPr>
+            <a:r>
+              <a:rPr lang="en-US" sz="1400" dirty="0">
+                <a:solidFill>
+                  <a:srgbClr val="3D3A36"/>
+                </a:solidFill>
+                <a:latin typeface="Calibri" pitchFamily="34" charset="0"/>
+                <a:ea typeface="Calibri" pitchFamily="34" charset="-122"/>
+                <a:cs typeface="Calibri" pitchFamily="34" charset="-120"/>
+              </a:rPr>
+              <a:t>m = 0.5 → gentle slope upward.</a:t>
+            </a:r>
+            <a:endParaRPr lang="en-US" sz="1400" dirty="0"/>
+          </a:p>
+          <a:p>
+            <a:pPr marL="342900" indent="-342900">
+              <a:spcAft>
+                <a:spcPts val="600"/>
+              </a:spcAft>
+              <a:buSzPct val="100000"/>
+              <a:buChar char="•"/>
+            </a:pPr>
+            <a:r>
+              <a:rPr lang="en-US" sz="1400" dirty="0">
+                <a:solidFill>
+                  <a:srgbClr val="3D3A36"/>
+                </a:solidFill>
+                <a:latin typeface="Calibri" pitchFamily="34" charset="0"/>
+                <a:ea typeface="Calibri" pitchFamily="34" charset="-122"/>
+                <a:cs typeface="Calibri" pitchFamily="34" charset="-120"/>
+              </a:rPr>
+              <a:t>m = 0 → flat horizontal line (constant).</a:t>
+            </a:r>
+            <a:endParaRPr lang="en-US" sz="1400" dirty="0"/>
+          </a:p>
+        </p:txBody>
+      </p:sp>
+      <p:sp>
+        <p:nvSpPr>
+          <p:cNvPr id="9" name="Shape 7"/>
+          <p:cNvSpPr/>
+          <p:nvPr/>
+        </p:nvSpPr>
+        <p:spPr>
+          <a:xfrm>
+            <a:off x="4754880" y="1005840"/>
+            <a:ext cx="3931920" cy="3657600"/>
+          </a:xfrm>
+          <a:prstGeom prst="rect">
+            <a:avLst/>
+          </a:prstGeom>
+          <a:solidFill>
+            <a:srgbClr val="FFFFFF"/>
+          </a:solidFill>
+          <a:ln/>
+          <a:effectLst>
+            <a:outerShdw sx="100000" sy="100000" kx="0" ky="0" algn="bl" rotWithShape="0" blurRad="76200" dist="25400" dir="8100000">
+              <a:srgbClr val="000000">
+                <a:alpha val="12000"/>
+              </a:srgbClr>
+            </a:outerShdw>
+          </a:effectLst>
+        </p:spPr>
+      </p:sp>
+      <p:sp>
+        <p:nvSpPr>
+          <p:cNvPr id="10" name="Shape 8"/>
+          <p:cNvSpPr/>
+          <p:nvPr/>
+        </p:nvSpPr>
+        <p:spPr>
+          <a:xfrm>
+            <a:off x="4754880" y="1005840"/>
+            <a:ext cx="3931920" cy="64008"/>
+          </a:xfrm>
+          <a:prstGeom prst="rect">
+            <a:avLst/>
+          </a:prstGeom>
+          <a:solidFill>
+            <a:srgbClr val="E9C46A"/>
+          </a:solidFill>
+          <a:ln/>
+        </p:spPr>
+      </p:sp>
+      <p:sp>
+        <p:nvSpPr>
+          <p:cNvPr id="11" name="Text 9"/>
+          <p:cNvSpPr/>
+          <p:nvPr/>
+        </p:nvSpPr>
+        <p:spPr>
+          <a:xfrm>
+            <a:off x="4937760" y="1188720"/>
+            <a:ext cx="3566160" cy="457200"/>
+          </a:xfrm>
+          <a:prstGeom prst="rect">
+            <a:avLst/>
+          </a:prstGeom>
+          <a:noFill/>
+          <a:ln/>
+        </p:spPr>
+        <p:txBody>
+          <a:bodyPr wrap="square" rtlCol="0" anchor="ctr"/>
+          <a:lstStyle/>
+          <a:p>
+            <a:pPr indent="0" marL="0">
+              <a:buNone/>
+            </a:pPr>
+            <a:r>
+              <a:rPr lang="en-US" sz="1600" b="1" dirty="0">
+                <a:solidFill>
+                  <a:srgbClr val="E9C46A"/>
+                </a:solidFill>
+                <a:latin typeface="Calibri" pitchFamily="34" charset="0"/>
+                <a:ea typeface="Calibri" pitchFamily="34" charset="-122"/>
+                <a:cs typeface="Calibri" pitchFamily="34" charset="-120"/>
+              </a:rPr>
+              <a:t>Real Gradients</a:t>
+            </a:r>
+            <a:endParaRPr lang="en-US" sz="1600" dirty="0"/>
+          </a:p>
+        </p:txBody>
+      </p:sp>
+      <p:sp>
+        <p:nvSpPr>
+          <p:cNvPr id="12" name="Text 10"/>
+          <p:cNvSpPr/>
+          <p:nvPr/>
+        </p:nvSpPr>
+        <p:spPr>
+          <a:xfrm>
+            <a:off x="4937760" y="1691640"/>
+            <a:ext cx="3566160" cy="2743200"/>
+          </a:xfrm>
+          <a:prstGeom prst="rect">
+            <a:avLst/>
+          </a:prstGeom>
+          <a:noFill/>
+          <a:ln/>
+        </p:spPr>
+        <p:txBody>
+          <a:bodyPr wrap="square" rtlCol="0" anchor="ctr"/>
+          <a:lstStyle/>
+          <a:p>
+            <a:pPr marL="342900" indent="-342900">
+              <a:spcAft>
+                <a:spcPts val="600"/>
+              </a:spcAft>
+              <a:buSzPct val="100000"/>
+              <a:buChar char="•"/>
+            </a:pPr>
+            <a:r>
+              <a:rPr lang="en-US" sz="1400" dirty="0">
+                <a:solidFill>
+                  <a:srgbClr val="3D3A36"/>
+                </a:solidFill>
+                <a:latin typeface="Calibri" pitchFamily="34" charset="0"/>
+                <a:ea typeface="Calibri" pitchFamily="34" charset="-122"/>
+                <a:cs typeface="Calibri" pitchFamily="34" charset="-120"/>
+              </a:rPr>
+              <a:t>Nanjing taxi: m = 2.40 (yuan per km).</a:t>
+            </a:r>
+            <a:endParaRPr lang="en-US" sz="1400" dirty="0"/>
+          </a:p>
+          <a:p>
+            <a:pPr marL="342900" indent="-342900">
+              <a:spcAft>
+                <a:spcPts val="600"/>
+              </a:spcAft>
+              <a:buSzPct val="100000"/>
+              <a:buChar char="•"/>
+            </a:pPr>
+            <a:r>
+              <a:rPr lang="en-US" sz="1400" dirty="0">
+                <a:solidFill>
+                  <a:srgbClr val="3D3A36"/>
+                </a:solidFill>
+                <a:latin typeface="Calibri" pitchFamily="34" charset="0"/>
+                <a:ea typeface="Calibri" pitchFamily="34" charset="-122"/>
+                <a:cs typeface="Calibri" pitchFamily="34" charset="-120"/>
+              </a:rPr>
+              <a:t>Seoul taxi: m = 1000 (won per km).</a:t>
+            </a:r>
+            <a:endParaRPr lang="en-US" sz="1400" dirty="0"/>
+          </a:p>
+          <a:p>
+            <a:pPr marL="342900" indent="-342900">
+              <a:spcAft>
+                <a:spcPts val="600"/>
+              </a:spcAft>
+              <a:buSzPct val="100000"/>
+              <a:buChar char="•"/>
+            </a:pPr>
+            <a:r>
+              <a:rPr lang="en-US" sz="1400" dirty="0">
+                <a:solidFill>
+                  <a:srgbClr val="3D3A36"/>
+                </a:solidFill>
+                <a:latin typeface="Calibri" pitchFamily="34" charset="0"/>
+                <a:ea typeface="Calibri" pitchFamily="34" charset="-122"/>
+                <a:cs typeface="Calibri" pitchFamily="34" charset="-120"/>
+              </a:rPr>
+              <a:t>German electricity: m = 0.32 (euro per kWh).</a:t>
+            </a:r>
+            <a:endParaRPr lang="en-US" sz="1400" dirty="0"/>
+          </a:p>
+          <a:p>
+            <a:pPr marL="342900" indent="-342900">
+              <a:spcAft>
+                <a:spcPts val="600"/>
+              </a:spcAft>
+              <a:buSzPct val="100000"/>
+              <a:buChar char="•"/>
+            </a:pPr>
+            <a:r>
+              <a:rPr lang="en-US" sz="1400" dirty="0">
+                <a:solidFill>
+                  <a:srgbClr val="3D3A36"/>
+                </a:solidFill>
+                <a:latin typeface="Calibri" pitchFamily="34" charset="0"/>
+                <a:ea typeface="Calibri" pitchFamily="34" charset="-122"/>
+                <a:cs typeface="Calibri" pitchFamily="34" charset="-120"/>
+              </a:rPr>
+              <a:t>Steeper gradient = faster rate of change.</a:t>
+            </a:r>
+            <a:endParaRPr lang="en-US" sz="1400" dirty="0"/>
           </a:p>
         </p:txBody>
       </p:sp>
@@ -4748,6 +4905,13 @@
 <file path=ppt/slides/slide7.xml><?xml version="1.0" encoding="utf-8"?>
 <p:sld xmlns:a="http://schemas.openxmlformats.org/drawingml/2006/main" xmlns:r="http://schemas.openxmlformats.org/officeDocument/2006/relationships" xmlns:p="http://schemas.openxmlformats.org/presentationml/2006/main">
   <p:cSld name="Slide 7">
+    <p:bg>
+      <p:bgPr>
+        <a:solidFill>
+          <a:srgbClr val="FAF8F5"/>
+        </a:solidFill>
+      </p:bgPr>
+    </p:bg>
     <p:spTree>
       <p:nvGrpSpPr>
         <p:cNvPr id="1" name=""/>
@@ -4771,7 +4935,27 @@
         <p:spPr>
           <a:xfrm>
             <a:off x="0" y="0"/>
-            <a:ext cx="9144000" cy="54864"/>
+            <a:ext cx="9144000" cy="822960"/>
+          </a:xfrm>
+          <a:prstGeom prst="rect">
+            <a:avLst/>
+          </a:prstGeom>
+          <a:solidFill>
+            <a:srgbClr val="FFFFFF"/>
+          </a:solidFill>
+          <a:ln/>
+        </p:spPr>
+      </p:sp>
+      <p:sp>
+        <p:nvSpPr>
+          <p:cNvPr id="3" name="Shape 1"/>
+          <p:cNvSpPr/>
+          <p:nvPr/>
+        </p:nvSpPr>
+        <p:spPr>
+          <a:xfrm>
+            <a:off x="0" y="795528"/>
+            <a:ext cx="9144000" cy="27432"/>
           </a:xfrm>
           <a:prstGeom prst="rect">
             <a:avLst/>
@@ -4784,14 +4968,14 @@
       </p:sp>
       <p:sp>
         <p:nvSpPr>
-          <p:cNvPr id="3" name="Text 1"/>
-          <p:cNvSpPr/>
-          <p:nvPr/>
-        </p:nvSpPr>
-        <p:spPr>
-          <a:xfrm>
-            <a:off x="457200" y="228600"/>
-            <a:ext cx="8229600" cy="548640"/>
+          <p:cNvPr id="4" name="Text 2"/>
+          <p:cNvSpPr/>
+          <p:nvPr/>
+        </p:nvSpPr>
+        <p:spPr>
+          <a:xfrm>
+            <a:off x="640080" y="91440"/>
+            <a:ext cx="7863840" cy="640080"/>
           </a:xfrm>
           <a:prstGeom prst="rect">
             <a:avLst/>
@@ -4807,7 +4991,7 @@
               <a:buNone/>
             </a:pPr>
             <a:r>
-              <a:rPr lang="en-US" sz="2400" b="1" dirty="0">
+              <a:rPr lang="en-US" sz="2200" b="1" dirty="0">
                 <a:solidFill>
                   <a:srgbClr val="1B2A4A"/>
                 </a:solidFill>
@@ -4815,31 +4999,11 @@
                 <a:ea typeface="Georgia" pitchFamily="34" charset="-122"/>
                 <a:cs typeface="Georgia" pitchFamily="34" charset="-120"/>
               </a:rPr>
-              <a:t>Key Vocabulary</a:t>
-            </a:r>
-            <a:endParaRPr lang="en-US" sz="2400" dirty="0"/>
-          </a:p>
-        </p:txBody>
-      </p:sp>
-      <p:sp>
-        <p:nvSpPr>
-          <p:cNvPr id="4" name="Shape 2"/>
-          <p:cNvSpPr/>
-          <p:nvPr/>
-        </p:nvSpPr>
-        <p:spPr>
-          <a:xfrm>
-            <a:off x="457200" y="868680"/>
-            <a:ext cx="1828800" cy="27432"/>
-          </a:xfrm>
-          <a:prstGeom prst="rect">
-            <a:avLst/>
-          </a:prstGeom>
-          <a:solidFill>
-            <a:srgbClr val="C8372D"/>
-          </a:solidFill>
-          <a:ln/>
-        </p:spPr>
+              <a:t>Parallel &amp; Perpendicular Lines</a:t>
+            </a:r>
+            <a:endParaRPr lang="en-US" sz="2200" dirty="0"/>
+          </a:p>
+        </p:txBody>
       </p:sp>
       <p:sp>
         <p:nvSpPr>
@@ -4849,8 +5013,8 @@
         </p:nvSpPr>
         <p:spPr>
           <a:xfrm>
-            <a:off x="457200" y="1188720"/>
-            <a:ext cx="8229600" cy="548640"/>
+            <a:off x="640080" y="1005840"/>
+            <a:ext cx="7863840" cy="2926080"/>
           </a:xfrm>
           <a:prstGeom prst="rect">
             <a:avLst/>
@@ -4862,141 +5026,109 @@
           <a:bodyPr wrap="square" rtlCol="0" anchor="ctr"/>
           <a:lstStyle/>
           <a:p>
-            <a:pPr indent="0" marL="0">
-              <a:buNone/>
-            </a:pPr>
-            <a:r>
-              <a:rPr lang="en-US" sz="2800" b="1" dirty="0">
-                <a:solidFill>
-                  <a:srgbClr val="C8372D"/>
-                </a:solidFill>
-                <a:latin typeface="Georgia" pitchFamily="34" charset="0"/>
-                <a:ea typeface="Georgia" pitchFamily="34" charset="-122"/>
-                <a:cs typeface="Georgia" pitchFamily="34" charset="-120"/>
-              </a:rPr>
-              <a:t>Inequality</a:t>
-            </a:r>
-            <a:endParaRPr lang="en-US" sz="2800" dirty="0"/>
-          </a:p>
-        </p:txBody>
-      </p:sp>
-      <p:sp>
-        <p:nvSpPr>
-          <p:cNvPr id="6" name="Text 4"/>
-          <p:cNvSpPr/>
-          <p:nvPr/>
-        </p:nvSpPr>
-        <p:spPr>
-          <a:xfrm>
-            <a:off x="457200" y="1691640"/>
-            <a:ext cx="8229600" cy="365760"/>
-          </a:xfrm>
-          <a:prstGeom prst="rect">
-            <a:avLst/>
-          </a:prstGeom>
-          <a:noFill/>
-          <a:ln/>
-        </p:spPr>
-        <p:txBody>
-          <a:bodyPr wrap="square" rtlCol="0" anchor="ctr"/>
-          <a:lstStyle/>
-          <a:p>
-            <a:pPr indent="0" marL="0">
-              <a:buNone/>
-            </a:pPr>
-            <a:r>
-              <a:rPr lang="en-US" sz="1600" i="1" dirty="0">
-                <a:solidFill>
-                  <a:srgbClr val="9B9690"/>
+            <a:pPr marL="342900" indent="-342900">
+              <a:spcAft>
+                <a:spcPts val="800"/>
+              </a:spcAft>
+              <a:buSzPct val="100000"/>
+              <a:buChar char="•"/>
+            </a:pPr>
+            <a:r>
+              <a:rPr lang="en-US" sz="1600" dirty="0">
+                <a:solidFill>
+                  <a:srgbClr val="3D3A36"/>
                 </a:solidFill>
                 <a:latin typeface="Calibri" pitchFamily="34" charset="0"/>
                 <a:ea typeface="Calibri" pitchFamily="34" charset="-122"/>
                 <a:cs typeface="Calibri" pitchFamily="34" charset="-120"/>
               </a:rPr>
-              <a:t>不等式</a:t>
+              <a:t>Parallel lines have the SAME gradient but different intercepts.</a:t>
             </a:r>
             <a:endParaRPr lang="en-US" sz="1600" dirty="0"/>
           </a:p>
-        </p:txBody>
-      </p:sp>
-      <p:sp>
-        <p:nvSpPr>
-          <p:cNvPr id="7" name="Text 5"/>
-          <p:cNvSpPr/>
-          <p:nvPr/>
-        </p:nvSpPr>
-        <p:spPr>
-          <a:xfrm>
-            <a:off x="457200" y="2194560"/>
-            <a:ext cx="8229600" cy="1828800"/>
-          </a:xfrm>
-          <a:prstGeom prst="rect">
-            <a:avLst/>
-          </a:prstGeom>
-          <a:noFill/>
-          <a:ln/>
-        </p:spPr>
-        <p:txBody>
-          <a:bodyPr wrap="square" rtlCol="0" anchor="ctr"/>
-          <a:lstStyle/>
-          <a:p>
-            <a:pPr indent="0" marL="0">
-              <a:lnSpc>
-                <a:spcPct val="150000"/>
-              </a:lnSpc>
-              <a:buNone/>
-            </a:pPr>
-            <a:r>
-              <a:rPr lang="en-US" sz="1800" dirty="0">
-                <a:solidFill>
-                  <a:srgbClr val="6B6660"/>
+          <a:p>
+            <a:pPr marL="342900" indent="-342900">
+              <a:spcAft>
+                <a:spcPts val="800"/>
+              </a:spcAft>
+              <a:buSzPct val="100000"/>
+              <a:buChar char="•"/>
+            </a:pPr>
+            <a:r>
+              <a:rPr lang="en-US" sz="1600" dirty="0">
+                <a:solidFill>
+                  <a:srgbClr val="3D3A36"/>
                 </a:solidFill>
                 <a:latin typeface="Calibri" pitchFamily="34" charset="0"/>
                 <a:ea typeface="Calibri" pitchFamily="34" charset="-122"/>
                 <a:cs typeface="Calibri" pitchFamily="34" charset="-120"/>
               </a:rPr>
-              <a:t>Uses &lt; &gt; ≤ ≥ instead of =. Shows a range of values. e.g. x &gt; 3.</a:t>
-            </a:r>
-            <a:endParaRPr lang="en-US" sz="1800" dirty="0"/>
-          </a:p>
-        </p:txBody>
-      </p:sp>
-      <p:sp>
-        <p:nvSpPr>
-          <p:cNvPr id="8" name="Text 6"/>
-          <p:cNvSpPr/>
-          <p:nvPr/>
-        </p:nvSpPr>
-        <p:spPr>
-          <a:xfrm>
-            <a:off x="7315200" y="4754880"/>
-            <a:ext cx="1828800" cy="274320"/>
-          </a:xfrm>
-          <a:prstGeom prst="rect">
-            <a:avLst/>
-          </a:prstGeom>
-          <a:noFill/>
-          <a:ln/>
-        </p:spPr>
-        <p:txBody>
-          <a:bodyPr wrap="square" rtlCol="0" anchor="ctr"/>
-          <a:lstStyle/>
-          <a:p>
-            <a:pPr algn="r" indent="0" marL="0">
-              <a:buNone/>
-            </a:pPr>
-            <a:r>
-              <a:rPr lang="en-US" sz="900" dirty="0">
-                <a:solidFill>
-                  <a:srgbClr val="9B9690"/>
+              <a:t>y = 3x + 1 and y = 3x − 5 are parallel (both m = 3).</a:t>
+            </a:r>
+            <a:endParaRPr lang="en-US" sz="1600" dirty="0"/>
+          </a:p>
+          <a:p>
+            <a:pPr marL="342900" indent="-342900">
+              <a:spcAft>
+                <a:spcPts val="800"/>
+              </a:spcAft>
+              <a:buSzPct val="100000"/>
+              <a:buChar char="•"/>
+            </a:pPr>
+            <a:r>
+              <a:rPr lang="en-US" sz="1600" dirty="0">
+                <a:solidFill>
+                  <a:srgbClr val="3D3A36"/>
                 </a:solidFill>
                 <a:latin typeface="Calibri" pitchFamily="34" charset="0"/>
                 <a:ea typeface="Calibri" pitchFamily="34" charset="-122"/>
                 <a:cs typeface="Calibri" pitchFamily="34" charset="-120"/>
               </a:rPr>
-              <a:t>mrzocchi.com</a:t>
-            </a:r>
-            <a:endParaRPr lang="en-US" sz="900" dirty="0"/>
+              <a:t>If two lines have different gradients, they will CROSS somewhere.</a:t>
+            </a:r>
+            <a:endParaRPr lang="en-US" sz="1600" dirty="0"/>
+          </a:p>
+          <a:p>
+            <a:pPr marL="342900" indent="-342900">
+              <a:spcAft>
+                <a:spcPts val="800"/>
+              </a:spcAft>
+              <a:buSzPct val="100000"/>
+              <a:buChar char="•"/>
+            </a:pPr>
+            <a:r>
+              <a:rPr lang="en-US" sz="1600" dirty="0">
+                <a:solidFill>
+                  <a:srgbClr val="3D3A36"/>
+                </a:solidFill>
+                <a:latin typeface="Calibri" pitchFamily="34" charset="0"/>
+                <a:ea typeface="Calibri" pitchFamily="34" charset="-122"/>
+                <a:cs typeface="Calibri" pitchFamily="34" charset="-120"/>
+              </a:rPr>
+              <a:t>The crossing point = the solution to both equations simultaneously.</a:t>
+            </a:r>
+            <a:endParaRPr lang="en-US" sz="1600" dirty="0"/>
+          </a:p>
+          <a:p>
+            <a:pPr marL="342900" indent="-342900">
+              <a:spcAft>
+                <a:spcPts val="800"/>
+              </a:spcAft>
+              <a:buSzPct val="100000"/>
+              <a:buChar char="•"/>
+            </a:pPr>
+            <a:r>
+              <a:rPr lang="en-US" sz="1600" dirty="0">
+                <a:solidFill>
+                  <a:srgbClr val="3D3A36"/>
+                </a:solidFill>
+                <a:latin typeface="Calibri" pitchFamily="34" charset="0"/>
+                <a:ea typeface="Calibri" pitchFamily="34" charset="-122"/>
+                <a:cs typeface="Calibri" pitchFamily="34" charset="-120"/>
+              </a:rPr>
+              <a:t>Nanjing taxi vs Seoul taxi: where the lines cross = the distance where costs are equal.</a:t>
+            </a:r>
+            <a:endParaRPr lang="en-US" sz="1600" dirty="0"/>
           </a:p>
         </p:txBody>
       </p:sp>
@@ -5011,6 +5143,13 @@
 <file path=ppt/slides/slide8.xml><?xml version="1.0" encoding="utf-8"?>
 <p:sld xmlns:a="http://schemas.openxmlformats.org/drawingml/2006/main" xmlns:r="http://schemas.openxmlformats.org/officeDocument/2006/relationships" xmlns:p="http://schemas.openxmlformats.org/presentationml/2006/main">
   <p:cSld name="Slide 8">
+    <p:bg>
+      <p:bgPr>
+        <a:solidFill>
+          <a:srgbClr val="FAF8F5"/>
+        </a:solidFill>
+      </p:bgPr>
+    </p:bg>
     <p:spTree>
       <p:nvGrpSpPr>
         <p:cNvPr id="1" name=""/>
@@ -5034,7 +5173,27 @@
         <p:spPr>
           <a:xfrm>
             <a:off x="0" y="0"/>
-            <a:ext cx="9144000" cy="54864"/>
+            <a:ext cx="9144000" cy="822960"/>
+          </a:xfrm>
+          <a:prstGeom prst="rect">
+            <a:avLst/>
+          </a:prstGeom>
+          <a:solidFill>
+            <a:srgbClr val="FFFFFF"/>
+          </a:solidFill>
+          <a:ln/>
+        </p:spPr>
+      </p:sp>
+      <p:sp>
+        <p:nvSpPr>
+          <p:cNvPr id="3" name="Shape 1"/>
+          <p:cNvSpPr/>
+          <p:nvPr/>
+        </p:nvSpPr>
+        <p:spPr>
+          <a:xfrm>
+            <a:off x="0" y="795528"/>
+            <a:ext cx="9144000" cy="27432"/>
           </a:xfrm>
           <a:prstGeom prst="rect">
             <a:avLst/>
@@ -5047,14 +5206,14 @@
       </p:sp>
       <p:sp>
         <p:nvSpPr>
-          <p:cNvPr id="3" name="Text 1"/>
-          <p:cNvSpPr/>
-          <p:nvPr/>
-        </p:nvSpPr>
-        <p:spPr>
-          <a:xfrm>
-            <a:off x="457200" y="228600"/>
-            <a:ext cx="8229600" cy="548640"/>
+          <p:cNvPr id="4" name="Text 2"/>
+          <p:cNvSpPr/>
+          <p:nvPr/>
+        </p:nvSpPr>
+        <p:spPr>
+          <a:xfrm>
+            <a:off x="640080" y="91440"/>
+            <a:ext cx="7863840" cy="640080"/>
           </a:xfrm>
           <a:prstGeom prst="rect">
             <a:avLst/>
@@ -5070,7 +5229,7 @@
               <a:buNone/>
             </a:pPr>
             <a:r>
-              <a:rPr lang="en-US" sz="2400" b="1" dirty="0">
+              <a:rPr lang="en-US" sz="2200" b="1" dirty="0">
                 <a:solidFill>
                   <a:srgbClr val="1B2A4A"/>
                 </a:solidFill>
@@ -5078,22 +5237,176 @@
                 <a:ea typeface="Georgia" pitchFamily="34" charset="-122"/>
                 <a:cs typeface="Georgia" pitchFamily="34" charset="-120"/>
               </a:rPr>
-              <a:t>Key Vocabulary</a:t>
-            </a:r>
-            <a:endParaRPr lang="en-US" sz="2400" dirty="0"/>
-          </a:p>
-        </p:txBody>
-      </p:sp>
-      <p:sp>
-        <p:nvSpPr>
-          <p:cNvPr id="4" name="Shape 2"/>
-          <p:cNvSpPr/>
-          <p:nvPr/>
-        </p:nvSpPr>
-        <p:spPr>
-          <a:xfrm>
-            <a:off x="457200" y="868680"/>
-            <a:ext cx="1828800" cy="27432"/>
+              <a:t>Interpreting Graphs in Context</a:t>
+            </a:r>
+            <a:endParaRPr lang="en-US" sz="2200" dirty="0"/>
+          </a:p>
+        </p:txBody>
+      </p:sp>
+      <p:sp>
+        <p:nvSpPr>
+          <p:cNvPr id="5" name="Text 3"/>
+          <p:cNvSpPr/>
+          <p:nvPr/>
+        </p:nvSpPr>
+        <p:spPr>
+          <a:xfrm>
+            <a:off x="640080" y="1005840"/>
+            <a:ext cx="7863840" cy="2926080"/>
+          </a:xfrm>
+          <a:prstGeom prst="rect">
+            <a:avLst/>
+          </a:prstGeom>
+          <a:noFill/>
+          <a:ln/>
+        </p:spPr>
+        <p:txBody>
+          <a:bodyPr wrap="square" rtlCol="0" anchor="ctr"/>
+          <a:lstStyle/>
+          <a:p>
+            <a:pPr marL="342900" indent="-342900">
+              <a:spcAft>
+                <a:spcPts val="800"/>
+              </a:spcAft>
+              <a:buSzPct val="100000"/>
+              <a:buChar char="•"/>
+            </a:pPr>
+            <a:r>
+              <a:rPr lang="en-US" sz="1600" dirty="0">
+                <a:solidFill>
+                  <a:srgbClr val="3D3A36"/>
+                </a:solidFill>
+                <a:latin typeface="Calibri" pitchFamily="34" charset="0"/>
+                <a:ea typeface="Calibri" pitchFamily="34" charset="-122"/>
+                <a:cs typeface="Calibri" pitchFamily="34" charset="-120"/>
+              </a:rPr>
+              <a:t>Graph of Nanjing temperature over a year → gradient changes with seasons.</a:t>
+            </a:r>
+            <a:endParaRPr lang="en-US" sz="1600" dirty="0"/>
+          </a:p>
+          <a:p>
+            <a:pPr marL="342900" indent="-342900">
+              <a:spcAft>
+                <a:spcPts val="800"/>
+              </a:spcAft>
+              <a:buSzPct val="100000"/>
+              <a:buChar char="•"/>
+            </a:pPr>
+            <a:r>
+              <a:rPr lang="en-US" sz="1600" dirty="0">
+                <a:solidFill>
+                  <a:srgbClr val="3D3A36"/>
+                </a:solidFill>
+                <a:latin typeface="Calibri" pitchFamily="34" charset="0"/>
+                <a:ea typeface="Calibri" pitchFamily="34" charset="-122"/>
+                <a:cs typeface="Calibri" pitchFamily="34" charset="-120"/>
+              </a:rPr>
+              <a:t>Graph of Korean won vs Chinese yuan exchange rate → gradient = exchange rate.</a:t>
+            </a:r>
+            <a:endParaRPr lang="en-US" sz="1600" dirty="0"/>
+          </a:p>
+          <a:p>
+            <a:pPr marL="342900" indent="-342900">
+              <a:spcAft>
+                <a:spcPts val="800"/>
+              </a:spcAft>
+              <a:buSzPct val="100000"/>
+              <a:buChar char="•"/>
+            </a:pPr>
+            <a:r>
+              <a:rPr lang="en-US" sz="1600" dirty="0">
+                <a:solidFill>
+                  <a:srgbClr val="3D3A36"/>
+                </a:solidFill>
+                <a:latin typeface="Calibri" pitchFamily="34" charset="0"/>
+                <a:ea typeface="Calibri" pitchFamily="34" charset="-122"/>
+                <a:cs typeface="Calibri" pitchFamily="34" charset="-120"/>
+              </a:rPr>
+              <a:t>Graph of Berlin rent vs apartment size → gradient = price per m².</a:t>
+            </a:r>
+            <a:endParaRPr lang="en-US" sz="1600" dirty="0"/>
+          </a:p>
+          <a:p>
+            <a:pPr marL="342900" indent="-342900">
+              <a:spcAft>
+                <a:spcPts val="800"/>
+              </a:spcAft>
+              <a:buSzPct val="100000"/>
+              <a:buChar char="•"/>
+            </a:pPr>
+            <a:r>
+              <a:rPr lang="en-US" sz="1600" dirty="0">
+                <a:solidFill>
+                  <a:srgbClr val="3D3A36"/>
+                </a:solidFill>
+                <a:latin typeface="Calibri" pitchFamily="34" charset="0"/>
+                <a:ea typeface="Calibri" pitchFamily="34" charset="-122"/>
+                <a:cs typeface="Calibri" pitchFamily="34" charset="-120"/>
+              </a:rPr>
+              <a:t>The y-intercept often represents a 'starting cost' or 'base value'.</a:t>
+            </a:r>
+            <a:endParaRPr lang="en-US" sz="1600" dirty="0"/>
+          </a:p>
+          <a:p>
+            <a:pPr marL="342900" indent="-342900">
+              <a:spcAft>
+                <a:spcPts val="800"/>
+              </a:spcAft>
+              <a:buSzPct val="100000"/>
+              <a:buChar char="•"/>
+            </a:pPr>
+            <a:r>
+              <a:rPr lang="en-US" sz="1600" dirty="0">
+                <a:solidFill>
+                  <a:srgbClr val="3D3A36"/>
+                </a:solidFill>
+                <a:latin typeface="Calibri" pitchFamily="34" charset="0"/>
+                <a:ea typeface="Calibri" pitchFamily="34" charset="-122"/>
+                <a:cs typeface="Calibri" pitchFamily="34" charset="-120"/>
+              </a:rPr>
+              <a:t>The gradient tells you the 'rate of change'.</a:t>
+            </a:r>
+            <a:endParaRPr lang="en-US" sz="1600" dirty="0"/>
+          </a:p>
+        </p:txBody>
+      </p:sp>
+      <p:sp>
+        <p:nvSpPr>
+          <p:cNvPr id="6" name="Shape 4"/>
+          <p:cNvSpPr/>
+          <p:nvPr/>
+        </p:nvSpPr>
+        <p:spPr>
+          <a:xfrm>
+            <a:off x="640080" y="4114800"/>
+            <a:ext cx="7863840" cy="731520"/>
+          </a:xfrm>
+          <a:prstGeom prst="rect">
+            <a:avLst/>
+          </a:prstGeom>
+          <a:solidFill>
+            <a:srgbClr val="E8F5F3"/>
+          </a:solidFill>
+          <a:ln/>
+          <a:effectLst>
+            <a:outerShdw sx="100000" sy="100000" kx="0" ky="0" algn="bl" rotWithShape="0" blurRad="76200" dist="25400" dir="8100000">
+              <a:srgbClr val="000000">
+                <a:alpha val="12000"/>
+              </a:srgbClr>
+            </a:outerShdw>
+          </a:effectLst>
+        </p:spPr>
+      </p:sp>
+      <p:sp>
+        <p:nvSpPr>
+          <p:cNvPr id="7" name="Shape 5"/>
+          <p:cNvSpPr/>
+          <p:nvPr/>
+        </p:nvSpPr>
+        <p:spPr>
+          <a:xfrm>
+            <a:off x="640080" y="4114800"/>
+            <a:ext cx="64008" cy="731520"/>
           </a:xfrm>
           <a:prstGeom prst="rect">
             <a:avLst/>
@@ -5106,14 +5419,14 @@
       </p:sp>
       <p:sp>
         <p:nvSpPr>
-          <p:cNvPr id="5" name="Text 3"/>
-          <p:cNvSpPr/>
-          <p:nvPr/>
-        </p:nvSpPr>
-        <p:spPr>
-          <a:xfrm>
-            <a:off x="457200" y="1188720"/>
-            <a:ext cx="8229600" cy="548640"/>
+          <p:cNvPr id="8" name="Text 6"/>
+          <p:cNvSpPr/>
+          <p:nvPr/>
+        </p:nvSpPr>
+        <p:spPr>
+          <a:xfrm>
+            <a:off x="914400" y="4160520"/>
+            <a:ext cx="7406640" cy="640080"/>
           </a:xfrm>
           <a:prstGeom prst="rect">
             <a:avLst/>
@@ -5129,137 +5442,17 @@
               <a:buNone/>
             </a:pPr>
             <a:r>
-              <a:rPr lang="en-US" sz="2800" b="1" dirty="0">
-                <a:solidFill>
-                  <a:srgbClr val="C8372D"/>
-                </a:solidFill>
-                <a:latin typeface="Georgia" pitchFamily="34" charset="0"/>
-                <a:ea typeface="Georgia" pitchFamily="34" charset="-122"/>
-                <a:cs typeface="Georgia" pitchFamily="34" charset="-120"/>
-              </a:rPr>
-              <a:t>Like Terms</a:t>
-            </a:r>
-            <a:endParaRPr lang="en-US" sz="2800" dirty="0"/>
-          </a:p>
-        </p:txBody>
-      </p:sp>
-      <p:sp>
-        <p:nvSpPr>
-          <p:cNvPr id="6" name="Text 4"/>
-          <p:cNvSpPr/>
-          <p:nvPr/>
-        </p:nvSpPr>
-        <p:spPr>
-          <a:xfrm>
-            <a:off x="457200" y="1691640"/>
-            <a:ext cx="8229600" cy="365760"/>
-          </a:xfrm>
-          <a:prstGeom prst="rect">
-            <a:avLst/>
-          </a:prstGeom>
-          <a:noFill/>
-          <a:ln/>
-        </p:spPr>
-        <p:txBody>
-          <a:bodyPr wrap="square" rtlCol="0" anchor="ctr"/>
-          <a:lstStyle/>
-          <a:p>
-            <a:pPr indent="0" marL="0">
-              <a:buNone/>
-            </a:pPr>
-            <a:r>
-              <a:rPr lang="en-US" sz="1600" i="1" dirty="0">
-                <a:solidFill>
-                  <a:srgbClr val="9B9690"/>
+              <a:rPr lang="en-US" sz="1300" i="1" dirty="0">
+                <a:solidFill>
+                  <a:srgbClr val="3D3A36"/>
                 </a:solidFill>
                 <a:latin typeface="Calibri" pitchFamily="34" charset="0"/>
                 <a:ea typeface="Calibri" pitchFamily="34" charset="-122"/>
                 <a:cs typeface="Calibri" pitchFamily="34" charset="-120"/>
               </a:rPr>
-              <a:t>同类项</a:t>
-            </a:r>
-            <a:endParaRPr lang="en-US" sz="1600" dirty="0"/>
-          </a:p>
-        </p:txBody>
-      </p:sp>
-      <p:sp>
-        <p:nvSpPr>
-          <p:cNvPr id="7" name="Text 5"/>
-          <p:cNvSpPr/>
-          <p:nvPr/>
-        </p:nvSpPr>
-        <p:spPr>
-          <a:xfrm>
-            <a:off x="457200" y="2194560"/>
-            <a:ext cx="8229600" cy="1828800"/>
-          </a:xfrm>
-          <a:prstGeom prst="rect">
-            <a:avLst/>
-          </a:prstGeom>
-          <a:noFill/>
-          <a:ln/>
-        </p:spPr>
-        <p:txBody>
-          <a:bodyPr wrap="square" rtlCol="0" anchor="ctr"/>
-          <a:lstStyle/>
-          <a:p>
-            <a:pPr indent="0" marL="0">
-              <a:lnSpc>
-                <a:spcPct val="150000"/>
-              </a:lnSpc>
-              <a:buNone/>
-            </a:pPr>
-            <a:r>
-              <a:rPr lang="en-US" sz="1800" dirty="0">
-                <a:solidFill>
-                  <a:srgbClr val="6B6660"/>
-                </a:solidFill>
-                <a:latin typeface="Calibri" pitchFamily="34" charset="0"/>
-                <a:ea typeface="Calibri" pitchFamily="34" charset="-122"/>
-                <a:cs typeface="Calibri" pitchFamily="34" charset="-120"/>
-              </a:rPr>
-              <a:t>Terms with the same variable and power. 5x and 3x are like terms. 5x and 5x² are not.</a:t>
-            </a:r>
-            <a:endParaRPr lang="en-US" sz="1800" dirty="0"/>
-          </a:p>
-        </p:txBody>
-      </p:sp>
-      <p:sp>
-        <p:nvSpPr>
-          <p:cNvPr id="8" name="Text 6"/>
-          <p:cNvSpPr/>
-          <p:nvPr/>
-        </p:nvSpPr>
-        <p:spPr>
-          <a:xfrm>
-            <a:off x="7315200" y="4754880"/>
-            <a:ext cx="1828800" cy="274320"/>
-          </a:xfrm>
-          <a:prstGeom prst="rect">
-            <a:avLst/>
-          </a:prstGeom>
-          <a:noFill/>
-          <a:ln/>
-        </p:spPr>
-        <p:txBody>
-          <a:bodyPr wrap="square" rtlCol="0" anchor="ctr"/>
-          <a:lstStyle/>
-          <a:p>
-            <a:pPr algn="r" indent="0" marL="0">
-              <a:buNone/>
-            </a:pPr>
-            <a:r>
-              <a:rPr lang="en-US" sz="900" dirty="0">
-                <a:solidFill>
-                  <a:srgbClr val="9B9690"/>
-                </a:solidFill>
-                <a:latin typeface="Calibri" pitchFamily="34" charset="0"/>
-                <a:ea typeface="Calibri" pitchFamily="34" charset="-122"/>
-                <a:cs typeface="Calibri" pitchFamily="34" charset="-120"/>
-              </a:rPr>
-              <a:t>mrzocchi.com</a:t>
-            </a:r>
-            <a:endParaRPr lang="en-US" sz="900" dirty="0"/>
+              <a:t>Every straight-line graph tells a story. Learn to read it.</a:t>
+            </a:r>
+            <a:endParaRPr lang="en-US" sz="1300" dirty="0"/>
           </a:p>
         </p:txBody>
       </p:sp>
@@ -5274,6 +5467,13 @@
 <file path=ppt/slides/slide9.xml><?xml version="1.0" encoding="utf-8"?>
 <p:sld xmlns:a="http://schemas.openxmlformats.org/drawingml/2006/main" xmlns:r="http://schemas.openxmlformats.org/officeDocument/2006/relationships" xmlns:p="http://schemas.openxmlformats.org/presentationml/2006/main">
   <p:cSld name="Slide 9">
+    <p:bg>
+      <p:bgPr>
+        <a:solidFill>
+          <a:srgbClr val="FAF8F5"/>
+        </a:solidFill>
+      </p:bgPr>
+    </p:bg>
     <p:spTree>
       <p:nvGrpSpPr>
         <p:cNvPr id="1" name=""/>
@@ -5297,7 +5497,27 @@
         <p:spPr>
           <a:xfrm>
             <a:off x="0" y="0"/>
-            <a:ext cx="9144000" cy="54864"/>
+            <a:ext cx="9144000" cy="822960"/>
+          </a:xfrm>
+          <a:prstGeom prst="rect">
+            <a:avLst/>
+          </a:prstGeom>
+          <a:solidFill>
+            <a:srgbClr val="FFFFFF"/>
+          </a:solidFill>
+          <a:ln/>
+        </p:spPr>
+      </p:sp>
+      <p:sp>
+        <p:nvSpPr>
+          <p:cNvPr id="3" name="Shape 1"/>
+          <p:cNvSpPr/>
+          <p:nvPr/>
+        </p:nvSpPr>
+        <p:spPr>
+          <a:xfrm>
+            <a:off x="0" y="795528"/>
+            <a:ext cx="9144000" cy="27432"/>
           </a:xfrm>
           <a:prstGeom prst="rect">
             <a:avLst/>
@@ -5310,14 +5530,14 @@
       </p:sp>
       <p:sp>
         <p:nvSpPr>
-          <p:cNvPr id="3" name="Text 1"/>
-          <p:cNvSpPr/>
-          <p:nvPr/>
-        </p:nvSpPr>
-        <p:spPr>
-          <a:xfrm>
-            <a:off x="457200" y="228600"/>
-            <a:ext cx="8229600" cy="548640"/>
+          <p:cNvPr id="4" name="Text 2"/>
+          <p:cNvSpPr/>
+          <p:nvPr/>
+        </p:nvSpPr>
+        <p:spPr>
+          <a:xfrm>
+            <a:off x="640080" y="91440"/>
+            <a:ext cx="7863840" cy="640080"/>
           </a:xfrm>
           <a:prstGeom prst="rect">
             <a:avLst/>
@@ -5333,7 +5553,7 @@
               <a:buNone/>
             </a:pPr>
             <a:r>
-              <a:rPr lang="en-US" sz="2400" b="1" dirty="0">
+              <a:rPr lang="en-US" sz="2200" b="1" dirty="0">
                 <a:solidFill>
                   <a:srgbClr val="1B2A4A"/>
                 </a:solidFill>
@@ -5341,22 +5561,88 @@
                 <a:ea typeface="Georgia" pitchFamily="34" charset="-122"/>
                 <a:cs typeface="Georgia" pitchFamily="34" charset="-120"/>
               </a:rPr>
-              <a:t>Check Your Understanding</a:t>
-            </a:r>
-            <a:endParaRPr lang="en-US" sz="2400" dirty="0"/>
-          </a:p>
-        </p:txBody>
-      </p:sp>
-      <p:sp>
-        <p:nvSpPr>
-          <p:cNvPr id="4" name="Shape 2"/>
-          <p:cNvSpPr/>
-          <p:nvPr/>
-        </p:nvSpPr>
-        <p:spPr>
-          <a:xfrm>
-            <a:off x="457200" y="868680"/>
-            <a:ext cx="1828800" cy="27432"/>
+              <a:t>Recommended Videos</a:t>
+            </a:r>
+            <a:endParaRPr lang="en-US" sz="2200" dirty="0"/>
+          </a:p>
+        </p:txBody>
+      </p:sp>
+      <p:sp>
+        <p:nvSpPr>
+          <p:cNvPr id="5" name="Text 3"/>
+          <p:cNvSpPr/>
+          <p:nvPr/>
+        </p:nvSpPr>
+        <p:spPr>
+          <a:xfrm>
+            <a:off x="640080" y="868680"/>
+            <a:ext cx="7863840" cy="274320"/>
+          </a:xfrm>
+          <a:prstGeom prst="rect">
+            <a:avLst/>
+          </a:prstGeom>
+          <a:noFill/>
+          <a:ln/>
+        </p:spPr>
+        <p:txBody>
+          <a:bodyPr wrap="square" rtlCol="0" anchor="ctr"/>
+          <a:lstStyle/>
+          <a:p>
+            <a:pPr indent="0" marL="0">
+              <a:buNone/>
+            </a:pPr>
+            <a:r>
+              <a:rPr lang="en-US" sz="1200" i="1" dirty="0">
+                <a:solidFill>
+                  <a:srgbClr val="6B6660"/>
+                </a:solidFill>
+                <a:latin typeface="Calibri" pitchFamily="34" charset="0"/>
+                <a:ea typeface="Calibri" pitchFamily="34" charset="-122"/>
+                <a:cs typeface="Calibri" pitchFamily="34" charset="-120"/>
+              </a:rPr>
+              <a:t>Search these on YouTube to learn more.</a:t>
+            </a:r>
+            <a:endParaRPr lang="en-US" sz="1200" dirty="0"/>
+          </a:p>
+        </p:txBody>
+      </p:sp>
+      <p:sp>
+        <p:nvSpPr>
+          <p:cNvPr id="6" name="Shape 4"/>
+          <p:cNvSpPr/>
+          <p:nvPr/>
+        </p:nvSpPr>
+        <p:spPr>
+          <a:xfrm>
+            <a:off x="457200" y="1234440"/>
+            <a:ext cx="8229600" cy="841248"/>
+          </a:xfrm>
+          <a:prstGeom prst="rect">
+            <a:avLst/>
+          </a:prstGeom>
+          <a:solidFill>
+            <a:srgbClr val="FFFFFF"/>
+          </a:solidFill>
+          <a:ln/>
+          <a:effectLst>
+            <a:outerShdw sx="100000" sy="100000" kx="0" ky="0" algn="bl" rotWithShape="0" blurRad="76200" dist="25400" dir="8100000">
+              <a:srgbClr val="000000">
+                <a:alpha val="12000"/>
+              </a:srgbClr>
+            </a:outerShdw>
+          </a:effectLst>
+        </p:spPr>
+      </p:sp>
+      <p:sp>
+        <p:nvSpPr>
+          <p:cNvPr id="7" name="Shape 5"/>
+          <p:cNvSpPr/>
+          <p:nvPr/>
+        </p:nvSpPr>
+        <p:spPr>
+          <a:xfrm>
+            <a:off x="457200" y="1234440"/>
+            <a:ext cx="64008" cy="841248"/>
           </a:xfrm>
           <a:prstGeom prst="rect">
             <a:avLst/>
@@ -5369,41 +5655,14 @@
       </p:sp>
       <p:sp>
         <p:nvSpPr>
-          <p:cNvPr id="5" name="Shape 3"/>
-          <p:cNvSpPr/>
-          <p:nvPr/>
-        </p:nvSpPr>
-        <p:spPr>
-          <a:xfrm>
-            <a:off x="457200" y="1188720"/>
-            <a:ext cx="8229600" cy="1371600"/>
-          </a:xfrm>
-          <a:prstGeom prst="roundRect">
-            <a:avLst>
-              <a:gd name="adj" fmla="val 10000"/>
-            </a:avLst>
-          </a:prstGeom>
-          <a:solidFill>
-            <a:srgbClr val="FAF8F5"/>
-          </a:solidFill>
-          <a:ln w="12700">
-            <a:solidFill>
-              <a:srgbClr val="E5E2DC"/>
-            </a:solidFill>
-            <a:prstDash val="solid"/>
-          </a:ln>
-        </p:spPr>
-      </p:sp>
-      <p:sp>
-        <p:nvSpPr>
-          <p:cNvPr id="6" name="Text 4"/>
-          <p:cNvSpPr/>
-          <p:nvPr/>
-        </p:nvSpPr>
-        <p:spPr>
-          <a:xfrm>
-            <a:off x="731520" y="1188720"/>
-            <a:ext cx="7680960" cy="1371600"/>
+          <p:cNvPr id="8" name="Text 6"/>
+          <p:cNvSpPr/>
+          <p:nvPr/>
+        </p:nvSpPr>
+        <p:spPr>
+          <a:xfrm>
+            <a:off x="640080" y="1325880"/>
+            <a:ext cx="457200" cy="457200"/>
           </a:xfrm>
           <a:prstGeom prst="rect">
             <a:avLst/>
@@ -5415,56 +5674,139 @@
           <a:bodyPr wrap="square" rtlCol="0" anchor="ctr"/>
           <a:lstStyle/>
           <a:p>
+            <a:pPr algn="ctr" indent="0" marL="0">
+              <a:buNone/>
+            </a:pPr>
+            <a:r>
+              <a:rPr lang="en-US" sz="2000" dirty="0">
+                <a:solidFill>
+                  <a:srgbClr val="C8372D"/>
+                </a:solidFill>
+                <a:latin typeface="Calibri" pitchFamily="34" charset="0"/>
+                <a:ea typeface="Calibri" pitchFamily="34" charset="-122"/>
+                <a:cs typeface="Calibri" pitchFamily="34" charset="-120"/>
+              </a:rPr>
+              <a:t>▶</a:t>
+            </a:r>
+            <a:endParaRPr lang="en-US" sz="2000" dirty="0"/>
+          </a:p>
+        </p:txBody>
+      </p:sp>
+      <p:sp>
+        <p:nvSpPr>
+          <p:cNvPr id="9" name="Text 7"/>
+          <p:cNvSpPr/>
+          <p:nvPr/>
+        </p:nvSpPr>
+        <p:spPr>
+          <a:xfrm>
+            <a:off x="1188720" y="1307592"/>
+            <a:ext cx="7132320" cy="411480"/>
+          </a:xfrm>
+          <a:prstGeom prst="rect">
+            <a:avLst/>
+          </a:prstGeom>
+          <a:noFill/>
+          <a:ln/>
+        </p:spPr>
+        <p:txBody>
+          <a:bodyPr wrap="square" rtlCol="0" anchor="ctr"/>
+          <a:lstStyle/>
+          <a:p>
             <a:pPr indent="0" marL="0">
               <a:buNone/>
             </a:pPr>
             <a:r>
-              <a:rPr lang="en-US" sz="1800" b="1" dirty="0">
+              <a:rPr lang="en-US" sz="1400" b="1" dirty="0">
                 <a:solidFill>
                   <a:srgbClr val="1B2A4A"/>
                 </a:solidFill>
-                <a:latin typeface="Georgia" pitchFamily="34" charset="0"/>
-                <a:ea typeface="Georgia" pitchFamily="34" charset="-122"/>
-                <a:cs typeface="Georgia" pitchFamily="34" charset="-120"/>
-              </a:rPr>
-              <a:t>❓  Expand: 4(2x + 3)</a:t>
-            </a:r>
-            <a:endParaRPr lang="en-US" sz="1800" dirty="0"/>
-          </a:p>
-        </p:txBody>
-      </p:sp>
-      <p:sp>
-        <p:nvSpPr>
-          <p:cNvPr id="7" name="Shape 5"/>
-          <p:cNvSpPr/>
-          <p:nvPr/>
-        </p:nvSpPr>
-        <p:spPr>
-          <a:xfrm>
-            <a:off x="457200" y="2926080"/>
-            <a:ext cx="8229600" cy="1463040"/>
-          </a:xfrm>
-          <a:prstGeom prst="roundRect">
-            <a:avLst>
-              <a:gd name="adj" fmla="val 9375"/>
-            </a:avLst>
+                <a:latin typeface="Calibri" pitchFamily="34" charset="0"/>
+                <a:ea typeface="Calibri" pitchFamily="34" charset="-122"/>
+                <a:cs typeface="Calibri" pitchFamily="34" charset="-120"/>
+              </a:rPr>
+              <a:t>Plotting y = mx + c</a:t>
+            </a:r>
+            <a:endParaRPr lang="en-US" sz="1400" dirty="0"/>
+          </a:p>
+        </p:txBody>
+      </p:sp>
+      <p:sp>
+        <p:nvSpPr>
+          <p:cNvPr id="10" name="Text 8"/>
+          <p:cNvSpPr/>
+          <p:nvPr/>
+        </p:nvSpPr>
+        <p:spPr>
+          <a:xfrm>
+            <a:off x="1188720" y="1691640"/>
+            <a:ext cx="7132320" cy="320040"/>
+          </a:xfrm>
+          <a:prstGeom prst="rect">
+            <a:avLst/>
+          </a:prstGeom>
+          <a:noFill/>
+          <a:ln/>
+        </p:spPr>
+        <p:txBody>
+          <a:bodyPr wrap="square" rtlCol="0" anchor="ctr"/>
+          <a:lstStyle/>
+          <a:p>
+            <a:pPr indent="0" marL="0">
+              <a:buNone/>
+            </a:pPr>
+            <a:r>
+              <a:rPr lang="en-US" sz="1100" dirty="0">
+                <a:solidFill>
+                  <a:srgbClr val="6B6660"/>
+                </a:solidFill>
+                <a:latin typeface="Calibri" pitchFamily="34" charset="0"/>
+                <a:ea typeface="Calibri" pitchFamily="34" charset="-122"/>
+                <a:cs typeface="Calibri" pitchFamily="34" charset="-120"/>
+              </a:rPr>
+              <a:t>Corbettmaths  •  7 min</a:t>
+            </a:r>
+            <a:endParaRPr lang="en-US" sz="1100" dirty="0"/>
+          </a:p>
+        </p:txBody>
+      </p:sp>
+      <p:sp>
+        <p:nvSpPr>
+          <p:cNvPr id="11" name="Shape 9"/>
+          <p:cNvSpPr/>
+          <p:nvPr/>
+        </p:nvSpPr>
+        <p:spPr>
+          <a:xfrm>
+            <a:off x="457200" y="2212848"/>
+            <a:ext cx="8229600" cy="841248"/>
+          </a:xfrm>
+          <a:prstGeom prst="rect">
+            <a:avLst/>
           </a:prstGeom>
           <a:solidFill>
-            <a:srgbClr val="E8F5F3"/>
+            <a:srgbClr val="FFFFFF"/>
           </a:solidFill>
           <a:ln/>
-        </p:spPr>
-      </p:sp>
-      <p:sp>
-        <p:nvSpPr>
-          <p:cNvPr id="8" name="Shape 6"/>
-          <p:cNvSpPr/>
-          <p:nvPr/>
-        </p:nvSpPr>
-        <p:spPr>
-          <a:xfrm>
-            <a:off x="457200" y="2926080"/>
-            <a:ext cx="54864" cy="1463040"/>
+          <a:effectLst>
+            <a:outerShdw sx="100000" sy="100000" kx="0" ky="0" algn="bl" rotWithShape="0" blurRad="76200" dist="25400" dir="8100000">
+              <a:srgbClr val="000000">
+                <a:alpha val="12000"/>
+              </a:srgbClr>
+            </a:outerShdw>
+          </a:effectLst>
+        </p:spPr>
+      </p:sp>
+      <p:sp>
+        <p:nvSpPr>
+          <p:cNvPr id="12" name="Shape 10"/>
+          <p:cNvSpPr/>
+          <p:nvPr/>
+        </p:nvSpPr>
+        <p:spPr>
+          <a:xfrm>
+            <a:off x="457200" y="2212848"/>
+            <a:ext cx="64008" cy="841248"/>
           </a:xfrm>
           <a:prstGeom prst="rect">
             <a:avLst/>
@@ -5477,14 +5819,14 @@
       </p:sp>
       <p:sp>
         <p:nvSpPr>
-          <p:cNvPr id="9" name="Text 7"/>
-          <p:cNvSpPr/>
-          <p:nvPr/>
-        </p:nvSpPr>
-        <p:spPr>
-          <a:xfrm>
-            <a:off x="731520" y="2926080"/>
-            <a:ext cx="7680960" cy="1463040"/>
+          <p:cNvPr id="13" name="Text 11"/>
+          <p:cNvSpPr/>
+          <p:nvPr/>
+        </p:nvSpPr>
+        <p:spPr>
+          <a:xfrm>
+            <a:off x="640080" y="2304288"/>
+            <a:ext cx="457200" cy="457200"/>
           </a:xfrm>
           <a:prstGeom prst="rect">
             <a:avLst/>
@@ -5496,37 +5838,34 @@
           <a:bodyPr wrap="square" rtlCol="0" anchor="ctr"/>
           <a:lstStyle/>
           <a:p>
-            <a:pPr indent="0" marL="0">
-              <a:lnSpc>
-                <a:spcPct val="140000"/>
-              </a:lnSpc>
+            <a:pPr algn="ctr" indent="0" marL="0">
               <a:buNone/>
             </a:pPr>
             <a:r>
-              <a:rPr lang="en-US" sz="1600" dirty="0">
-                <a:solidFill>
-                  <a:srgbClr val="3D3A36"/>
+              <a:rPr lang="en-US" sz="2000" dirty="0">
+                <a:solidFill>
+                  <a:srgbClr val="C8372D"/>
                 </a:solidFill>
                 <a:latin typeface="Calibri" pitchFamily="34" charset="0"/>
                 <a:ea typeface="Calibri" pitchFamily="34" charset="-122"/>
                 <a:cs typeface="Calibri" pitchFamily="34" charset="-120"/>
               </a:rPr>
-              <a:t>8x + 12 — multiply each term inside by 4.</a:t>
-            </a:r>
-            <a:endParaRPr lang="en-US" sz="1600" dirty="0"/>
-          </a:p>
-        </p:txBody>
-      </p:sp>
-      <p:sp>
-        <p:nvSpPr>
-          <p:cNvPr id="10" name="Text 8"/>
-          <p:cNvSpPr/>
-          <p:nvPr/>
-        </p:nvSpPr>
-        <p:spPr>
-          <a:xfrm>
-            <a:off x="7315200" y="4754880"/>
-            <a:ext cx="1828800" cy="274320"/>
+              <a:t>▶</a:t>
+            </a:r>
+            <a:endParaRPr lang="en-US" sz="2000" dirty="0"/>
+          </a:p>
+        </p:txBody>
+      </p:sp>
+      <p:sp>
+        <p:nvSpPr>
+          <p:cNvPr id="14" name="Text 12"/>
+          <p:cNvSpPr/>
+          <p:nvPr/>
+        </p:nvSpPr>
+        <p:spPr>
+          <a:xfrm>
+            <a:off x="1188720" y="2286000"/>
+            <a:ext cx="7132320" cy="411480"/>
           </a:xfrm>
           <a:prstGeom prst="rect">
             <a:avLst/>
@@ -5538,21 +5877,388 @@
           <a:bodyPr wrap="square" rtlCol="0" anchor="ctr"/>
           <a:lstStyle/>
           <a:p>
-            <a:pPr algn="r" indent="0" marL="0">
+            <a:pPr indent="0" marL="0">
               <a:buNone/>
             </a:pPr>
             <a:r>
-              <a:rPr lang="en-US" sz="900" dirty="0">
-                <a:solidFill>
-                  <a:srgbClr val="9B9690"/>
+              <a:rPr lang="en-US" sz="1400" b="1" dirty="0">
+                <a:solidFill>
+                  <a:srgbClr val="1B2A4A"/>
                 </a:solidFill>
                 <a:latin typeface="Calibri" pitchFamily="34" charset="0"/>
                 <a:ea typeface="Calibri" pitchFamily="34" charset="-122"/>
                 <a:cs typeface="Calibri" pitchFamily="34" charset="-120"/>
               </a:rPr>
-              <a:t>mrzocchi.com</a:t>
-            </a:r>
-            <a:endParaRPr lang="en-US" sz="900" dirty="0"/>
+              <a:t>Equation of a Straight Line</a:t>
+            </a:r>
+            <a:endParaRPr lang="en-US" sz="1400" dirty="0"/>
+          </a:p>
+        </p:txBody>
+      </p:sp>
+      <p:sp>
+        <p:nvSpPr>
+          <p:cNvPr id="15" name="Text 13"/>
+          <p:cNvSpPr/>
+          <p:nvPr/>
+        </p:nvSpPr>
+        <p:spPr>
+          <a:xfrm>
+            <a:off x="1188720" y="2670048"/>
+            <a:ext cx="7132320" cy="320040"/>
+          </a:xfrm>
+          <a:prstGeom prst="rect">
+            <a:avLst/>
+          </a:prstGeom>
+          <a:noFill/>
+          <a:ln/>
+        </p:spPr>
+        <p:txBody>
+          <a:bodyPr wrap="square" rtlCol="0" anchor="ctr"/>
+          <a:lstStyle/>
+          <a:p>
+            <a:pPr indent="0" marL="0">
+              <a:buNone/>
+            </a:pPr>
+            <a:r>
+              <a:rPr lang="en-US" sz="1100" dirty="0">
+                <a:solidFill>
+                  <a:srgbClr val="6B6660"/>
+                </a:solidFill>
+                <a:latin typeface="Calibri" pitchFamily="34" charset="0"/>
+                <a:ea typeface="Calibri" pitchFamily="34" charset="-122"/>
+                <a:cs typeface="Calibri" pitchFamily="34" charset="-120"/>
+              </a:rPr>
+              <a:t>Cognito  •  6 min</a:t>
+            </a:r>
+            <a:endParaRPr lang="en-US" sz="1100" dirty="0"/>
+          </a:p>
+        </p:txBody>
+      </p:sp>
+      <p:sp>
+        <p:nvSpPr>
+          <p:cNvPr id="16" name="Shape 14"/>
+          <p:cNvSpPr/>
+          <p:nvPr/>
+        </p:nvSpPr>
+        <p:spPr>
+          <a:xfrm>
+            <a:off x="457200" y="3191256"/>
+            <a:ext cx="8229600" cy="841248"/>
+          </a:xfrm>
+          <a:prstGeom prst="rect">
+            <a:avLst/>
+          </a:prstGeom>
+          <a:solidFill>
+            <a:srgbClr val="FFFFFF"/>
+          </a:solidFill>
+          <a:ln/>
+          <a:effectLst>
+            <a:outerShdw sx="100000" sy="100000" kx="0" ky="0" algn="bl" rotWithShape="0" blurRad="76200" dist="25400" dir="8100000">
+              <a:srgbClr val="000000">
+                <a:alpha val="12000"/>
+              </a:srgbClr>
+            </a:outerShdw>
+          </a:effectLst>
+        </p:spPr>
+      </p:sp>
+      <p:sp>
+        <p:nvSpPr>
+          <p:cNvPr id="17" name="Shape 15"/>
+          <p:cNvSpPr/>
+          <p:nvPr/>
+        </p:nvSpPr>
+        <p:spPr>
+          <a:xfrm>
+            <a:off x="457200" y="3191256"/>
+            <a:ext cx="64008" cy="841248"/>
+          </a:xfrm>
+          <a:prstGeom prst="rect">
+            <a:avLst/>
+          </a:prstGeom>
+          <a:solidFill>
+            <a:srgbClr val="C8372D"/>
+          </a:solidFill>
+          <a:ln/>
+        </p:spPr>
+      </p:sp>
+      <p:sp>
+        <p:nvSpPr>
+          <p:cNvPr id="18" name="Text 16"/>
+          <p:cNvSpPr/>
+          <p:nvPr/>
+        </p:nvSpPr>
+        <p:spPr>
+          <a:xfrm>
+            <a:off x="640080" y="3282696"/>
+            <a:ext cx="457200" cy="457200"/>
+          </a:xfrm>
+          <a:prstGeom prst="rect">
+            <a:avLst/>
+          </a:prstGeom>
+          <a:noFill/>
+          <a:ln/>
+        </p:spPr>
+        <p:txBody>
+          <a:bodyPr wrap="square" rtlCol="0" anchor="ctr"/>
+          <a:lstStyle/>
+          <a:p>
+            <a:pPr algn="ctr" indent="0" marL="0">
+              <a:buNone/>
+            </a:pPr>
+            <a:r>
+              <a:rPr lang="en-US" sz="2000" dirty="0">
+                <a:solidFill>
+                  <a:srgbClr val="C8372D"/>
+                </a:solidFill>
+                <a:latin typeface="Calibri" pitchFamily="34" charset="0"/>
+                <a:ea typeface="Calibri" pitchFamily="34" charset="-122"/>
+                <a:cs typeface="Calibri" pitchFamily="34" charset="-120"/>
+              </a:rPr>
+              <a:t>▶</a:t>
+            </a:r>
+            <a:endParaRPr lang="en-US" sz="2000" dirty="0"/>
+          </a:p>
+        </p:txBody>
+      </p:sp>
+      <p:sp>
+        <p:nvSpPr>
+          <p:cNvPr id="19" name="Text 17"/>
+          <p:cNvSpPr/>
+          <p:nvPr/>
+        </p:nvSpPr>
+        <p:spPr>
+          <a:xfrm>
+            <a:off x="1188720" y="3264408"/>
+            <a:ext cx="7132320" cy="411480"/>
+          </a:xfrm>
+          <a:prstGeom prst="rect">
+            <a:avLst/>
+          </a:prstGeom>
+          <a:noFill/>
+          <a:ln/>
+        </p:spPr>
+        <p:txBody>
+          <a:bodyPr wrap="square" rtlCol="0" anchor="ctr"/>
+          <a:lstStyle/>
+          <a:p>
+            <a:pPr indent="0" marL="0">
+              <a:buNone/>
+            </a:pPr>
+            <a:r>
+              <a:rPr lang="en-US" sz="1400" b="1" dirty="0">
+                <a:solidFill>
+                  <a:srgbClr val="1B2A4A"/>
+                </a:solidFill>
+                <a:latin typeface="Calibri" pitchFamily="34" charset="0"/>
+                <a:ea typeface="Calibri" pitchFamily="34" charset="-122"/>
+                <a:cs typeface="Calibri" pitchFamily="34" charset="-120"/>
+              </a:rPr>
+              <a:t>Linear Graphs — Gradient &amp; Intercept</a:t>
+            </a:r>
+            <a:endParaRPr lang="en-US" sz="1400" dirty="0"/>
+          </a:p>
+        </p:txBody>
+      </p:sp>
+      <p:sp>
+        <p:nvSpPr>
+          <p:cNvPr id="20" name="Text 18"/>
+          <p:cNvSpPr/>
+          <p:nvPr/>
+        </p:nvSpPr>
+        <p:spPr>
+          <a:xfrm>
+            <a:off x="1188720" y="3648456"/>
+            <a:ext cx="7132320" cy="320040"/>
+          </a:xfrm>
+          <a:prstGeom prst="rect">
+            <a:avLst/>
+          </a:prstGeom>
+          <a:noFill/>
+          <a:ln/>
+        </p:spPr>
+        <p:txBody>
+          <a:bodyPr wrap="square" rtlCol="0" anchor="ctr"/>
+          <a:lstStyle/>
+          <a:p>
+            <a:pPr indent="0" marL="0">
+              <a:buNone/>
+            </a:pPr>
+            <a:r>
+              <a:rPr lang="en-US" sz="1100" dirty="0">
+                <a:solidFill>
+                  <a:srgbClr val="6B6660"/>
+                </a:solidFill>
+                <a:latin typeface="Calibri" pitchFamily="34" charset="0"/>
+                <a:ea typeface="Calibri" pitchFamily="34" charset="-122"/>
+                <a:cs typeface="Calibri" pitchFamily="34" charset="-120"/>
+              </a:rPr>
+              <a:t>Cognito  •  5 min</a:t>
+            </a:r>
+            <a:endParaRPr lang="en-US" sz="1100" dirty="0"/>
+          </a:p>
+        </p:txBody>
+      </p:sp>
+      <p:sp>
+        <p:nvSpPr>
+          <p:cNvPr id="21" name="Shape 19"/>
+          <p:cNvSpPr/>
+          <p:nvPr/>
+        </p:nvSpPr>
+        <p:spPr>
+          <a:xfrm>
+            <a:off x="457200" y="4169664"/>
+            <a:ext cx="8229600" cy="841248"/>
+          </a:xfrm>
+          <a:prstGeom prst="rect">
+            <a:avLst/>
+          </a:prstGeom>
+          <a:solidFill>
+            <a:srgbClr val="FFFFFF"/>
+          </a:solidFill>
+          <a:ln/>
+          <a:effectLst>
+            <a:outerShdw sx="100000" sy="100000" kx="0" ky="0" algn="bl" rotWithShape="0" blurRad="76200" dist="25400" dir="8100000">
+              <a:srgbClr val="000000">
+                <a:alpha val="12000"/>
+              </a:srgbClr>
+            </a:outerShdw>
+          </a:effectLst>
+        </p:spPr>
+      </p:sp>
+      <p:sp>
+        <p:nvSpPr>
+          <p:cNvPr id="22" name="Shape 20"/>
+          <p:cNvSpPr/>
+          <p:nvPr/>
+        </p:nvSpPr>
+        <p:spPr>
+          <a:xfrm>
+            <a:off x="457200" y="4169664"/>
+            <a:ext cx="64008" cy="841248"/>
+          </a:xfrm>
+          <a:prstGeom prst="rect">
+            <a:avLst/>
+          </a:prstGeom>
+          <a:solidFill>
+            <a:srgbClr val="C8372D"/>
+          </a:solidFill>
+          <a:ln/>
+        </p:spPr>
+      </p:sp>
+      <p:sp>
+        <p:nvSpPr>
+          <p:cNvPr id="23" name="Text 21"/>
+          <p:cNvSpPr/>
+          <p:nvPr/>
+        </p:nvSpPr>
+        <p:spPr>
+          <a:xfrm>
+            <a:off x="640080" y="4261104"/>
+            <a:ext cx="457200" cy="457200"/>
+          </a:xfrm>
+          <a:prstGeom prst="rect">
+            <a:avLst/>
+          </a:prstGeom>
+          <a:noFill/>
+          <a:ln/>
+        </p:spPr>
+        <p:txBody>
+          <a:bodyPr wrap="square" rtlCol="0" anchor="ctr"/>
+          <a:lstStyle/>
+          <a:p>
+            <a:pPr algn="ctr" indent="0" marL="0">
+              <a:buNone/>
+            </a:pPr>
+            <a:r>
+              <a:rPr lang="en-US" sz="2000" dirty="0">
+                <a:solidFill>
+                  <a:srgbClr val="C8372D"/>
+                </a:solidFill>
+                <a:latin typeface="Calibri" pitchFamily="34" charset="0"/>
+                <a:ea typeface="Calibri" pitchFamily="34" charset="-122"/>
+                <a:cs typeface="Calibri" pitchFamily="34" charset="-120"/>
+              </a:rPr>
+              <a:t>▶</a:t>
+            </a:r>
+            <a:endParaRPr lang="en-US" sz="2000" dirty="0"/>
+          </a:p>
+        </p:txBody>
+      </p:sp>
+      <p:sp>
+        <p:nvSpPr>
+          <p:cNvPr id="24" name="Text 22"/>
+          <p:cNvSpPr/>
+          <p:nvPr/>
+        </p:nvSpPr>
+        <p:spPr>
+          <a:xfrm>
+            <a:off x="1188720" y="4242816"/>
+            <a:ext cx="7132320" cy="411480"/>
+          </a:xfrm>
+          <a:prstGeom prst="rect">
+            <a:avLst/>
+          </a:prstGeom>
+          <a:noFill/>
+          <a:ln/>
+        </p:spPr>
+        <p:txBody>
+          <a:bodyPr wrap="square" rtlCol="0" anchor="ctr"/>
+          <a:lstStyle/>
+          <a:p>
+            <a:pPr indent="0" marL="0">
+              <a:buNone/>
+            </a:pPr>
+            <a:r>
+              <a:rPr lang="en-US" sz="1400" b="1" dirty="0">
+                <a:solidFill>
+                  <a:srgbClr val="1B2A4A"/>
+                </a:solidFill>
+                <a:latin typeface="Calibri" pitchFamily="34" charset="0"/>
+                <a:ea typeface="Calibri" pitchFamily="34" charset="-122"/>
+                <a:cs typeface="Calibri" pitchFamily="34" charset="-120"/>
+              </a:rPr>
+              <a:t>Graphing Linear Equations</a:t>
+            </a:r>
+            <a:endParaRPr lang="en-US" sz="1400" dirty="0"/>
+          </a:p>
+        </p:txBody>
+      </p:sp>
+      <p:sp>
+        <p:nvSpPr>
+          <p:cNvPr id="25" name="Text 23"/>
+          <p:cNvSpPr/>
+          <p:nvPr/>
+        </p:nvSpPr>
+        <p:spPr>
+          <a:xfrm>
+            <a:off x="1188720" y="4626864"/>
+            <a:ext cx="7132320" cy="320040"/>
+          </a:xfrm>
+          <a:prstGeom prst="rect">
+            <a:avLst/>
+          </a:prstGeom>
+          <a:noFill/>
+          <a:ln/>
+        </p:spPr>
+        <p:txBody>
+          <a:bodyPr wrap="square" rtlCol="0" anchor="ctr"/>
+          <a:lstStyle/>
+          <a:p>
+            <a:pPr indent="0" marL="0">
+              <a:buNone/>
+            </a:pPr>
+            <a:r>
+              <a:rPr lang="en-US" sz="1100" dirty="0">
+                <a:solidFill>
+                  <a:srgbClr val="6B6660"/>
+                </a:solidFill>
+                <a:latin typeface="Calibri" pitchFamily="34" charset="0"/>
+                <a:ea typeface="Calibri" pitchFamily="34" charset="-122"/>
+                <a:cs typeface="Calibri" pitchFamily="34" charset="-120"/>
+              </a:rPr>
+              <a:t>Math Antics  •  10 min</a:t>
+            </a:r>
+            <a:endParaRPr lang="en-US" sz="1100" dirty="0"/>
           </a:p>
         </p:txBody>
       </p:sp>
